--- a/decks/name-the-need-lesson-v2.pptx
+++ b/decks/name-the-need-lesson-v2.pptx
@@ -17,6 +17,7 @@
     <p:sldId id="265" r:id="rId17"/>
     <p:sldId id="266" r:id="rId18"/>
     <p:sldId id="267" r:id="rId19"/>
+    <p:sldId id="268" r:id="rId20"/>
   </p:sldIdLst>
   <p:sldSz cx="12192000" cy="6858000" type="screen4x3"/>
   <p:notesSz cx="6858000" cy="9144000"/>
@@ -513,7 +514,77 @@
           <a:lstStyle/>
           <a:p>
             <a:r>
-              <a:t>This page and the next three are hidden. They stay in the deck for you and are skipped when you present.</a:t>
+              <a:t>This page is hidden and skipped when you present. The full plan, care notes and research are on the hidden pages at the end of the deck, if you want them.</a:t>
+            </a:r>
+          </a:p>
+        </p:txBody>
+      </p:sp>
+      <p:sp>
+        <p:nvSpPr>
+          <p:cNvPr id="4" name="Slide Number Placeholder 3"/>
+          <p:cNvSpPr>
+            <a:spLocks noGrp="1"/>
+          </p:cNvSpPr>
+          <p:nvPr>
+            <p:ph type="sldNum" idx="5" sz="quarter"/>
+          </p:nvPr>
+        </p:nvSpPr>
+        <p:spPr/>
+      </p:sp>
+    </p:spTree>
+  </p:cSld>
+  <p:clrMapOvr>
+    <a:masterClrMapping/>
+  </p:clrMapOvr>
+</p:notes>
+</file>
+
+<file path=ppt/notesSlides/notesSlide10.xml><?xml version="1.0" encoding="utf-8"?>
+<p:notes xmlns:a="http://schemas.openxmlformats.org/drawingml/2006/main" xmlns:p="http://schemas.openxmlformats.org/presentationml/2006/main" xmlns:r="http://schemas.openxmlformats.org/officeDocument/2006/relationships">
+  <p:cSld>
+    <p:spTree>
+      <p:nvGrpSpPr>
+        <p:cNvPr id="1" name=""/>
+        <p:cNvGrpSpPr/>
+        <p:nvPr/>
+      </p:nvGrpSpPr>
+      <p:grpSpPr>
+        <a:xfrm>
+          <a:off x="0" y="0"/>
+          <a:ext cx="0" cy="0"/>
+          <a:chOff x="0" y="0"/>
+          <a:chExt cx="0" cy="0"/>
+        </a:xfrm>
+      </p:grpSpPr>
+      <p:sp>
+        <p:nvSpPr>
+          <p:cNvPr id="2" name="Slide Image Placeholder 1"/>
+          <p:cNvSpPr>
+            <a:spLocks noGrp="1"/>
+          </p:cNvSpPr>
+          <p:nvPr>
+            <p:ph type="sldImg" idx="2"/>
+          </p:nvPr>
+        </p:nvSpPr>
+        <p:spPr/>
+      </p:sp>
+      <p:sp>
+        <p:nvSpPr>
+          <p:cNvPr id="3" name="Notes Placeholder 2"/>
+          <p:cNvSpPr>
+            <a:spLocks noGrp="1"/>
+          </p:cNvSpPr>
+          <p:nvPr>
+            <p:ph type="body" idx="3" sz="quarter"/>
+          </p:nvPr>
+        </p:nvSpPr>
+        <p:spPr/>
+        <p:txBody>
+          <a:bodyPr/>
+          <a:lstStyle/>
+          <a:p>
+            <a:r>
+              <a:t>If you want more: this page and the next three are hidden and skipped when you present.</a:t>
             </a:r>
           </a:p>
         </p:txBody>
@@ -4165,7 +4236,7 @@
                 </a:solidFill>
                 <a:latin typeface="Inter Tight"/>
               </a:rPr>
-              <a:t>TEACHER PAGE  ·  skipped when you present  ·  Lesson plan</a:t>
+              <a:t>TEACHER PAGE  ·  skipped when you present  ·  Before you start</a:t>
             </a:r>
           </a:p>
         </p:txBody>
@@ -4256,8 +4327,8 @@
         </p:nvSpPr>
         <p:spPr>
           <a:xfrm>
-            <a:off x="548640" y="1828800"/>
-            <a:ext cx="5120640" cy="4389120"/>
+            <a:off x="548640" y="2011680"/>
+            <a:ext cx="11064240" cy="4206240"/>
           </a:xfrm>
           <a:prstGeom prst="rect">
             <a:avLst/>
@@ -4272,43 +4343,43 @@
           <a:p>
             <a:pPr algn="l">
               <a:spcAft>
-                <a:spcPts val="675"/>
-              </a:spcAft>
-            </a:pPr>
-            <a:r>
-              <a:rPr sz="1100" b="1" i="0">
+                <a:spcPts val="900"/>
+              </a:spcAft>
+            </a:pPr>
+            <a:r>
+              <a:rPr sz="1200" b="1" i="0">
                 <a:solidFill>
                   <a:srgbClr val="0B2D5B"/>
                 </a:solidFill>
                 <a:latin typeface="Inter Tight"/>
               </a:rPr>
-              <a:t>GOAL</a:t>
-            </a:r>
-          </a:p>
-          <a:p>
-            <a:pPr algn="l">
-              <a:spcAft>
-                <a:spcPts val="675"/>
-              </a:spcAft>
-            </a:pPr>
-            <a:r>
-              <a:rPr sz="1500" b="0" i="0">
+              <a:t>BEFORE YOU START</a:t>
+            </a:r>
+          </a:p>
+          <a:p>
+            <a:pPr algn="l">
+              <a:spcAft>
+                <a:spcPts val="900"/>
+              </a:spcAft>
+            </a:pPr>
+            <a:r>
+              <a:rPr sz="2000" b="0" i="0">
                 <a:solidFill>
                   <a:srgbClr val="1C1B19"/>
                 </a:solidFill>
                 <a:latin typeface="Source Serif 4"/>
               </a:rPr>
-              <a:t>Students can explain why putting a precise word to a feeling helps (naming turns the alarm down), connect a feeling to the need underneath it, and try the Feeling. Need. Request. steps on something small. Discussion stays on made-up characters; nobody has to share their own feelings.</a:t>
-            </a:r>
-          </a:p>
-          <a:p>
-            <a:pPr algn="l">
-              <a:spcAft>
-                <a:spcPts val="675"/>
-              </a:spcAft>
-            </a:pPr>
-            <a:r>
-              <a:rPr sz="1500" b="0" i="0">
+              <a:t>Students learn that putting a precise word on a feeling turns the alarm down, and practice Feeling, Need, Request on something small. Bring index cards, keep it on the made-up characters, and let "pass" be a full answer in the check-in.</a:t>
+            </a:r>
+          </a:p>
+          <a:p>
+            <a:pPr algn="l">
+              <a:spcAft>
+                <a:spcPts val="900"/>
+              </a:spcAft>
+            </a:pPr>
+            <a:r>
+              <a:rPr sz="2000" b="0" i="0">
                 <a:solidFill>
                   <a:srgbClr val="1C1B19"/>
                 </a:solidFill>
@@ -4320,327 +4391,33 @@
           <a:p>
             <a:pPr algn="l">
               <a:spcAft>
-                <a:spcPts val="675"/>
-              </a:spcAft>
-            </a:pPr>
-            <a:r>
-              <a:rPr sz="1100" b="1" i="0">
+                <a:spcPts val="900"/>
+              </a:spcAft>
+            </a:pPr>
+            <a:r>
+              <a:rPr sz="1200" b="1" i="0">
                 <a:solidFill>
                   <a:srgbClr val="0B2D5B"/>
                 </a:solidFill>
                 <a:latin typeface="Inter Tight"/>
               </a:rPr>
-              <a:t>MATERIALS</a:t>
-            </a:r>
-          </a:p>
-          <a:p>
-            <a:pPr algn="l">
-              <a:spcAft>
-                <a:spcPts val="675"/>
-              </a:spcAft>
-            </a:pPr>
-            <a:r>
-              <a:rPr sz="1500" b="0" i="0">
+              <a:t>EVERY STUDENT IN THE ROOM</a:t>
+            </a:r>
+          </a:p>
+          <a:p>
+            <a:pPr algn="l">
+              <a:spcAft>
+                <a:spcPts val="900"/>
+              </a:spcAft>
+            </a:pPr>
+            <a:r>
+              <a:rPr sz="2000" b="0" i="0">
                 <a:solidFill>
                   <a:srgbClr val="1C1B19"/>
                 </a:solidFill>
                 <a:latin typeface="Source Serif 4"/>
               </a:rPr>
-              <a:t>Index cards for the private "I feel ___ because I need ___"</a:t>
-            </a:r>
-          </a:p>
-          <a:p>
-            <a:pPr algn="l">
-              <a:spcAft>
-                <a:spcPts val="675"/>
-              </a:spcAft>
-            </a:pPr>
-            <a:r>
-              <a:rPr sz="1500" b="0" i="0">
-                <a:solidFill>
-                  <a:srgbClr val="1C1B19"/>
-                </a:solidFill>
-                <a:latin typeface="Source Serif 4"/>
-              </a:rPr>
-              <a:t>Optional: the word banks from the student page, on screen or printed</a:t>
-            </a:r>
-          </a:p>
-          <a:p>
-            <a:pPr algn="l">
-              <a:spcAft>
-                <a:spcPts val="675"/>
-              </a:spcAft>
-            </a:pPr>
-            <a:r>
-              <a:rPr sz="1500" b="0" i="0">
-                <a:solidFill>
-                  <a:srgbClr val="1C1B19"/>
-                </a:solidFill>
-                <a:latin typeface="Source Serif 4"/>
-              </a:rPr>
-              <a:t>The student page link (last slide) to share after advisory</a:t>
-            </a:r>
-          </a:p>
-        </p:txBody>
-      </p:sp>
-      <p:sp>
-        <p:nvSpPr>
-          <p:cNvPr id="7" name="TextBox 6"/>
-          <p:cNvSpPr txBox="1"/>
-          <p:nvPr/>
-        </p:nvSpPr>
-        <p:spPr>
-          <a:xfrm>
-            <a:off x="6126480" y="1828800"/>
-            <a:ext cx="5486400" cy="4389120"/>
-          </a:xfrm>
-          <a:prstGeom prst="rect">
-            <a:avLst/>
-          </a:prstGeom>
-          <a:noFill/>
-        </p:spPr>
-        <p:txBody>
-          <a:bodyPr wrap="square" anchor="t" lIns="0" rIns="0" tIns="0" bIns="0">
-            <a:spAutoFit/>
-          </a:bodyPr>
-          <a:lstStyle/>
-          <a:p>
-            <a:pPr algn="l">
-              <a:spcAft>
-                <a:spcPts val="630"/>
-              </a:spcAft>
-            </a:pPr>
-            <a:r>
-              <a:rPr sz="1100" b="1" i="0">
-                <a:solidFill>
-                  <a:srgbClr val="0B2D5B"/>
-                </a:solidFill>
-                <a:latin typeface="Inter Tight"/>
-              </a:rPr>
-              <a:t>FLOW</a:t>
-            </a:r>
-          </a:p>
-          <a:p>
-            <a:pPr algn="l">
-              <a:spcAft>
-                <a:spcPts val="630"/>
-              </a:spcAft>
-            </a:pPr>
-            <a:r>
-              <a:rPr sz="1300" b="1" i="0">
-                <a:solidFill>
-                  <a:srgbClr val="F47B20"/>
-                </a:solidFill>
-                <a:latin typeface="Inter Tight"/>
-              </a:rPr>
-              <a:t>3 min   </a:t>
-            </a:r>
-            <a:r>
-              <a:rPr sz="1400" b="0" i="0">
-                <a:solidFill>
-                  <a:srgbClr val="1C1B19"/>
-                </a:solidFill>
-                <a:latin typeface="Source Serif 4"/>
-              </a:rPr>
-              <a:t>One-word check-in, no "fine" (go around, pass allowed)</a:t>
-            </a:r>
-          </a:p>
-          <a:p>
-            <a:pPr algn="l">
-              <a:spcAft>
-                <a:spcPts val="630"/>
-              </a:spcAft>
-            </a:pPr>
-            <a:r>
-              <a:rPr sz="1300" b="1" i="0">
-                <a:solidFill>
-                  <a:srgbClr val="F47B20"/>
-                </a:solidFill>
-                <a:latin typeface="Inter Tight"/>
-              </a:rPr>
-              <a:t>3 min   </a:t>
-            </a:r>
-            <a:r>
-              <a:rPr sz="1400" b="0" i="0">
-                <a:solidFill>
-                  <a:srgbClr val="1C1B19"/>
-                </a:solidFill>
-                <a:latin typeface="Source Serif 4"/>
-              </a:rPr>
-              <a:t>What naming does in your brain</a:t>
-            </a:r>
-          </a:p>
-          <a:p>
-            <a:pPr algn="l">
-              <a:spcAft>
-                <a:spcPts val="630"/>
-              </a:spcAft>
-            </a:pPr>
-            <a:r>
-              <a:rPr sz="1300" b="1" i="0">
-                <a:solidFill>
-                  <a:srgbClr val="F47B20"/>
-                </a:solidFill>
-                <a:latin typeface="Inter Tight"/>
-              </a:rPr>
-              <a:t>2 min   </a:t>
-            </a:r>
-            <a:r>
-              <a:rPr sz="1400" b="0" i="0">
-                <a:solidFill>
-                  <a:srgbClr val="1C1B19"/>
-                </a:solidFill>
-                <a:latin typeface="Source Serif 4"/>
-              </a:rPr>
-              <a:t>Seven needs everyone has</a:t>
-            </a:r>
-          </a:p>
-          <a:p>
-            <a:pPr algn="l">
-              <a:spcAft>
-                <a:spcPts val="630"/>
-              </a:spcAft>
-            </a:pPr>
-            <a:r>
-              <a:rPr sz="1300" b="1" i="0">
-                <a:solidFill>
-                  <a:srgbClr val="F47B20"/>
-                </a:solidFill>
-                <a:latin typeface="Inter Tight"/>
-              </a:rPr>
-              <a:t>5 min   </a:t>
-            </a:r>
-            <a:r>
-              <a:rPr sz="1400" b="0" i="0">
-                <a:solidFill>
-                  <a:srgbClr val="1C1B19"/>
-                </a:solidFill>
-                <a:latin typeface="Source Serif 4"/>
-              </a:rPr>
-              <a:t>Name that need (stories, silent pick, then share)</a:t>
-            </a:r>
-          </a:p>
-          <a:p>
-            <a:pPr algn="l">
-              <a:spcAft>
-                <a:spcPts val="630"/>
-              </a:spcAft>
-            </a:pPr>
-            <a:r>
-              <a:rPr sz="1300" b="1" i="0">
-                <a:solidFill>
-                  <a:srgbClr val="F47B20"/>
-                </a:solidFill>
-                <a:latin typeface="Inter Tight"/>
-              </a:rPr>
-              <a:t>3 min   </a:t>
-            </a:r>
-            <a:r>
-              <a:rPr sz="1400" b="0" i="0">
-                <a:solidFill>
-                  <a:srgbClr val="1C1B19"/>
-                </a:solidFill>
-                <a:latin typeface="Source Serif 4"/>
-              </a:rPr>
-              <a:t>Feeling or thought in disguise? (thumbs vote)</a:t>
-            </a:r>
-          </a:p>
-          <a:p>
-            <a:pPr algn="l">
-              <a:spcAft>
-                <a:spcPts val="630"/>
-              </a:spcAft>
-            </a:pPr>
-            <a:r>
-              <a:rPr sz="1300" b="1" i="0">
-                <a:solidFill>
-                  <a:srgbClr val="F47B20"/>
-                </a:solidFill>
-                <a:latin typeface="Inter Tight"/>
-              </a:rPr>
-              <a:t>2 min   </a:t>
-            </a:r>
-            <a:r>
-              <a:rPr sz="1400" b="0" i="0">
-                <a:solidFill>
-                  <a:srgbClr val="1C1B19"/>
-                </a:solidFill>
-                <a:latin typeface="Source Serif 4"/>
-              </a:rPr>
-              <a:t>Feeling. Need. Request.</a:t>
-            </a:r>
-          </a:p>
-          <a:p>
-            <a:pPr algn="l">
-              <a:spcAft>
-                <a:spcPts val="630"/>
-              </a:spcAft>
-            </a:pPr>
-            <a:r>
-              <a:rPr sz="1300" b="1" i="0">
-                <a:solidFill>
-                  <a:srgbClr val="F47B20"/>
-                </a:solidFill>
-                <a:latin typeface="Inter Tight"/>
-              </a:rPr>
-              <a:t>2 min   </a:t>
-            </a:r>
-            <a:r>
-              <a:rPr sz="1400" b="0" i="0">
-                <a:solidFill>
-                  <a:srgbClr val="1C1B19"/>
-                </a:solidFill>
-                <a:latin typeface="Source Serif 4"/>
-              </a:rPr>
-              <a:t>I feel ___ because I need ___ (private card), and the student page</a:t>
-            </a:r>
-          </a:p>
-          <a:p>
-            <a:pPr algn="l">
-              <a:spcAft>
-                <a:spcPts val="630"/>
-              </a:spcAft>
-            </a:pPr>
-            <a:r>
-              <a:rPr sz="1400" b="0" i="0">
-                <a:solidFill>
-                  <a:srgbClr val="1C1B19"/>
-                </a:solidFill>
-                <a:latin typeface="Source Serif 4"/>
-              </a:rPr>
-              <a:t/>
-            </a:r>
-          </a:p>
-          <a:p>
-            <a:pPr algn="l">
-              <a:spcAft>
-                <a:spcPts val="630"/>
-              </a:spcAft>
-            </a:pPr>
-            <a:r>
-              <a:rPr sz="1100" b="1" i="0">
-                <a:solidFill>
-                  <a:srgbClr val="0B2D5B"/>
-                </a:solidFill>
-                <a:latin typeface="Inter Tight"/>
-              </a:rPr>
-              <a:t>SHORT ON TIME (10-MINUTE CHECK-IN)</a:t>
-            </a:r>
-          </a:p>
-          <a:p>
-            <a:pPr algn="l">
-              <a:spcAft>
-                <a:spcPts val="630"/>
-              </a:spcAft>
-            </a:pPr>
-            <a:r>
-              <a:rPr sz="1400" b="0" i="0">
-                <a:solidFill>
-                  <a:srgbClr val="1C1B19"/>
-                </a:solidFill>
-                <a:latin typeface="Source Serif 4"/>
-              </a:rPr>
-              <a:t>One-word check-in (3), Name that need with one or two stories (5), I feel ___ because I need ___ on a private card, and the student page (2).</a:t>
+              <a:t>Any language counts for naming a feeling; when you read Tuan's story, keep your eyes off the room, since some students translate for family or help with bills.</a:t>
             </a:r>
           </a:p>
         </p:txBody>
@@ -4654,6 +4431,2276 @@
 </file>
 
 <file path=ppt/slides/slide10.xml><?xml version="1.0" encoding="utf-8"?>
+<p:sld xmlns:a="http://schemas.openxmlformats.org/drawingml/2006/main" xmlns:p="http://schemas.openxmlformats.org/presentationml/2006/main" xmlns:r="http://schemas.openxmlformats.org/officeDocument/2006/relationships" show="0">
+  <p:cSld>
+    <p:bg>
+      <p:bgPr>
+        <a:solidFill>
+          <a:srgbClr val="EEEBE4"/>
+        </a:solidFill>
+        <a:effectLst/>
+      </p:bgPr>
+    </p:bg>
+    <p:spTree>
+      <p:nvGrpSpPr>
+        <p:cNvPr id="1" name=""/>
+        <p:cNvGrpSpPr/>
+        <p:nvPr/>
+      </p:nvGrpSpPr>
+      <p:grpSpPr/>
+      <p:sp>
+        <p:nvSpPr>
+          <p:cNvPr id="2" name="Rectangle 1"/>
+          <p:cNvSpPr/>
+          <p:nvPr/>
+        </p:nvSpPr>
+        <p:spPr>
+          <a:xfrm>
+            <a:off x="0" y="0"/>
+            <a:ext cx="12191695" cy="384048"/>
+          </a:xfrm>
+          <a:prstGeom prst="rect">
+            <a:avLst/>
+          </a:prstGeom>
+          <a:solidFill>
+            <a:srgbClr val="0B2D5B"/>
+          </a:solidFill>
+          <a:ln>
+            <a:noFill/>
+          </a:ln>
+          <a:effectLst/>
+        </p:spPr>
+        <p:style>
+          <a:lnRef idx="1">
+            <a:schemeClr val="accent1"/>
+          </a:lnRef>
+          <a:fillRef idx="3">
+            <a:schemeClr val="accent1"/>
+          </a:fillRef>
+          <a:effectRef idx="2">
+            <a:schemeClr val="accent1"/>
+          </a:effectRef>
+          <a:fontRef idx="minor">
+            <a:schemeClr val="lt1"/>
+          </a:fontRef>
+        </p:style>
+        <p:txBody>
+          <a:bodyPr rtlCol="0" anchor="ctr"/>
+          <a:lstStyle/>
+          <a:p>
+            <a:pPr algn="ctr"/>
+          </a:p>
+        </p:txBody>
+      </p:sp>
+      <p:sp>
+        <p:nvSpPr>
+          <p:cNvPr id="3" name="TextBox 2"/>
+          <p:cNvSpPr txBox="1"/>
+          <p:nvPr/>
+        </p:nvSpPr>
+        <p:spPr>
+          <a:xfrm>
+            <a:off x="548640" y="100584"/>
+            <a:ext cx="10972800" cy="274320"/>
+          </a:xfrm>
+          <a:prstGeom prst="rect">
+            <a:avLst/>
+          </a:prstGeom>
+          <a:noFill/>
+        </p:spPr>
+        <p:txBody>
+          <a:bodyPr wrap="square" anchor="t" lIns="0" rIns="0" tIns="0" bIns="0">
+            <a:spAutoFit/>
+          </a:bodyPr>
+          <a:lstStyle/>
+          <a:p>
+            <a:pPr algn="l">
+              <a:spcAft>
+                <a:spcPts val="495"/>
+              </a:spcAft>
+            </a:pPr>
+            <a:r>
+              <a:rPr sz="1100" b="1" i="0">
+                <a:solidFill>
+                  <a:srgbClr val="FFFFFF"/>
+                </a:solidFill>
+                <a:latin typeface="Inter Tight"/>
+              </a:rPr>
+              <a:t>TEACHER PAGE  ·  skipped when you present  ·  Lesson plan</a:t>
+            </a:r>
+          </a:p>
+        </p:txBody>
+      </p:sp>
+      <p:sp>
+        <p:nvSpPr>
+          <p:cNvPr id="4" name="TextBox 3"/>
+          <p:cNvSpPr txBox="1"/>
+          <p:nvPr/>
+        </p:nvSpPr>
+        <p:spPr>
+          <a:xfrm>
+            <a:off x="548640" y="685800"/>
+            <a:ext cx="10972800" cy="731520"/>
+          </a:xfrm>
+          <a:prstGeom prst="rect">
+            <a:avLst/>
+          </a:prstGeom>
+          <a:noFill/>
+        </p:spPr>
+        <p:txBody>
+          <a:bodyPr wrap="square" anchor="t" lIns="0" rIns="0" tIns="0" bIns="0">
+            <a:spAutoFit/>
+          </a:bodyPr>
+          <a:lstStyle/>
+          <a:p>
+            <a:pPr algn="l">
+              <a:spcAft>
+                <a:spcPts val="1530"/>
+              </a:spcAft>
+            </a:pPr>
+            <a:r>
+              <a:rPr sz="3400" b="1" i="0">
+                <a:solidFill>
+                  <a:srgbClr val="1C1B19"/>
+                </a:solidFill>
+                <a:latin typeface="Source Serif 4"/>
+              </a:rPr>
+              <a:t>Name the Need</a:t>
+            </a:r>
+          </a:p>
+        </p:txBody>
+      </p:sp>
+      <p:sp>
+        <p:nvSpPr>
+          <p:cNvPr id="5" name="TextBox 4"/>
+          <p:cNvSpPr txBox="1"/>
+          <p:nvPr/>
+        </p:nvSpPr>
+        <p:spPr>
+          <a:xfrm>
+            <a:off x="548640" y="1325880"/>
+            <a:ext cx="10972800" cy="365760"/>
+          </a:xfrm>
+          <a:prstGeom prst="rect">
+            <a:avLst/>
+          </a:prstGeom>
+          <a:noFill/>
+        </p:spPr>
+        <p:txBody>
+          <a:bodyPr wrap="square" anchor="t" lIns="0" rIns="0" tIns="0" bIns="0">
+            <a:spAutoFit/>
+          </a:bodyPr>
+          <a:lstStyle/>
+          <a:p>
+            <a:pPr algn="l">
+              <a:spcAft>
+                <a:spcPts val="630"/>
+              </a:spcAft>
+            </a:pPr>
+            <a:r>
+              <a:rPr sz="1400" b="0" i="0">
+                <a:solidFill>
+                  <a:srgbClr val="5D5A54"/>
+                </a:solidFill>
+                <a:latin typeface="Inter Tight"/>
+              </a:rPr>
+              <a:t>Upper School  ·  20 minutes (fits a 30-minute advisory, with time for your opening check-in; 10-minute version below)  ·  Any grade</a:t>
+            </a:r>
+          </a:p>
+        </p:txBody>
+      </p:sp>
+      <p:sp>
+        <p:nvSpPr>
+          <p:cNvPr id="6" name="TextBox 5"/>
+          <p:cNvSpPr txBox="1"/>
+          <p:nvPr/>
+        </p:nvSpPr>
+        <p:spPr>
+          <a:xfrm>
+            <a:off x="548640" y="1828800"/>
+            <a:ext cx="5120640" cy="4389120"/>
+          </a:xfrm>
+          <a:prstGeom prst="rect">
+            <a:avLst/>
+          </a:prstGeom>
+          <a:noFill/>
+        </p:spPr>
+        <p:txBody>
+          <a:bodyPr wrap="square" anchor="t" lIns="0" rIns="0" tIns="0" bIns="0">
+            <a:spAutoFit/>
+          </a:bodyPr>
+          <a:lstStyle/>
+          <a:p>
+            <a:pPr algn="l">
+              <a:spcAft>
+                <a:spcPts val="675"/>
+              </a:spcAft>
+            </a:pPr>
+            <a:r>
+              <a:rPr sz="1100" b="1" i="0">
+                <a:solidFill>
+                  <a:srgbClr val="0B2D5B"/>
+                </a:solidFill>
+                <a:latin typeface="Inter Tight"/>
+              </a:rPr>
+              <a:t>GOAL</a:t>
+            </a:r>
+          </a:p>
+          <a:p>
+            <a:pPr algn="l">
+              <a:spcAft>
+                <a:spcPts val="675"/>
+              </a:spcAft>
+            </a:pPr>
+            <a:r>
+              <a:rPr sz="1500" b="0" i="0">
+                <a:solidFill>
+                  <a:srgbClr val="1C1B19"/>
+                </a:solidFill>
+                <a:latin typeface="Source Serif 4"/>
+              </a:rPr>
+              <a:t>Students can explain why putting a precise word to a feeling helps (naming turns the alarm down), connect a feeling to the need underneath it, and try the Feeling. Need. Request. steps on something small. Discussion stays on made-up characters; nobody has to share their own feelings.</a:t>
+            </a:r>
+          </a:p>
+          <a:p>
+            <a:pPr algn="l">
+              <a:spcAft>
+                <a:spcPts val="675"/>
+              </a:spcAft>
+            </a:pPr>
+            <a:r>
+              <a:rPr sz="1500" b="0" i="0">
+                <a:solidFill>
+                  <a:srgbClr val="1C1B19"/>
+                </a:solidFill>
+                <a:latin typeface="Source Serif 4"/>
+              </a:rPr>
+              <a:t/>
+            </a:r>
+          </a:p>
+          <a:p>
+            <a:pPr algn="l">
+              <a:spcAft>
+                <a:spcPts val="675"/>
+              </a:spcAft>
+            </a:pPr>
+            <a:r>
+              <a:rPr sz="1100" b="1" i="0">
+                <a:solidFill>
+                  <a:srgbClr val="0B2D5B"/>
+                </a:solidFill>
+                <a:latin typeface="Inter Tight"/>
+              </a:rPr>
+              <a:t>MATERIALS</a:t>
+            </a:r>
+          </a:p>
+          <a:p>
+            <a:pPr algn="l">
+              <a:spcAft>
+                <a:spcPts val="675"/>
+              </a:spcAft>
+            </a:pPr>
+            <a:r>
+              <a:rPr sz="1500" b="0" i="0">
+                <a:solidFill>
+                  <a:srgbClr val="1C1B19"/>
+                </a:solidFill>
+                <a:latin typeface="Source Serif 4"/>
+              </a:rPr>
+              <a:t>Index cards for the private "I feel ___ because I need ___"</a:t>
+            </a:r>
+          </a:p>
+          <a:p>
+            <a:pPr algn="l">
+              <a:spcAft>
+                <a:spcPts val="675"/>
+              </a:spcAft>
+            </a:pPr>
+            <a:r>
+              <a:rPr sz="1500" b="0" i="0">
+                <a:solidFill>
+                  <a:srgbClr val="1C1B19"/>
+                </a:solidFill>
+                <a:latin typeface="Source Serif 4"/>
+              </a:rPr>
+              <a:t>Optional: the word banks from the student page, on screen or printed</a:t>
+            </a:r>
+          </a:p>
+          <a:p>
+            <a:pPr algn="l">
+              <a:spcAft>
+                <a:spcPts val="675"/>
+              </a:spcAft>
+            </a:pPr>
+            <a:r>
+              <a:rPr sz="1500" b="0" i="0">
+                <a:solidFill>
+                  <a:srgbClr val="1C1B19"/>
+                </a:solidFill>
+                <a:latin typeface="Source Serif 4"/>
+              </a:rPr>
+              <a:t>The student page link (last slide) to share after advisory</a:t>
+            </a:r>
+          </a:p>
+        </p:txBody>
+      </p:sp>
+      <p:sp>
+        <p:nvSpPr>
+          <p:cNvPr id="7" name="TextBox 6"/>
+          <p:cNvSpPr txBox="1"/>
+          <p:nvPr/>
+        </p:nvSpPr>
+        <p:spPr>
+          <a:xfrm>
+            <a:off x="6126480" y="1828800"/>
+            <a:ext cx="5486400" cy="4389120"/>
+          </a:xfrm>
+          <a:prstGeom prst="rect">
+            <a:avLst/>
+          </a:prstGeom>
+          <a:noFill/>
+        </p:spPr>
+        <p:txBody>
+          <a:bodyPr wrap="square" anchor="t" lIns="0" rIns="0" tIns="0" bIns="0">
+            <a:spAutoFit/>
+          </a:bodyPr>
+          <a:lstStyle/>
+          <a:p>
+            <a:pPr algn="l">
+              <a:spcAft>
+                <a:spcPts val="630"/>
+              </a:spcAft>
+            </a:pPr>
+            <a:r>
+              <a:rPr sz="1100" b="1" i="0">
+                <a:solidFill>
+                  <a:srgbClr val="0B2D5B"/>
+                </a:solidFill>
+                <a:latin typeface="Inter Tight"/>
+              </a:rPr>
+              <a:t>FLOW</a:t>
+            </a:r>
+          </a:p>
+          <a:p>
+            <a:pPr algn="l">
+              <a:spcAft>
+                <a:spcPts val="630"/>
+              </a:spcAft>
+            </a:pPr>
+            <a:r>
+              <a:rPr sz="1300" b="1" i="0">
+                <a:solidFill>
+                  <a:srgbClr val="F47B20"/>
+                </a:solidFill>
+                <a:latin typeface="Inter Tight"/>
+              </a:rPr>
+              <a:t>3 min   </a:t>
+            </a:r>
+            <a:r>
+              <a:rPr sz="1400" b="0" i="0">
+                <a:solidFill>
+                  <a:srgbClr val="1C1B19"/>
+                </a:solidFill>
+                <a:latin typeface="Source Serif 4"/>
+              </a:rPr>
+              <a:t>One-word check-in, no "fine" (go around, pass allowed)</a:t>
+            </a:r>
+          </a:p>
+          <a:p>
+            <a:pPr algn="l">
+              <a:spcAft>
+                <a:spcPts val="630"/>
+              </a:spcAft>
+            </a:pPr>
+            <a:r>
+              <a:rPr sz="1300" b="1" i="0">
+                <a:solidFill>
+                  <a:srgbClr val="F47B20"/>
+                </a:solidFill>
+                <a:latin typeface="Inter Tight"/>
+              </a:rPr>
+              <a:t>3 min   </a:t>
+            </a:r>
+            <a:r>
+              <a:rPr sz="1400" b="0" i="0">
+                <a:solidFill>
+                  <a:srgbClr val="1C1B19"/>
+                </a:solidFill>
+                <a:latin typeface="Source Serif 4"/>
+              </a:rPr>
+              <a:t>What naming does in your brain</a:t>
+            </a:r>
+          </a:p>
+          <a:p>
+            <a:pPr algn="l">
+              <a:spcAft>
+                <a:spcPts val="630"/>
+              </a:spcAft>
+            </a:pPr>
+            <a:r>
+              <a:rPr sz="1300" b="1" i="0">
+                <a:solidFill>
+                  <a:srgbClr val="F47B20"/>
+                </a:solidFill>
+                <a:latin typeface="Inter Tight"/>
+              </a:rPr>
+              <a:t>2 min   </a:t>
+            </a:r>
+            <a:r>
+              <a:rPr sz="1400" b="0" i="0">
+                <a:solidFill>
+                  <a:srgbClr val="1C1B19"/>
+                </a:solidFill>
+                <a:latin typeface="Source Serif 4"/>
+              </a:rPr>
+              <a:t>Seven needs everyone has</a:t>
+            </a:r>
+          </a:p>
+          <a:p>
+            <a:pPr algn="l">
+              <a:spcAft>
+                <a:spcPts val="630"/>
+              </a:spcAft>
+            </a:pPr>
+            <a:r>
+              <a:rPr sz="1300" b="1" i="0">
+                <a:solidFill>
+                  <a:srgbClr val="F47B20"/>
+                </a:solidFill>
+                <a:latin typeface="Inter Tight"/>
+              </a:rPr>
+              <a:t>5 min   </a:t>
+            </a:r>
+            <a:r>
+              <a:rPr sz="1400" b="0" i="0">
+                <a:solidFill>
+                  <a:srgbClr val="1C1B19"/>
+                </a:solidFill>
+                <a:latin typeface="Source Serif 4"/>
+              </a:rPr>
+              <a:t>Name that need (stories, silent pick, then share)</a:t>
+            </a:r>
+          </a:p>
+          <a:p>
+            <a:pPr algn="l">
+              <a:spcAft>
+                <a:spcPts val="630"/>
+              </a:spcAft>
+            </a:pPr>
+            <a:r>
+              <a:rPr sz="1300" b="1" i="0">
+                <a:solidFill>
+                  <a:srgbClr val="F47B20"/>
+                </a:solidFill>
+                <a:latin typeface="Inter Tight"/>
+              </a:rPr>
+              <a:t>3 min   </a:t>
+            </a:r>
+            <a:r>
+              <a:rPr sz="1400" b="0" i="0">
+                <a:solidFill>
+                  <a:srgbClr val="1C1B19"/>
+                </a:solidFill>
+                <a:latin typeface="Source Serif 4"/>
+              </a:rPr>
+              <a:t>Feeling or thought in disguise? (thumbs vote)</a:t>
+            </a:r>
+          </a:p>
+          <a:p>
+            <a:pPr algn="l">
+              <a:spcAft>
+                <a:spcPts val="630"/>
+              </a:spcAft>
+            </a:pPr>
+            <a:r>
+              <a:rPr sz="1300" b="1" i="0">
+                <a:solidFill>
+                  <a:srgbClr val="F47B20"/>
+                </a:solidFill>
+                <a:latin typeface="Inter Tight"/>
+              </a:rPr>
+              <a:t>2 min   </a:t>
+            </a:r>
+            <a:r>
+              <a:rPr sz="1400" b="0" i="0">
+                <a:solidFill>
+                  <a:srgbClr val="1C1B19"/>
+                </a:solidFill>
+                <a:latin typeface="Source Serif 4"/>
+              </a:rPr>
+              <a:t>Feeling. Need. Request.</a:t>
+            </a:r>
+          </a:p>
+          <a:p>
+            <a:pPr algn="l">
+              <a:spcAft>
+                <a:spcPts val="630"/>
+              </a:spcAft>
+            </a:pPr>
+            <a:r>
+              <a:rPr sz="1300" b="1" i="0">
+                <a:solidFill>
+                  <a:srgbClr val="F47B20"/>
+                </a:solidFill>
+                <a:latin typeface="Inter Tight"/>
+              </a:rPr>
+              <a:t>2 min   </a:t>
+            </a:r>
+            <a:r>
+              <a:rPr sz="1400" b="0" i="0">
+                <a:solidFill>
+                  <a:srgbClr val="1C1B19"/>
+                </a:solidFill>
+                <a:latin typeface="Source Serif 4"/>
+              </a:rPr>
+              <a:t>I feel ___ because I need ___ (private card), and the student page</a:t>
+            </a:r>
+          </a:p>
+          <a:p>
+            <a:pPr algn="l">
+              <a:spcAft>
+                <a:spcPts val="630"/>
+              </a:spcAft>
+            </a:pPr>
+            <a:r>
+              <a:rPr sz="1400" b="0" i="0">
+                <a:solidFill>
+                  <a:srgbClr val="1C1B19"/>
+                </a:solidFill>
+                <a:latin typeface="Source Serif 4"/>
+              </a:rPr>
+              <a:t/>
+            </a:r>
+          </a:p>
+          <a:p>
+            <a:pPr algn="l">
+              <a:spcAft>
+                <a:spcPts val="630"/>
+              </a:spcAft>
+            </a:pPr>
+            <a:r>
+              <a:rPr sz="1100" b="1" i="0">
+                <a:solidFill>
+                  <a:srgbClr val="0B2D5B"/>
+                </a:solidFill>
+                <a:latin typeface="Inter Tight"/>
+              </a:rPr>
+              <a:t>SHORT ON TIME (10-MINUTE CHECK-IN)</a:t>
+            </a:r>
+          </a:p>
+          <a:p>
+            <a:pPr algn="l">
+              <a:spcAft>
+                <a:spcPts val="630"/>
+              </a:spcAft>
+            </a:pPr>
+            <a:r>
+              <a:rPr sz="1400" b="0" i="0">
+                <a:solidFill>
+                  <a:srgbClr val="1C1B19"/>
+                </a:solidFill>
+                <a:latin typeface="Source Serif 4"/>
+              </a:rPr>
+              <a:t>One-word check-in (3), Name that need with one or two stories (5), I feel ___ because I need ___ on a private card, and the student page (2).</a:t>
+            </a:r>
+          </a:p>
+        </p:txBody>
+      </p:sp>
+    </p:spTree>
+  </p:cSld>
+  <p:clrMapOvr>
+    <a:masterClrMapping/>
+  </p:clrMapOvr>
+</p:sld>
+</file>
+
+<file path=ppt/slides/slide11.xml><?xml version="1.0" encoding="utf-8"?>
+<p:sld xmlns:a="http://schemas.openxmlformats.org/drawingml/2006/main" xmlns:p="http://schemas.openxmlformats.org/presentationml/2006/main" xmlns:r="http://schemas.openxmlformats.org/officeDocument/2006/relationships" show="0">
+  <p:cSld>
+    <p:bg>
+      <p:bgPr>
+        <a:solidFill>
+          <a:srgbClr val="EEEBE4"/>
+        </a:solidFill>
+        <a:effectLst/>
+      </p:bgPr>
+    </p:bg>
+    <p:spTree>
+      <p:nvGrpSpPr>
+        <p:cNvPr id="1" name=""/>
+        <p:cNvGrpSpPr/>
+        <p:nvPr/>
+      </p:nvGrpSpPr>
+      <p:grpSpPr/>
+      <p:sp>
+        <p:nvSpPr>
+          <p:cNvPr id="2" name="Rectangle 1"/>
+          <p:cNvSpPr/>
+          <p:nvPr/>
+        </p:nvSpPr>
+        <p:spPr>
+          <a:xfrm>
+            <a:off x="0" y="0"/>
+            <a:ext cx="12191695" cy="384048"/>
+          </a:xfrm>
+          <a:prstGeom prst="rect">
+            <a:avLst/>
+          </a:prstGeom>
+          <a:solidFill>
+            <a:srgbClr val="0B2D5B"/>
+          </a:solidFill>
+          <a:ln>
+            <a:noFill/>
+          </a:ln>
+          <a:effectLst/>
+        </p:spPr>
+        <p:style>
+          <a:lnRef idx="1">
+            <a:schemeClr val="accent1"/>
+          </a:lnRef>
+          <a:fillRef idx="3">
+            <a:schemeClr val="accent1"/>
+          </a:fillRef>
+          <a:effectRef idx="2">
+            <a:schemeClr val="accent1"/>
+          </a:effectRef>
+          <a:fontRef idx="minor">
+            <a:schemeClr val="lt1"/>
+          </a:fontRef>
+        </p:style>
+        <p:txBody>
+          <a:bodyPr rtlCol="0" anchor="ctr"/>
+          <a:lstStyle/>
+          <a:p>
+            <a:pPr algn="ctr"/>
+          </a:p>
+        </p:txBody>
+      </p:sp>
+      <p:sp>
+        <p:nvSpPr>
+          <p:cNvPr id="3" name="TextBox 2"/>
+          <p:cNvSpPr txBox="1"/>
+          <p:nvPr/>
+        </p:nvSpPr>
+        <p:spPr>
+          <a:xfrm>
+            <a:off x="548640" y="100584"/>
+            <a:ext cx="10972800" cy="274320"/>
+          </a:xfrm>
+          <a:prstGeom prst="rect">
+            <a:avLst/>
+          </a:prstGeom>
+          <a:noFill/>
+        </p:spPr>
+        <p:txBody>
+          <a:bodyPr wrap="square" anchor="t" lIns="0" rIns="0" tIns="0" bIns="0">
+            <a:spAutoFit/>
+          </a:bodyPr>
+          <a:lstStyle/>
+          <a:p>
+            <a:pPr algn="l">
+              <a:spcAft>
+                <a:spcPts val="495"/>
+              </a:spcAft>
+            </a:pPr>
+            <a:r>
+              <a:rPr sz="1100" b="1" i="0">
+                <a:solidFill>
+                  <a:srgbClr val="FFFFFF"/>
+                </a:solidFill>
+                <a:latin typeface="Inter Tight"/>
+              </a:rPr>
+              <a:t>TEACHER PAGE  ·  skipped when you present  ·  Before you teach</a:t>
+            </a:r>
+          </a:p>
+        </p:txBody>
+      </p:sp>
+      <p:sp>
+        <p:nvSpPr>
+          <p:cNvPr id="4" name="TextBox 3"/>
+          <p:cNvSpPr txBox="1"/>
+          <p:nvPr/>
+        </p:nvSpPr>
+        <p:spPr>
+          <a:xfrm>
+            <a:off x="548640" y="685800"/>
+            <a:ext cx="10972800" cy="640080"/>
+          </a:xfrm>
+          <a:prstGeom prst="rect">
+            <a:avLst/>
+          </a:prstGeom>
+          <a:noFill/>
+        </p:spPr>
+        <p:txBody>
+          <a:bodyPr wrap="square" anchor="t" lIns="0" rIns="0" tIns="0" bIns="0">
+            <a:spAutoFit/>
+          </a:bodyPr>
+          <a:lstStyle/>
+          <a:p>
+            <a:pPr algn="l">
+              <a:spcAft>
+                <a:spcPts val="1350"/>
+              </a:spcAft>
+            </a:pPr>
+            <a:r>
+              <a:rPr sz="3000" b="1" i="0">
+                <a:solidFill>
+                  <a:srgbClr val="1C1B19"/>
+                </a:solidFill>
+                <a:latin typeface="Source Serif 4"/>
+              </a:rPr>
+              <a:t>Before you teach</a:t>
+            </a:r>
+          </a:p>
+        </p:txBody>
+      </p:sp>
+      <p:sp>
+        <p:nvSpPr>
+          <p:cNvPr id="5" name="TextBox 4"/>
+          <p:cNvSpPr txBox="1"/>
+          <p:nvPr/>
+        </p:nvSpPr>
+        <p:spPr>
+          <a:xfrm>
+            <a:off x="548640" y="1463040"/>
+            <a:ext cx="5394960" cy="4937760"/>
+          </a:xfrm>
+          <a:prstGeom prst="rect">
+            <a:avLst/>
+          </a:prstGeom>
+          <a:noFill/>
+        </p:spPr>
+        <p:txBody>
+          <a:bodyPr wrap="square" anchor="t" lIns="0" rIns="0" tIns="0" bIns="0">
+            <a:spAutoFit/>
+          </a:bodyPr>
+          <a:lstStyle/>
+          <a:p>
+            <a:pPr algn="l">
+              <a:spcAft>
+                <a:spcPts val="585"/>
+              </a:spcAft>
+            </a:pPr>
+            <a:r>
+              <a:rPr sz="1500" b="1" i="0">
+                <a:solidFill>
+                  <a:srgbClr val="1C1B19"/>
+                </a:solidFill>
+                <a:latin typeface="Source Serif 4"/>
+              </a:rPr>
+              <a:t>Keep it on the characters.</a:t>
+            </a:r>
+          </a:p>
+          <a:p>
+            <a:pPr algn="l">
+              <a:spcAft>
+                <a:spcPts val="585"/>
+              </a:spcAft>
+            </a:pPr>
+            <a:r>
+              <a:rPr sz="1300" b="0" i="0">
+                <a:solidFill>
+                  <a:srgbClr val="1C1B19"/>
+                </a:solidFill>
+                <a:latin typeface="Source Serif 4"/>
+              </a:rPr>
+              <a:t>Nobody should have to share their own feelings out loud. The stories are made-up students, not anyone in the room. If students disagree about the need, that's a good discussion: a feeling can come from more than one need.</a:t>
+            </a:r>
+          </a:p>
+          <a:p>
+            <a:pPr algn="l">
+              <a:spcAft>
+                <a:spcPts val="585"/>
+              </a:spcAft>
+            </a:pPr>
+            <a:r>
+              <a:rPr sz="1300" b="0" i="0">
+                <a:solidFill>
+                  <a:srgbClr val="1C1B19"/>
+                </a:solidFill>
+                <a:latin typeface="Source Serif 4"/>
+              </a:rPr>
+              <a:t/>
+            </a:r>
+          </a:p>
+          <a:p>
+            <a:pPr algn="l">
+              <a:spcAft>
+                <a:spcPts val="585"/>
+              </a:spcAft>
+            </a:pPr>
+            <a:r>
+              <a:rPr sz="1500" b="1" i="0">
+                <a:solidFill>
+                  <a:srgbClr val="1C1B19"/>
+                </a:solidFill>
+                <a:latin typeface="Source Serif 4"/>
+              </a:rPr>
+              <a:t>Passing is always allowed.</a:t>
+            </a:r>
+          </a:p>
+          <a:p>
+            <a:pPr algn="l">
+              <a:spcAft>
+                <a:spcPts val="585"/>
+              </a:spcAft>
+            </a:pPr>
+            <a:r>
+              <a:rPr sz="1300" b="0" i="0">
+                <a:solidFill>
+                  <a:srgbClr val="1C1B19"/>
+                </a:solidFill>
+                <a:latin typeface="Source Serif 4"/>
+              </a:rPr>
+              <a:t>In the check-in, "pass" is a full answer. Some students are having a hard week and don't want the circle to know. Move on without comment.</a:t>
+            </a:r>
+          </a:p>
+          <a:p>
+            <a:pPr algn="l">
+              <a:spcAft>
+                <a:spcPts val="585"/>
+              </a:spcAft>
+            </a:pPr>
+            <a:r>
+              <a:rPr sz="1300" b="0" i="0">
+                <a:solidFill>
+                  <a:srgbClr val="1C1B19"/>
+                </a:solidFill>
+                <a:latin typeface="Source Serif 4"/>
+              </a:rPr>
+              <a:t/>
+            </a:r>
+          </a:p>
+          <a:p>
+            <a:pPr algn="l">
+              <a:spcAft>
+                <a:spcPts val="585"/>
+              </a:spcAft>
+            </a:pPr>
+            <a:r>
+              <a:rPr sz="1500" b="1" i="0">
+                <a:solidFill>
+                  <a:srgbClr val="1C1B19"/>
+                </a:solidFill>
+                <a:latin typeface="Source Serif 4"/>
+              </a:rPr>
+              <a:t>If a word in the check-in worries you.</a:t>
+            </a:r>
+          </a:p>
+          <a:p>
+            <a:pPr algn="l">
+              <a:spcAft>
+                <a:spcPts val="585"/>
+              </a:spcAft>
+            </a:pPr>
+            <a:r>
+              <a:rPr sz="1300" b="0" i="0">
+                <a:solidFill>
+                  <a:srgbClr val="1C1B19"/>
+                </a:solidFill>
+                <a:latin typeface="Source Serif 4"/>
+              </a:rPr>
+              <a:t>If someone says "hopeless," "numb" or something heavier, don't stop the circle to ask about it. Check in privately afterward and connect them with a counselor that day. Don't ask screening questions in advisory.</a:t>
+            </a:r>
+          </a:p>
+          <a:p>
+            <a:pPr algn="l">
+              <a:spcAft>
+                <a:spcPts val="585"/>
+              </a:spcAft>
+            </a:pPr>
+            <a:r>
+              <a:rPr sz="1300" b="0" i="0">
+                <a:solidFill>
+                  <a:srgbClr val="1C1B19"/>
+                </a:solidFill>
+                <a:latin typeface="Source Serif 4"/>
+              </a:rPr>
+              <a:t/>
+            </a:r>
+          </a:p>
+        </p:txBody>
+      </p:sp>
+      <p:sp>
+        <p:nvSpPr>
+          <p:cNvPr id="6" name="TextBox 5"/>
+          <p:cNvSpPr txBox="1"/>
+          <p:nvPr/>
+        </p:nvSpPr>
+        <p:spPr>
+          <a:xfrm>
+            <a:off x="6217920" y="1463040"/>
+            <a:ext cx="5394960" cy="4937760"/>
+          </a:xfrm>
+          <a:prstGeom prst="rect">
+            <a:avLst/>
+          </a:prstGeom>
+          <a:noFill/>
+        </p:spPr>
+        <p:txBody>
+          <a:bodyPr wrap="square" anchor="t" lIns="0" rIns="0" tIns="0" bIns="0">
+            <a:spAutoFit/>
+          </a:bodyPr>
+          <a:lstStyle/>
+          <a:p>
+            <a:pPr algn="l">
+              <a:spcAft>
+                <a:spcPts val="585"/>
+              </a:spcAft>
+            </a:pPr>
+            <a:r>
+              <a:rPr sz="1500" b="1" i="0">
+                <a:solidFill>
+                  <a:srgbClr val="1C1B19"/>
+                </a:solidFill>
+                <a:latin typeface="Source Serif 4"/>
+              </a:rPr>
+              <a:t>Safety is a need too.</a:t>
+            </a:r>
+          </a:p>
+          <a:p>
+            <a:pPr algn="l">
+              <a:spcAft>
+                <a:spcPts val="585"/>
+              </a:spcAft>
+            </a:pPr>
+            <a:r>
+              <a:rPr sz="1300" b="0" i="0">
+                <a:solidFill>
+                  <a:srgbClr val="1C1B19"/>
+                </a:solidFill>
+                <a:latin typeface="Source Serif 4"/>
+              </a:rPr>
+              <a:t>If a student says a need for safety isn't being met, at home, online or in a relationship, that goes to a counselor the same day.</a:t>
+            </a:r>
+          </a:p>
+          <a:p>
+            <a:pPr algn="l">
+              <a:spcAft>
+                <a:spcPts val="585"/>
+              </a:spcAft>
+            </a:pPr>
+            <a:r>
+              <a:rPr sz="1300" b="0" i="0">
+                <a:solidFill>
+                  <a:srgbClr val="1C1B19"/>
+                </a:solidFill>
+                <a:latin typeface="Source Serif 4"/>
+              </a:rPr>
+              <a:t/>
+            </a:r>
+          </a:p>
+          <a:p>
+            <a:pPr algn="l">
+              <a:spcAft>
+                <a:spcPts val="585"/>
+              </a:spcAft>
+            </a:pPr>
+            <a:r>
+              <a:rPr sz="1500" b="1" i="0">
+                <a:solidFill>
+                  <a:srgbClr val="1C1B19"/>
+                </a:solidFill>
+                <a:latin typeface="Source Serif 4"/>
+              </a:rPr>
+              <a:t>Tuan's story may be someone's life.</a:t>
+            </a:r>
+          </a:p>
+          <a:p>
+            <a:pPr algn="l">
+              <a:spcAft>
+                <a:spcPts val="585"/>
+              </a:spcAft>
+            </a:pPr>
+            <a:r>
+              <a:rPr sz="1300" b="0" i="0">
+                <a:solidFill>
+                  <a:srgbClr val="1C1B19"/>
+                </a:solidFill>
+                <a:latin typeface="Source Serif 4"/>
+              </a:rPr>
+              <a:t>Some students translate for their families or help with bills. Don't look at anyone while reading it, and don't invite students to say it's them.</a:t>
+            </a:r>
+          </a:p>
+          <a:p>
+            <a:pPr algn="l">
+              <a:spcAft>
+                <a:spcPts val="585"/>
+              </a:spcAft>
+            </a:pPr>
+            <a:r>
+              <a:rPr sz="1300" b="0" i="0">
+                <a:solidFill>
+                  <a:srgbClr val="1C1B19"/>
+                </a:solidFill>
+                <a:latin typeface="Source Serif 4"/>
+              </a:rPr>
+              <a:t/>
+            </a:r>
+          </a:p>
+          <a:p>
+            <a:pPr algn="l">
+              <a:spcAft>
+                <a:spcPts val="585"/>
+              </a:spcAft>
+            </a:pPr>
+            <a:r>
+              <a:rPr sz="1500" b="1" i="0">
+                <a:solidFill>
+                  <a:srgbClr val="1C1B19"/>
+                </a:solidFill>
+                <a:latin typeface="Source Serif 4"/>
+              </a:rPr>
+              <a:t>Nadia's story can sting in the fall.</a:t>
+            </a:r>
+          </a:p>
+          <a:p>
+            <a:pPr algn="l">
+              <a:spcAft>
+                <a:spcPts val="585"/>
+              </a:spcAft>
+            </a:pPr>
+            <a:r>
+              <a:rPr sz="1300" b="0" i="0">
+                <a:solidFill>
+                  <a:srgbClr val="1C1B19"/>
+                </a:solidFill>
+                <a:latin typeface="Source Serif 4"/>
+              </a:rPr>
+              <a:t>College conversations at home are tense for many seniors right now. Keep it on Nadia, and treat both of her needs as real.</a:t>
+            </a:r>
+          </a:p>
+          <a:p>
+            <a:pPr algn="l">
+              <a:spcAft>
+                <a:spcPts val="585"/>
+              </a:spcAft>
+            </a:pPr>
+            <a:r>
+              <a:rPr sz="1300" b="0" i="0">
+                <a:solidFill>
+                  <a:srgbClr val="1C1B19"/>
+                </a:solidFill>
+                <a:latin typeface="Source Serif 4"/>
+              </a:rPr>
+              <a:t/>
+            </a:r>
+          </a:p>
+        </p:txBody>
+      </p:sp>
+    </p:spTree>
+  </p:cSld>
+  <p:clrMapOvr>
+    <a:masterClrMapping/>
+  </p:clrMapOvr>
+</p:sld>
+</file>
+
+<file path=ppt/slides/slide12.xml><?xml version="1.0" encoding="utf-8"?>
+<p:sld xmlns:a="http://schemas.openxmlformats.org/drawingml/2006/main" xmlns:p="http://schemas.openxmlformats.org/presentationml/2006/main" xmlns:r="http://schemas.openxmlformats.org/officeDocument/2006/relationships" show="0">
+  <p:cSld>
+    <p:bg>
+      <p:bgPr>
+        <a:solidFill>
+          <a:srgbClr val="EEEBE4"/>
+        </a:solidFill>
+        <a:effectLst/>
+      </p:bgPr>
+    </p:bg>
+    <p:spTree>
+      <p:nvGrpSpPr>
+        <p:cNvPr id="1" name=""/>
+        <p:cNvGrpSpPr/>
+        <p:nvPr/>
+      </p:nvGrpSpPr>
+      <p:grpSpPr/>
+      <p:sp>
+        <p:nvSpPr>
+          <p:cNvPr id="2" name="Rectangle 1"/>
+          <p:cNvSpPr/>
+          <p:nvPr/>
+        </p:nvSpPr>
+        <p:spPr>
+          <a:xfrm>
+            <a:off x="0" y="0"/>
+            <a:ext cx="12191695" cy="384048"/>
+          </a:xfrm>
+          <a:prstGeom prst="rect">
+            <a:avLst/>
+          </a:prstGeom>
+          <a:solidFill>
+            <a:srgbClr val="0B2D5B"/>
+          </a:solidFill>
+          <a:ln>
+            <a:noFill/>
+          </a:ln>
+          <a:effectLst/>
+        </p:spPr>
+        <p:style>
+          <a:lnRef idx="1">
+            <a:schemeClr val="accent1"/>
+          </a:lnRef>
+          <a:fillRef idx="3">
+            <a:schemeClr val="accent1"/>
+          </a:fillRef>
+          <a:effectRef idx="2">
+            <a:schemeClr val="accent1"/>
+          </a:effectRef>
+          <a:fontRef idx="minor">
+            <a:schemeClr val="lt1"/>
+          </a:fontRef>
+        </p:style>
+        <p:txBody>
+          <a:bodyPr rtlCol="0" anchor="ctr"/>
+          <a:lstStyle/>
+          <a:p>
+            <a:pPr algn="ctr"/>
+          </a:p>
+        </p:txBody>
+      </p:sp>
+      <p:sp>
+        <p:nvSpPr>
+          <p:cNvPr id="3" name="TextBox 2"/>
+          <p:cNvSpPr txBox="1"/>
+          <p:nvPr/>
+        </p:nvSpPr>
+        <p:spPr>
+          <a:xfrm>
+            <a:off x="548640" y="100584"/>
+            <a:ext cx="10972800" cy="274320"/>
+          </a:xfrm>
+          <a:prstGeom prst="rect">
+            <a:avLst/>
+          </a:prstGeom>
+          <a:noFill/>
+        </p:spPr>
+        <p:txBody>
+          <a:bodyPr wrap="square" anchor="t" lIns="0" rIns="0" tIns="0" bIns="0">
+            <a:spAutoFit/>
+          </a:bodyPr>
+          <a:lstStyle/>
+          <a:p>
+            <a:pPr algn="l">
+              <a:spcAft>
+                <a:spcPts val="495"/>
+              </a:spcAft>
+            </a:pPr>
+            <a:r>
+              <a:rPr sz="1100" b="1" i="0">
+                <a:solidFill>
+                  <a:srgbClr val="FFFFFF"/>
+                </a:solidFill>
+                <a:latin typeface="Inter Tight"/>
+              </a:rPr>
+              <a:t>TEACHER PAGE  ·  skipped when you present  ·  Every student in the room</a:t>
+            </a:r>
+          </a:p>
+        </p:txBody>
+      </p:sp>
+      <p:sp>
+        <p:nvSpPr>
+          <p:cNvPr id="4" name="TextBox 3"/>
+          <p:cNvSpPr txBox="1"/>
+          <p:nvPr/>
+        </p:nvSpPr>
+        <p:spPr>
+          <a:xfrm>
+            <a:off x="548640" y="685800"/>
+            <a:ext cx="10972800" cy="640080"/>
+          </a:xfrm>
+          <a:prstGeom prst="rect">
+            <a:avLst/>
+          </a:prstGeom>
+          <a:noFill/>
+        </p:spPr>
+        <p:txBody>
+          <a:bodyPr wrap="square" anchor="t" lIns="0" rIns="0" tIns="0" bIns="0">
+            <a:spAutoFit/>
+          </a:bodyPr>
+          <a:lstStyle/>
+          <a:p>
+            <a:pPr algn="l">
+              <a:spcAft>
+                <a:spcPts val="1350"/>
+              </a:spcAft>
+            </a:pPr>
+            <a:r>
+              <a:rPr sz="3000" b="1" i="0">
+                <a:solidFill>
+                  <a:srgbClr val="1C1B19"/>
+                </a:solidFill>
+                <a:latin typeface="Source Serif 4"/>
+              </a:rPr>
+              <a:t>Every student in the room</a:t>
+            </a:r>
+          </a:p>
+        </p:txBody>
+      </p:sp>
+      <p:sp>
+        <p:nvSpPr>
+          <p:cNvPr id="5" name="TextBox 4"/>
+          <p:cNvSpPr txBox="1"/>
+          <p:nvPr/>
+        </p:nvSpPr>
+        <p:spPr>
+          <a:xfrm>
+            <a:off x="548640" y="1325880"/>
+            <a:ext cx="10972800" cy="365760"/>
+          </a:xfrm>
+          <a:prstGeom prst="rect">
+            <a:avLst/>
+          </a:prstGeom>
+          <a:noFill/>
+        </p:spPr>
+        <p:txBody>
+          <a:bodyPr wrap="square" anchor="t" lIns="0" rIns="0" tIns="0" bIns="0">
+            <a:spAutoFit/>
+          </a:bodyPr>
+          <a:lstStyle/>
+          <a:p>
+            <a:pPr algn="l">
+              <a:spcAft>
+                <a:spcPts val="630"/>
+              </a:spcAft>
+            </a:pPr>
+            <a:r>
+              <a:rPr sz="1400" b="0" i="0">
+                <a:solidFill>
+                  <a:srgbClr val="5D5A54"/>
+                </a:solidFill>
+                <a:latin typeface="Inter Tight"/>
+              </a:rPr>
+              <a:t>Culture, family, identity, ability and money: what to keep in mind for this topic.</a:t>
+            </a:r>
+          </a:p>
+        </p:txBody>
+      </p:sp>
+      <p:sp>
+        <p:nvSpPr>
+          <p:cNvPr id="6" name="TextBox 5"/>
+          <p:cNvSpPr txBox="1"/>
+          <p:nvPr/>
+        </p:nvSpPr>
+        <p:spPr>
+          <a:xfrm>
+            <a:off x="548640" y="1828800"/>
+            <a:ext cx="5394960" cy="4572000"/>
+          </a:xfrm>
+          <a:prstGeom prst="rect">
+            <a:avLst/>
+          </a:prstGeom>
+          <a:noFill/>
+        </p:spPr>
+        <p:txBody>
+          <a:bodyPr wrap="square" anchor="t" lIns="0" rIns="0" tIns="0" bIns="0">
+            <a:spAutoFit/>
+          </a:bodyPr>
+          <a:lstStyle/>
+          <a:p>
+            <a:pPr algn="l">
+              <a:spcAft>
+                <a:spcPts val="585"/>
+              </a:spcAft>
+            </a:pPr>
+            <a:r>
+              <a:rPr sz="1500" b="1" i="0">
+                <a:solidFill>
+                  <a:srgbClr val="1C1B19"/>
+                </a:solidFill>
+                <a:latin typeface="Source Serif 4"/>
+              </a:rPr>
+              <a:t>Feelings in more than one language.</a:t>
+            </a:r>
+          </a:p>
+          <a:p>
+            <a:pPr algn="l">
+              <a:spcAft>
+                <a:spcPts val="585"/>
+              </a:spcAft>
+            </a:pPr>
+            <a:r>
+              <a:rPr sz="1300" b="0" i="0">
+                <a:solidFill>
+                  <a:srgbClr val="1C1B19"/>
+                </a:solidFill>
+                <a:latin typeface="Source Serif 4"/>
+              </a:rPr>
+              <a:t>Some students think about feelings in a language other than English, or have a family word that English doesn't. Say clearly that any language counts in the check-in and on the card. Tuan's story makes room for students who interpret for their families.</a:t>
+            </a:r>
+          </a:p>
+          <a:p>
+            <a:pPr algn="l">
+              <a:spcAft>
+                <a:spcPts val="585"/>
+              </a:spcAft>
+            </a:pPr>
+            <a:r>
+              <a:rPr sz="1300" b="0" i="0">
+                <a:solidFill>
+                  <a:srgbClr val="1C1B19"/>
+                </a:solidFill>
+                <a:latin typeface="Source Serif 4"/>
+              </a:rPr>
+              <a:t/>
+            </a:r>
+          </a:p>
+          <a:p>
+            <a:pPr algn="l">
+              <a:spcAft>
+                <a:spcPts val="585"/>
+              </a:spcAft>
+            </a:pPr>
+            <a:r>
+              <a:rPr sz="1500" b="1" i="0">
+                <a:solidFill>
+                  <a:srgbClr val="1C1B19"/>
+                </a:solidFill>
+                <a:latin typeface="Source Serif 4"/>
+              </a:rPr>
+              <a:t>Which feelings get said out loud varies.</a:t>
+            </a:r>
+          </a:p>
+          <a:p>
+            <a:pPr algn="l">
+              <a:spcAft>
+                <a:spcPts val="585"/>
+              </a:spcAft>
+            </a:pPr>
+            <a:r>
+              <a:rPr sz="1300" b="0" i="0">
+                <a:solidFill>
+                  <a:srgbClr val="1C1B19"/>
+                </a:solidFill>
+                <a:latin typeface="Source Serif 4"/>
+              </a:rPr>
+              <a:t>The Tsai study shows that cultures value different feelings (excited versus calm), and families differ on which feelings get named and to whom. Avoid "In X families" generalizations. Ask students to notice their own home's rules, privately.</a:t>
+            </a:r>
+          </a:p>
+          <a:p>
+            <a:pPr algn="l">
+              <a:spcAft>
+                <a:spcPts val="585"/>
+              </a:spcAft>
+            </a:pPr>
+            <a:r>
+              <a:rPr sz="1300" b="0" i="0">
+                <a:solidFill>
+                  <a:srgbClr val="1C1B19"/>
+                </a:solidFill>
+                <a:latin typeface="Source Serif 4"/>
+              </a:rPr>
+              <a:t/>
+            </a:r>
+          </a:p>
+          <a:p>
+            <a:pPr algn="l">
+              <a:spcAft>
+                <a:spcPts val="585"/>
+              </a:spcAft>
+            </a:pPr>
+            <a:r>
+              <a:rPr sz="1500" b="1" i="0">
+                <a:solidFill>
+                  <a:srgbClr val="1C1B19"/>
+                </a:solidFill>
+                <a:latin typeface="Source Serif 4"/>
+              </a:rPr>
+              <a:t>Naming feelings is harder for some brains.</a:t>
+            </a:r>
+          </a:p>
+          <a:p>
+            <a:pPr algn="l">
+              <a:spcAft>
+                <a:spcPts val="585"/>
+              </a:spcAft>
+            </a:pPr>
+            <a:r>
+              <a:rPr sz="1300" b="0" i="0">
+                <a:solidFill>
+                  <a:srgbClr val="1C1B19"/>
+                </a:solidFill>
+                <a:latin typeface="Source Serif 4"/>
+              </a:rPr>
+              <a:t>Some autistic students, and others, find it hard to put feelings into words or notice body signals later. That's a difference to meet with patience. The word banks, the body check (chest, stomach, jaw, shoulders) and multiple-choice options help. Don't require eye contact in the circle.</a:t>
+            </a:r>
+          </a:p>
+          <a:p>
+            <a:pPr algn="l">
+              <a:spcAft>
+                <a:spcPts val="585"/>
+              </a:spcAft>
+            </a:pPr>
+            <a:r>
+              <a:rPr sz="1300" b="0" i="0">
+                <a:solidFill>
+                  <a:srgbClr val="1C1B19"/>
+                </a:solidFill>
+                <a:latin typeface="Source Serif 4"/>
+              </a:rPr>
+              <a:t/>
+            </a:r>
+          </a:p>
+        </p:txBody>
+      </p:sp>
+      <p:sp>
+        <p:nvSpPr>
+          <p:cNvPr id="7" name="TextBox 6"/>
+          <p:cNvSpPr txBox="1"/>
+          <p:nvPr/>
+        </p:nvSpPr>
+        <p:spPr>
+          <a:xfrm>
+            <a:off x="6217920" y="1828800"/>
+            <a:ext cx="5394960" cy="4572000"/>
+          </a:xfrm>
+          <a:prstGeom prst="rect">
+            <a:avLst/>
+          </a:prstGeom>
+          <a:noFill/>
+        </p:spPr>
+        <p:txBody>
+          <a:bodyPr wrap="square" anchor="t" lIns="0" rIns="0" tIns="0" bIns="0">
+            <a:spAutoFit/>
+          </a:bodyPr>
+          <a:lstStyle/>
+          <a:p>
+            <a:pPr algn="l">
+              <a:spcAft>
+                <a:spcPts val="585"/>
+              </a:spcAft>
+            </a:pPr>
+            <a:r>
+              <a:rPr sz="1500" b="1" i="0">
+                <a:solidFill>
+                  <a:srgbClr val="1C1B19"/>
+                </a:solidFill>
+                <a:latin typeface="Source Serif 4"/>
+              </a:rPr>
+              <a:t>Family structure.</a:t>
+            </a:r>
+          </a:p>
+          <a:p>
+            <a:pPr algn="l">
+              <a:spcAft>
+                <a:spcPts val="585"/>
+              </a:spcAft>
+            </a:pPr>
+            <a:r>
+              <a:rPr sz="1300" b="0" i="0">
+                <a:solidFill>
+                  <a:srgbClr val="1C1B19"/>
+                </a:solidFill>
+                <a:latin typeface="Source Serif 4"/>
+              </a:rPr>
+              <a:t>Nadia's parents are in her story, but say "parent or caregiver" when you talk about needs at home. Students live with grandparents, one parent, two moms or two dads, in foster or kinship care, or across two homes.</a:t>
+            </a:r>
+          </a:p>
+          <a:p>
+            <a:pPr algn="l">
+              <a:spcAft>
+                <a:spcPts val="585"/>
+              </a:spcAft>
+            </a:pPr>
+            <a:r>
+              <a:rPr sz="1300" b="0" i="0">
+                <a:solidFill>
+                  <a:srgbClr val="1C1B19"/>
+                </a:solidFill>
+                <a:latin typeface="Source Serif 4"/>
+              </a:rPr>
+              <a:t/>
+            </a:r>
+          </a:p>
+          <a:p>
+            <a:pPr algn="l">
+              <a:spcAft>
+                <a:spcPts val="585"/>
+              </a:spcAft>
+            </a:pPr>
+            <a:r>
+              <a:rPr sz="1500" b="1" i="0">
+                <a:solidFill>
+                  <a:srgbClr val="1C1B19"/>
+                </a:solidFill>
+                <a:latin typeface="Source Serif 4"/>
+              </a:rPr>
+              <a:t>Rest isn't equally available.</a:t>
+            </a:r>
+          </a:p>
+          <a:p>
+            <a:pPr algn="l">
+              <a:spcAft>
+                <a:spcPts val="585"/>
+              </a:spcAft>
+            </a:pPr>
+            <a:r>
+              <a:rPr sz="1300" b="0" i="0">
+                <a:solidFill>
+                  <a:srgbClr val="1C1B19"/>
+                </a:solidFill>
+                <a:latin typeface="Source Serif 4"/>
+              </a:rPr>
+              <a:t>Marisol works weekends and Tuan helps with bills. Some students can't just take a night off. When talking about the Body need, offer small, free options and avoid implying that rest is a choice everyone has.</a:t>
+            </a:r>
+          </a:p>
+          <a:p>
+            <a:pPr algn="l">
+              <a:spcAft>
+                <a:spcPts val="585"/>
+              </a:spcAft>
+            </a:pPr>
+            <a:r>
+              <a:rPr sz="1300" b="0" i="0">
+                <a:solidFill>
+                  <a:srgbClr val="1C1B19"/>
+                </a:solidFill>
+                <a:latin typeface="Source Serif 4"/>
+              </a:rPr>
+              <a:t/>
+            </a:r>
+          </a:p>
+          <a:p>
+            <a:pPr algn="l">
+              <a:spcAft>
+                <a:spcPts val="585"/>
+              </a:spcAft>
+            </a:pPr>
+            <a:r>
+              <a:rPr sz="1500" b="1" i="0">
+                <a:solidFill>
+                  <a:srgbClr val="1C1B19"/>
+                </a:solidFill>
+                <a:latin typeface="Source Serif 4"/>
+              </a:rPr>
+              <a:t>Boys get to be hurt and lonely.</a:t>
+            </a:r>
+          </a:p>
+          <a:p>
+            <a:pPr algn="l">
+              <a:spcAft>
+                <a:spcPts val="585"/>
+              </a:spcAft>
+            </a:pPr>
+            <a:r>
+              <a:rPr sz="1300" b="0" i="0">
+                <a:solidFill>
+                  <a:srgbClr val="1C1B19"/>
+                </a:solidFill>
+                <a:latin typeface="Source Serif 4"/>
+              </a:rPr>
+              <a:t>Students hear that some feelings belong to some genders. Mix genders when giving examples, and when a student offers "hurt" or "lonely" for Andre or Tuan, treat it as an ordinary, accurate answer.</a:t>
+            </a:r>
+          </a:p>
+          <a:p>
+            <a:pPr algn="l">
+              <a:spcAft>
+                <a:spcPts val="585"/>
+              </a:spcAft>
+            </a:pPr>
+            <a:r>
+              <a:rPr sz="1300" b="0" i="0">
+                <a:solidFill>
+                  <a:srgbClr val="1C1B19"/>
+                </a:solidFill>
+                <a:latin typeface="Source Serif 4"/>
+              </a:rPr>
+              <a:t/>
+            </a:r>
+          </a:p>
+        </p:txBody>
+      </p:sp>
+    </p:spTree>
+  </p:cSld>
+  <p:clrMapOvr>
+    <a:masterClrMapping/>
+  </p:clrMapOvr>
+</p:sld>
+</file>
+
+<file path=ppt/slides/slide13.xml><?xml version="1.0" encoding="utf-8"?>
+<p:sld xmlns:a="http://schemas.openxmlformats.org/drawingml/2006/main" xmlns:p="http://schemas.openxmlformats.org/presentationml/2006/main" xmlns:r="http://schemas.openxmlformats.org/officeDocument/2006/relationships" show="0">
+  <p:cSld>
+    <p:bg>
+      <p:bgPr>
+        <a:solidFill>
+          <a:srgbClr val="EEEBE4"/>
+        </a:solidFill>
+        <a:effectLst/>
+      </p:bgPr>
+    </p:bg>
+    <p:spTree>
+      <p:nvGrpSpPr>
+        <p:cNvPr id="1" name=""/>
+        <p:cNvGrpSpPr/>
+        <p:nvPr/>
+      </p:nvGrpSpPr>
+      <p:grpSpPr/>
+      <p:sp>
+        <p:nvSpPr>
+          <p:cNvPr id="2" name="Rectangle 1"/>
+          <p:cNvSpPr/>
+          <p:nvPr/>
+        </p:nvSpPr>
+        <p:spPr>
+          <a:xfrm>
+            <a:off x="0" y="0"/>
+            <a:ext cx="12191695" cy="384048"/>
+          </a:xfrm>
+          <a:prstGeom prst="rect">
+            <a:avLst/>
+          </a:prstGeom>
+          <a:solidFill>
+            <a:srgbClr val="0B2D5B"/>
+          </a:solidFill>
+          <a:ln>
+            <a:noFill/>
+          </a:ln>
+          <a:effectLst/>
+        </p:spPr>
+        <p:style>
+          <a:lnRef idx="1">
+            <a:schemeClr val="accent1"/>
+          </a:lnRef>
+          <a:fillRef idx="3">
+            <a:schemeClr val="accent1"/>
+          </a:fillRef>
+          <a:effectRef idx="2">
+            <a:schemeClr val="accent1"/>
+          </a:effectRef>
+          <a:fontRef idx="minor">
+            <a:schemeClr val="lt1"/>
+          </a:fontRef>
+        </p:style>
+        <p:txBody>
+          <a:bodyPr rtlCol="0" anchor="ctr"/>
+          <a:lstStyle/>
+          <a:p>
+            <a:pPr algn="ctr"/>
+          </a:p>
+        </p:txBody>
+      </p:sp>
+      <p:sp>
+        <p:nvSpPr>
+          <p:cNvPr id="3" name="TextBox 2"/>
+          <p:cNvSpPr txBox="1"/>
+          <p:nvPr/>
+        </p:nvSpPr>
+        <p:spPr>
+          <a:xfrm>
+            <a:off x="548640" y="100584"/>
+            <a:ext cx="10972800" cy="274320"/>
+          </a:xfrm>
+          <a:prstGeom prst="rect">
+            <a:avLst/>
+          </a:prstGeom>
+          <a:noFill/>
+        </p:spPr>
+        <p:txBody>
+          <a:bodyPr wrap="square" anchor="t" lIns="0" rIns="0" tIns="0" bIns="0">
+            <a:spAutoFit/>
+          </a:bodyPr>
+          <a:lstStyle/>
+          <a:p>
+            <a:pPr algn="l">
+              <a:spcAft>
+                <a:spcPts val="495"/>
+              </a:spcAft>
+            </a:pPr>
+            <a:r>
+              <a:rPr sz="1100" b="1" i="0">
+                <a:solidFill>
+                  <a:srgbClr val="FFFFFF"/>
+                </a:solidFill>
+                <a:latin typeface="Inter Tight"/>
+              </a:rPr>
+              <a:t>TEACHER PAGE  ·  skipped when you present  ·  Background</a:t>
+            </a:r>
+          </a:p>
+        </p:txBody>
+      </p:sp>
+      <p:sp>
+        <p:nvSpPr>
+          <p:cNvPr id="4" name="TextBox 3"/>
+          <p:cNvSpPr txBox="1"/>
+          <p:nvPr/>
+        </p:nvSpPr>
+        <p:spPr>
+          <a:xfrm>
+            <a:off x="548640" y="685800"/>
+            <a:ext cx="10972800" cy="640080"/>
+          </a:xfrm>
+          <a:prstGeom prst="rect">
+            <a:avLst/>
+          </a:prstGeom>
+          <a:noFill/>
+        </p:spPr>
+        <p:txBody>
+          <a:bodyPr wrap="square" anchor="t" lIns="0" rIns="0" tIns="0" bIns="0">
+            <a:spAutoFit/>
+          </a:bodyPr>
+          <a:lstStyle/>
+          <a:p>
+            <a:pPr algn="l">
+              <a:spcAft>
+                <a:spcPts val="1350"/>
+              </a:spcAft>
+            </a:pPr>
+            <a:r>
+              <a:rPr sz="3000" b="1" i="0">
+                <a:solidFill>
+                  <a:srgbClr val="1C1B19"/>
+                </a:solidFill>
+                <a:latin typeface="Source Serif 4"/>
+              </a:rPr>
+              <a:t>What the research says</a:t>
+            </a:r>
+          </a:p>
+        </p:txBody>
+      </p:sp>
+      <p:sp>
+        <p:nvSpPr>
+          <p:cNvPr id="5" name="TextBox 4"/>
+          <p:cNvSpPr txBox="1"/>
+          <p:nvPr/>
+        </p:nvSpPr>
+        <p:spPr>
+          <a:xfrm>
+            <a:off x="548640" y="1463040"/>
+            <a:ext cx="5394960" cy="4937760"/>
+          </a:xfrm>
+          <a:prstGeom prst="rect">
+            <a:avLst/>
+          </a:prstGeom>
+          <a:noFill/>
+        </p:spPr>
+        <p:txBody>
+          <a:bodyPr wrap="square" anchor="t" lIns="0" rIns="0" tIns="0" bIns="0">
+            <a:spAutoFit/>
+          </a:bodyPr>
+          <a:lstStyle/>
+          <a:p>
+            <a:pPr algn="l">
+              <a:spcAft>
+                <a:spcPts val="585"/>
+              </a:spcAft>
+            </a:pPr>
+            <a:r>
+              <a:rPr sz="1300" b="0" i="0">
+                <a:solidFill>
+                  <a:srgbClr val="1C1B19"/>
+                </a:solidFill>
+                <a:latin typeface="Source Serif 4"/>
+              </a:rPr>
+              <a:t>Putting a word to the emotion in a face ("angry," "scared") turned down activity in the amygdala and turned up activity in the right ventrolateral prefrontal cortex. The two moved in opposite directions.</a:t>
+            </a:r>
+          </a:p>
+          <a:p>
+            <a:pPr algn="l">
+              <a:spcAft>
+                <a:spcPts val="585"/>
+              </a:spcAft>
+            </a:pPr>
+            <a:r>
+              <a:rPr sz="1050" b="0" i="0">
+                <a:solidFill>
+                  <a:srgbClr val="5D5A54"/>
+                </a:solidFill>
+                <a:latin typeface="Inter Tight"/>
+              </a:rPr>
+              <a:t>Lieberman et al., 2007, Psychological Science (UCLA)</a:t>
+            </a:r>
+          </a:p>
+          <a:p>
+            <a:pPr algn="l">
+              <a:spcAft>
+                <a:spcPts val="585"/>
+              </a:spcAft>
+            </a:pPr>
+            <a:r>
+              <a:rPr sz="1300" b="0" i="0">
+                <a:solidFill>
+                  <a:srgbClr val="1C1B19"/>
+                </a:solidFill>
+                <a:latin typeface="Source Serif 4"/>
+              </a:rPr>
+              <a:t>People afraid of spiders who described their feelings out loud while near one had smaller physical fear responses a week later than people who distracted themselves or tried to talk themselves out of it.</a:t>
+            </a:r>
+          </a:p>
+          <a:p>
+            <a:pPr algn="l">
+              <a:spcAft>
+                <a:spcPts val="585"/>
+              </a:spcAft>
+            </a:pPr>
+            <a:r>
+              <a:rPr sz="1050" b="0" i="0">
+                <a:solidFill>
+                  <a:srgbClr val="5D5A54"/>
+                </a:solidFill>
+                <a:latin typeface="Inter Tight"/>
+              </a:rPr>
+              <a:t>Kircanski, Lieberman and Craske, 2012, Psychological Science</a:t>
+            </a:r>
+          </a:p>
+          <a:p>
+            <a:pPr algn="l">
+              <a:spcAft>
+                <a:spcPts val="585"/>
+              </a:spcAft>
+            </a:pPr>
+            <a:r>
+              <a:rPr sz="1300" b="0" i="0">
+                <a:solidFill>
+                  <a:srgbClr val="1C1B19"/>
+                </a:solidFill>
+                <a:latin typeface="Source Serif 4"/>
+              </a:rPr>
+              <a:t>The insula tracks signals from inside the body (heartbeat, gut, breathing, muscle tension). Neuroscientist Bud Craig proposed it's where those signals become conscious feelings.</a:t>
+            </a:r>
+          </a:p>
+          <a:p>
+            <a:pPr algn="l">
+              <a:spcAft>
+                <a:spcPts val="585"/>
+              </a:spcAft>
+            </a:pPr>
+            <a:r>
+              <a:rPr sz="1050" b="0" i="0">
+                <a:solidFill>
+                  <a:srgbClr val="5D5A54"/>
+                </a:solidFill>
+                <a:latin typeface="Inter Tight"/>
+              </a:rPr>
+              <a:t>Craig, 2009, Nature Reviews Neuroscience</a:t>
+            </a:r>
+          </a:p>
+          <a:p>
+            <a:pPr algn="l">
+              <a:spcAft>
+                <a:spcPts val="585"/>
+              </a:spcAft>
+            </a:pPr>
+            <a:r>
+              <a:rPr sz="1300" b="0" i="0">
+                <a:solidFill>
+                  <a:srgbClr val="1C1B19"/>
+                </a:solidFill>
+                <a:latin typeface="Source Serif 4"/>
+              </a:rPr>
+              <a:t>People who describe emotions in more detail (emotional granularity) are less likely to binge drink, lash out or hurt themselves when upset, and report less severe anxiety and depression.</a:t>
+            </a:r>
+          </a:p>
+          <a:p>
+            <a:pPr algn="l">
+              <a:spcAft>
+                <a:spcPts val="585"/>
+              </a:spcAft>
+            </a:pPr>
+            <a:r>
+              <a:rPr sz="1050" b="0" i="0">
+                <a:solidFill>
+                  <a:srgbClr val="5D5A54"/>
+                </a:solidFill>
+                <a:latin typeface="Inter Tight"/>
+              </a:rPr>
+              <a:t>Kashdan, Barrett and McKnight, 2015, Current Directions in Psychological Science</a:t>
+            </a:r>
+          </a:p>
+        </p:txBody>
+      </p:sp>
+      <p:sp>
+        <p:nvSpPr>
+          <p:cNvPr id="6" name="TextBox 5"/>
+          <p:cNvSpPr txBox="1"/>
+          <p:nvPr/>
+        </p:nvSpPr>
+        <p:spPr>
+          <a:xfrm>
+            <a:off x="6217920" y="1463040"/>
+            <a:ext cx="5394960" cy="4937760"/>
+          </a:xfrm>
+          <a:prstGeom prst="rect">
+            <a:avLst/>
+          </a:prstGeom>
+          <a:noFill/>
+        </p:spPr>
+        <p:txBody>
+          <a:bodyPr wrap="square" anchor="t" lIns="0" rIns="0" tIns="0" bIns="0">
+            <a:spAutoFit/>
+          </a:bodyPr>
+          <a:lstStyle/>
+          <a:p>
+            <a:pPr algn="l">
+              <a:spcAft>
+                <a:spcPts val="585"/>
+              </a:spcAft>
+            </a:pPr>
+            <a:r>
+              <a:rPr sz="1300" b="0" i="0">
+                <a:solidFill>
+                  <a:srgbClr val="1C1B19"/>
+                </a:solidFill>
+                <a:latin typeface="Source Serif 4"/>
+              </a:rPr>
+              <a:t>Self-determination theory points to three needs at the core of motivation and well-being: autonomy, competence and relatedness.</a:t>
+            </a:r>
+          </a:p>
+          <a:p>
+            <a:pPr algn="l">
+              <a:spcAft>
+                <a:spcPts val="585"/>
+              </a:spcAft>
+            </a:pPr>
+            <a:r>
+              <a:rPr sz="1050" b="0" i="0">
+                <a:solidFill>
+                  <a:srgbClr val="5D5A54"/>
+                </a:solidFill>
+                <a:latin typeface="Inter Tight"/>
+              </a:rPr>
+              <a:t>Ryan and Deci, 2000, American Psychologist</a:t>
+            </a:r>
+          </a:p>
+          <a:p>
+            <a:pPr algn="l">
+              <a:spcAft>
+                <a:spcPts val="585"/>
+              </a:spcAft>
+            </a:pPr>
+            <a:r>
+              <a:rPr sz="1300" b="0" i="0">
+                <a:solidFill>
+                  <a:srgbClr val="1C1B19"/>
+                </a:solidFill>
+                <a:latin typeface="Source Serif 4"/>
+              </a:rPr>
+              <a:t>European American participants ideally wanted to feel excited more than Hong Kong Chinese participants, who valued calm more. Chinese American participants landed in between.</a:t>
+            </a:r>
+          </a:p>
+          <a:p>
+            <a:pPr algn="l">
+              <a:spcAft>
+                <a:spcPts val="585"/>
+              </a:spcAft>
+            </a:pPr>
+            <a:r>
+              <a:rPr sz="1050" b="0" i="0">
+                <a:solidFill>
+                  <a:srgbClr val="5D5A54"/>
+                </a:solidFill>
+                <a:latin typeface="Inter Tight"/>
+              </a:rPr>
+              <a:t>Tsai, Knutson and Fung, 2006, Journal of Personality and Social Psychology (Stanford)</a:t>
+            </a:r>
+          </a:p>
+          <a:p>
+            <a:pPr algn="l">
+              <a:spcAft>
+                <a:spcPts val="585"/>
+              </a:spcAft>
+            </a:pPr>
+            <a:r>
+              <a:rPr sz="1300" b="0" i="0">
+                <a:solidFill>
+                  <a:srgbClr val="1C1B19"/>
+                </a:solidFill>
+                <a:latin typeface="Source Serif 4"/>
+              </a:rPr>
+              <a:t>The seven need categories and the feeling word banks are adapted from the Feelings Inventory and Needs Inventory.</a:t>
+            </a:r>
+          </a:p>
+          <a:p>
+            <a:pPr algn="l">
+              <a:spcAft>
+                <a:spcPts val="585"/>
+              </a:spcAft>
+            </a:pPr>
+            <a:r>
+              <a:rPr sz="1050" b="0" i="0">
+                <a:solidFill>
+                  <a:srgbClr val="5D5A54"/>
+                </a:solidFill>
+                <a:latin typeface="Inter Tight"/>
+              </a:rPr>
+              <a:t>© 2005 Center for Nonviolent Communication, www.cnvc.org</a:t>
+            </a:r>
+          </a:p>
+        </p:txBody>
+      </p:sp>
+    </p:spTree>
+  </p:cSld>
+  <p:clrMapOvr>
+    <a:masterClrMapping/>
+  </p:clrMapOvr>
+</p:sld>
+</file>
+
+<file path=ppt/slides/slide2.xml><?xml version="1.0" encoding="utf-8"?>
+<p:sld xmlns:a="http://schemas.openxmlformats.org/drawingml/2006/main" xmlns:p="http://schemas.openxmlformats.org/presentationml/2006/main" xmlns:r="http://schemas.openxmlformats.org/officeDocument/2006/relationships">
+  <p:cSld>
+    <p:bg>
+      <p:bgPr>
+        <a:solidFill>
+          <a:srgbClr val="0B2D5B"/>
+        </a:solidFill>
+        <a:effectLst/>
+      </p:bgPr>
+    </p:bg>
+    <p:spTree>
+      <p:nvGrpSpPr>
+        <p:cNvPr id="1" name=""/>
+        <p:cNvGrpSpPr/>
+        <p:nvPr/>
+      </p:nvGrpSpPr>
+      <p:grpSpPr/>
+      <p:sp>
+        <p:nvSpPr>
+          <p:cNvPr id="2" name="Rectangle 1"/>
+          <p:cNvSpPr/>
+          <p:nvPr/>
+        </p:nvSpPr>
+        <p:spPr>
+          <a:xfrm>
+            <a:off x="548640" y="502920"/>
+            <a:ext cx="457200" cy="54864"/>
+          </a:xfrm>
+          <a:prstGeom prst="rect">
+            <a:avLst/>
+          </a:prstGeom>
+          <a:solidFill>
+            <a:srgbClr val="F47B20"/>
+          </a:solidFill>
+          <a:ln>
+            <a:noFill/>
+          </a:ln>
+          <a:effectLst/>
+        </p:spPr>
+        <p:style>
+          <a:lnRef idx="1">
+            <a:schemeClr val="accent1"/>
+          </a:lnRef>
+          <a:fillRef idx="3">
+            <a:schemeClr val="accent1"/>
+          </a:fillRef>
+          <a:effectRef idx="2">
+            <a:schemeClr val="accent1"/>
+          </a:effectRef>
+          <a:fontRef idx="minor">
+            <a:schemeClr val="lt1"/>
+          </a:fontRef>
+        </p:style>
+        <p:txBody>
+          <a:bodyPr rtlCol="0" anchor="ctr"/>
+          <a:lstStyle/>
+          <a:p>
+            <a:pPr algn="ctr"/>
+          </a:p>
+        </p:txBody>
+      </p:sp>
+      <p:sp>
+        <p:nvSpPr>
+          <p:cNvPr id="3" name="TextBox 2"/>
+          <p:cNvSpPr txBox="1"/>
+          <p:nvPr/>
+        </p:nvSpPr>
+        <p:spPr>
+          <a:xfrm>
+            <a:off x="1143000" y="393192"/>
+            <a:ext cx="8229600" cy="274320"/>
+          </a:xfrm>
+          <a:prstGeom prst="rect">
+            <a:avLst/>
+          </a:prstGeom>
+          <a:noFill/>
+        </p:spPr>
+        <p:txBody>
+          <a:bodyPr wrap="square" anchor="t" lIns="0" rIns="0" tIns="0" bIns="0">
+            <a:spAutoFit/>
+          </a:bodyPr>
+          <a:lstStyle/>
+          <a:p>
+            <a:pPr algn="l">
+              <a:spcAft>
+                <a:spcPts val="540"/>
+              </a:spcAft>
+            </a:pPr>
+            <a:r>
+              <a:rPr sz="1200" b="1" i="0">
+                <a:solidFill>
+                  <a:srgbClr val="5D5A54"/>
+                </a:solidFill>
+                <a:latin typeface="Inter Tight"/>
+              </a:rPr>
+              <a:t>NAME THE NEED</a:t>
+            </a:r>
+          </a:p>
+        </p:txBody>
+      </p:sp>
+      <p:sp>
+        <p:nvSpPr>
+          <p:cNvPr id="4" name="TextBox 3"/>
+          <p:cNvSpPr txBox="1"/>
+          <p:nvPr/>
+        </p:nvSpPr>
+        <p:spPr>
+          <a:xfrm>
+            <a:off x="8229600" y="6400800"/>
+            <a:ext cx="3410712" cy="274320"/>
+          </a:xfrm>
+          <a:prstGeom prst="rect">
+            <a:avLst/>
+          </a:prstGeom>
+          <a:noFill/>
+        </p:spPr>
+        <p:txBody>
+          <a:bodyPr wrap="square" anchor="t" lIns="0" rIns="0" tIns="0" bIns="0">
+            <a:spAutoFit/>
+          </a:bodyPr>
+          <a:lstStyle/>
+          <a:p>
+            <a:pPr algn="r">
+              <a:spcAft>
+                <a:spcPts val="450"/>
+              </a:spcAft>
+            </a:pPr>
+            <a:r>
+              <a:rPr sz="1000" b="0" i="0">
+                <a:solidFill>
+                  <a:srgbClr val="5D5A54"/>
+                </a:solidFill>
+                <a:latin typeface="Inter Tight"/>
+              </a:rPr>
+              <a:t>Beaver Counseling</a:t>
+            </a:r>
+          </a:p>
+        </p:txBody>
+      </p:sp>
+      <p:sp>
+        <p:nvSpPr>
+          <p:cNvPr id="5" name="TextBox 4"/>
+          <p:cNvSpPr txBox="1"/>
+          <p:nvPr/>
+        </p:nvSpPr>
+        <p:spPr>
+          <a:xfrm>
+            <a:off x="822960" y="2011680"/>
+            <a:ext cx="10515600" cy="1463040"/>
+          </a:xfrm>
+          <a:prstGeom prst="rect">
+            <a:avLst/>
+          </a:prstGeom>
+          <a:noFill/>
+        </p:spPr>
+        <p:txBody>
+          <a:bodyPr wrap="square" anchor="b" lIns="0" rIns="0" tIns="0" bIns="0">
+            <a:spAutoFit/>
+          </a:bodyPr>
+          <a:lstStyle/>
+          <a:p>
+            <a:pPr algn="l">
+              <a:spcAft>
+                <a:spcPts val="2700"/>
+              </a:spcAft>
+            </a:pPr>
+            <a:r>
+              <a:rPr sz="6000" b="1" i="0">
+                <a:solidFill>
+                  <a:srgbClr val="FFFFFF"/>
+                </a:solidFill>
+                <a:latin typeface="Source Serif 4"/>
+              </a:rPr>
+              <a:t>Name the Need</a:t>
+            </a:r>
+          </a:p>
+        </p:txBody>
+      </p:sp>
+      <p:sp>
+        <p:nvSpPr>
+          <p:cNvPr id="6" name="TextBox 5"/>
+          <p:cNvSpPr txBox="1"/>
+          <p:nvPr/>
+        </p:nvSpPr>
+        <p:spPr>
+          <a:xfrm>
+            <a:off x="822960" y="3611880"/>
+            <a:ext cx="10515600" cy="914400"/>
+          </a:xfrm>
+          <a:prstGeom prst="rect">
+            <a:avLst/>
+          </a:prstGeom>
+          <a:noFill/>
+        </p:spPr>
+        <p:txBody>
+          <a:bodyPr wrap="square" anchor="t" lIns="0" rIns="0" tIns="0" bIns="0">
+            <a:spAutoFit/>
+          </a:bodyPr>
+          <a:lstStyle/>
+          <a:p>
+            <a:pPr algn="l">
+              <a:spcAft>
+                <a:spcPts val="1080"/>
+              </a:spcAft>
+            </a:pPr>
+            <a:r>
+              <a:rPr sz="2400" b="0" i="1">
+                <a:solidFill>
+                  <a:srgbClr val="E8E4DA"/>
+                </a:solidFill>
+                <a:latin typeface="Source Serif 4"/>
+              </a:rPr>
+              <a:t>"Fine" covers a lot of ground. Every feeling is a notification from a need.</a:t>
+            </a:r>
+          </a:p>
+        </p:txBody>
+      </p:sp>
+      <p:sp>
+        <p:nvSpPr>
+          <p:cNvPr id="7" name="TextBox 6"/>
+          <p:cNvSpPr txBox="1"/>
+          <p:nvPr/>
+        </p:nvSpPr>
+        <p:spPr>
+          <a:xfrm>
+            <a:off x="822960" y="6035040"/>
+            <a:ext cx="7315200" cy="365760"/>
+          </a:xfrm>
+          <a:prstGeom prst="rect">
+            <a:avLst/>
+          </a:prstGeom>
+          <a:noFill/>
+        </p:spPr>
+        <p:txBody>
+          <a:bodyPr wrap="square" anchor="t" lIns="0" rIns="0" tIns="0" bIns="0">
+            <a:spAutoFit/>
+          </a:bodyPr>
+          <a:lstStyle/>
+          <a:p>
+            <a:pPr algn="l">
+              <a:spcAft>
+                <a:spcPts val="585"/>
+              </a:spcAft>
+            </a:pPr>
+            <a:r>
+              <a:rPr sz="1300" b="0" i="0">
+                <a:solidFill>
+                  <a:srgbClr val="E8E4DA"/>
+                </a:solidFill>
+                <a:latin typeface="Inter Tight"/>
+              </a:rPr>
+              <a:t>Beaver Upper School · Counseling</a:t>
+            </a:r>
+          </a:p>
+        </p:txBody>
+      </p:sp>
+    </p:spTree>
+  </p:cSld>
+  <p:clrMapOvr>
+    <a:masterClrMapping/>
+  </p:clrMapOvr>
+</p:sld>
+</file>
+
+<file path=ppt/slides/slide3.xml><?xml version="1.0" encoding="utf-8"?>
 <p:sld xmlns:a="http://schemas.openxmlformats.org/drawingml/2006/main" xmlns:p="http://schemas.openxmlformats.org/presentationml/2006/main" xmlns:r="http://schemas.openxmlformats.org/officeDocument/2006/relationships">
   <p:cSld>
     <p:bg>
@@ -4749,7 +6796,7 @@
                 </a:solidFill>
                 <a:latin typeface="Inter Tight"/>
               </a:rPr>
-              <a:t>THUMBS VOTE</a:t>
+              <a:t>ONE-WORD CHECK-IN</a:t>
             </a:r>
           </a:p>
         </p:txBody>
@@ -4795,14 +6842,97 @@
       </p:sp>
       <p:sp>
         <p:nvSpPr>
-          <p:cNvPr id="5" name="TextBox 4"/>
+          <p:cNvPr id="5" name="Rectangle 4"/>
+          <p:cNvSpPr/>
+          <p:nvPr/>
+        </p:nvSpPr>
+        <p:spPr>
+          <a:xfrm>
+            <a:off x="822960" y="1371600"/>
+            <a:ext cx="73152" cy="3566160"/>
+          </a:xfrm>
+          <a:prstGeom prst="rect">
+            <a:avLst/>
+          </a:prstGeom>
+          <a:solidFill>
+            <a:srgbClr val="F47B20"/>
+          </a:solidFill>
+          <a:ln>
+            <a:noFill/>
+          </a:ln>
+          <a:effectLst/>
+        </p:spPr>
+        <p:style>
+          <a:lnRef idx="1">
+            <a:schemeClr val="accent1"/>
+          </a:lnRef>
+          <a:fillRef idx="3">
+            <a:schemeClr val="accent1"/>
+          </a:fillRef>
+          <a:effectRef idx="2">
+            <a:schemeClr val="accent1"/>
+          </a:effectRef>
+          <a:fontRef idx="minor">
+            <a:schemeClr val="lt1"/>
+          </a:fontRef>
+        </p:style>
+        <p:txBody>
+          <a:bodyPr rtlCol="0" anchor="ctr"/>
+          <a:lstStyle/>
+          <a:p>
+            <a:pPr algn="ctr"/>
+          </a:p>
+        </p:txBody>
+      </p:sp>
+      <p:sp>
+        <p:nvSpPr>
+          <p:cNvPr id="6" name="TextBox 5"/>
           <p:cNvSpPr txBox="1"/>
           <p:nvPr/>
         </p:nvSpPr>
         <p:spPr>
           <a:xfrm>
-            <a:off x="822960" y="1005840"/>
-            <a:ext cx="10515600" cy="1097280"/>
+            <a:off x="1188720" y="1371600"/>
+            <a:ext cx="10058400" cy="3566160"/>
+          </a:xfrm>
+          <a:prstGeom prst="rect">
+            <a:avLst/>
+          </a:prstGeom>
+          <a:noFill/>
+        </p:spPr>
+        <p:txBody>
+          <a:bodyPr wrap="square" anchor="ctr" lIns="0" rIns="0" tIns="0" bIns="0">
+            <a:spAutoFit/>
+          </a:bodyPr>
+          <a:lstStyle/>
+          <a:p>
+            <a:pPr algn="l">
+              <a:spcAft>
+                <a:spcPts val="1800"/>
+              </a:spcAft>
+            </a:pPr>
+            <a:r>
+              <a:rPr sz="4000" b="0" i="1">
+                <a:solidFill>
+                  <a:srgbClr val="1C1B19"/>
+                </a:solidFill>
+                <a:latin typeface="Source Serif 4"/>
+              </a:rPr>
+              <a:t>How are you, in one word?</a:t>
+            </a:r>
+          </a:p>
+        </p:txBody>
+      </p:sp>
+      <p:sp>
+        <p:nvSpPr>
+          <p:cNvPr id="7" name="TextBox 6"/>
+          <p:cNvSpPr txBox="1"/>
+          <p:nvPr/>
+        </p:nvSpPr>
+        <p:spPr>
+          <a:xfrm>
+            <a:off x="1188720" y="5120640"/>
+            <a:ext cx="10058400" cy="914400"/>
           </a:xfrm>
           <a:prstGeom prst="rect">
             <a:avLst/>
@@ -4817,407 +6947,17 @@
           <a:p>
             <a:pPr algn="l">
               <a:spcAft>
-                <a:spcPts val="1620"/>
-              </a:spcAft>
-            </a:pPr>
-            <a:r>
-              <a:rPr sz="3600" b="1" i="0">
-                <a:solidFill>
-                  <a:srgbClr val="1C1B19"/>
-                </a:solidFill>
-                <a:latin typeface="Source Serif 4"/>
-              </a:rPr>
-              <a:t>Feeling, or a thought in disguise?</a:t>
-            </a:r>
-          </a:p>
-        </p:txBody>
-      </p:sp>
-      <p:sp>
-        <p:nvSpPr>
-          <p:cNvPr id="6" name="TextBox 5"/>
-          <p:cNvSpPr txBox="1"/>
-          <p:nvPr/>
-        </p:nvSpPr>
-        <p:spPr>
-          <a:xfrm>
-            <a:off x="822960" y="2057400"/>
-            <a:ext cx="548640" cy="804672"/>
-          </a:xfrm>
-          <a:prstGeom prst="rect">
-            <a:avLst/>
-          </a:prstGeom>
-          <a:noFill/>
-        </p:spPr>
-        <p:txBody>
-          <a:bodyPr wrap="square" anchor="t" lIns="0" rIns="0" tIns="0" bIns="0">
-            <a:spAutoFit/>
-          </a:bodyPr>
-          <a:lstStyle/>
-          <a:p>
-            <a:pPr algn="l">
-              <a:spcAft>
-                <a:spcPts val="1170"/>
-              </a:spcAft>
-            </a:pPr>
-            <a:r>
-              <a:rPr sz="2600" b="1" i="0">
-                <a:solidFill>
-                  <a:srgbClr val="F47B20"/>
-                </a:solidFill>
-                <a:latin typeface="Source Serif 4"/>
-              </a:rPr>
-              <a:t>•</a:t>
-            </a:r>
-          </a:p>
-        </p:txBody>
-      </p:sp>
-      <p:sp>
-        <p:nvSpPr>
-          <p:cNvPr id="7" name="TextBox 6"/>
-          <p:cNvSpPr txBox="1"/>
-          <p:nvPr/>
-        </p:nvSpPr>
-        <p:spPr>
-          <a:xfrm>
-            <a:off x="1463040" y="2093976"/>
-            <a:ext cx="9875520" cy="804672"/>
-          </a:xfrm>
-          <a:prstGeom prst="rect">
-            <a:avLst/>
-          </a:prstGeom>
-          <a:noFill/>
-        </p:spPr>
-        <p:txBody>
-          <a:bodyPr wrap="square" anchor="t" lIns="0" rIns="0" tIns="0" bIns="0">
-            <a:spAutoFit/>
-          </a:bodyPr>
-          <a:lstStyle/>
-          <a:p>
-            <a:pPr algn="l">
-              <a:spcAft>
-                <a:spcPts val="945"/>
-              </a:spcAft>
-            </a:pPr>
-            <a:r>
-              <a:rPr sz="2100" b="1" i="0">
-                <a:solidFill>
-                  <a:srgbClr val="1C1B19"/>
-                </a:solidFill>
-                <a:latin typeface="Source Serif 4"/>
-              </a:rPr>
-              <a:t>"I feel used."</a:t>
-            </a:r>
-          </a:p>
-        </p:txBody>
-      </p:sp>
-      <p:sp>
-        <p:nvSpPr>
-          <p:cNvPr id="8" name="TextBox 7"/>
-          <p:cNvSpPr txBox="1"/>
-          <p:nvPr/>
-        </p:nvSpPr>
-        <p:spPr>
-          <a:xfrm>
-            <a:off x="822960" y="2862072"/>
-            <a:ext cx="548640" cy="804672"/>
-          </a:xfrm>
-          <a:prstGeom prst="rect">
-            <a:avLst/>
-          </a:prstGeom>
-          <a:noFill/>
-        </p:spPr>
-        <p:txBody>
-          <a:bodyPr wrap="square" anchor="t" lIns="0" rIns="0" tIns="0" bIns="0">
-            <a:spAutoFit/>
-          </a:bodyPr>
-          <a:lstStyle/>
-          <a:p>
-            <a:pPr algn="l">
-              <a:spcAft>
-                <a:spcPts val="1170"/>
-              </a:spcAft>
-            </a:pPr>
-            <a:r>
-              <a:rPr sz="2600" b="1" i="0">
-                <a:solidFill>
-                  <a:srgbClr val="F47B20"/>
-                </a:solidFill>
-                <a:latin typeface="Source Serif 4"/>
-              </a:rPr>
-              <a:t>•</a:t>
-            </a:r>
-          </a:p>
-        </p:txBody>
-      </p:sp>
-      <p:sp>
-        <p:nvSpPr>
-          <p:cNvPr id="9" name="TextBox 8"/>
-          <p:cNvSpPr txBox="1"/>
-          <p:nvPr/>
-        </p:nvSpPr>
-        <p:spPr>
-          <a:xfrm>
-            <a:off x="1463040" y="2898648"/>
-            <a:ext cx="9875520" cy="804672"/>
-          </a:xfrm>
-          <a:prstGeom prst="rect">
-            <a:avLst/>
-          </a:prstGeom>
-          <a:noFill/>
-        </p:spPr>
-        <p:txBody>
-          <a:bodyPr wrap="square" anchor="t" lIns="0" rIns="0" tIns="0" bIns="0">
-            <a:spAutoFit/>
-          </a:bodyPr>
-          <a:lstStyle/>
-          <a:p>
-            <a:pPr algn="l">
-              <a:spcAft>
-                <a:spcPts val="945"/>
-              </a:spcAft>
-            </a:pPr>
-            <a:r>
-              <a:rPr sz="2100" b="1" i="0">
-                <a:solidFill>
-                  <a:srgbClr val="1C1B19"/>
-                </a:solidFill>
-                <a:latin typeface="Source Serif 4"/>
-              </a:rPr>
-              <a:t>"I feel resentful."</a:t>
-            </a:r>
-          </a:p>
-        </p:txBody>
-      </p:sp>
-      <p:sp>
-        <p:nvSpPr>
-          <p:cNvPr id="10" name="TextBox 9"/>
-          <p:cNvSpPr txBox="1"/>
-          <p:nvPr/>
-        </p:nvSpPr>
-        <p:spPr>
-          <a:xfrm>
-            <a:off x="822960" y="3666744"/>
-            <a:ext cx="548640" cy="804672"/>
-          </a:xfrm>
-          <a:prstGeom prst="rect">
-            <a:avLst/>
-          </a:prstGeom>
-          <a:noFill/>
-        </p:spPr>
-        <p:txBody>
-          <a:bodyPr wrap="square" anchor="t" lIns="0" rIns="0" tIns="0" bIns="0">
-            <a:spAutoFit/>
-          </a:bodyPr>
-          <a:lstStyle/>
-          <a:p>
-            <a:pPr algn="l">
-              <a:spcAft>
-                <a:spcPts val="1170"/>
-              </a:spcAft>
-            </a:pPr>
-            <a:r>
-              <a:rPr sz="2600" b="1" i="0">
-                <a:solidFill>
-                  <a:srgbClr val="F47B20"/>
-                </a:solidFill>
-                <a:latin typeface="Source Serif 4"/>
-              </a:rPr>
-              <a:t>•</a:t>
-            </a:r>
-          </a:p>
-        </p:txBody>
-      </p:sp>
-      <p:sp>
-        <p:nvSpPr>
-          <p:cNvPr id="11" name="TextBox 10"/>
-          <p:cNvSpPr txBox="1"/>
-          <p:nvPr/>
-        </p:nvSpPr>
-        <p:spPr>
-          <a:xfrm>
-            <a:off x="1463040" y="3703320"/>
-            <a:ext cx="9875520" cy="804672"/>
-          </a:xfrm>
-          <a:prstGeom prst="rect">
-            <a:avLst/>
-          </a:prstGeom>
-          <a:noFill/>
-        </p:spPr>
-        <p:txBody>
-          <a:bodyPr wrap="square" anchor="t" lIns="0" rIns="0" tIns="0" bIns="0">
-            <a:spAutoFit/>
-          </a:bodyPr>
-          <a:lstStyle/>
-          <a:p>
-            <a:pPr algn="l">
-              <a:spcAft>
-                <a:spcPts val="945"/>
-              </a:spcAft>
-            </a:pPr>
-            <a:r>
-              <a:rPr sz="2100" b="1" i="0">
-                <a:solidFill>
-                  <a:srgbClr val="1C1B19"/>
-                </a:solidFill>
-                <a:latin typeface="Source Serif 4"/>
-              </a:rPr>
-              <a:t>"I feel like I'm not good enough."</a:t>
-            </a:r>
-          </a:p>
-        </p:txBody>
-      </p:sp>
-      <p:sp>
-        <p:nvSpPr>
-          <p:cNvPr id="12" name="TextBox 11"/>
-          <p:cNvSpPr txBox="1"/>
-          <p:nvPr/>
-        </p:nvSpPr>
-        <p:spPr>
-          <a:xfrm>
-            <a:off x="822960" y="4471416"/>
-            <a:ext cx="548640" cy="804672"/>
-          </a:xfrm>
-          <a:prstGeom prst="rect">
-            <a:avLst/>
-          </a:prstGeom>
-          <a:noFill/>
-        </p:spPr>
-        <p:txBody>
-          <a:bodyPr wrap="square" anchor="t" lIns="0" rIns="0" tIns="0" bIns="0">
-            <a:spAutoFit/>
-          </a:bodyPr>
-          <a:lstStyle/>
-          <a:p>
-            <a:pPr algn="l">
-              <a:spcAft>
-                <a:spcPts val="1170"/>
-              </a:spcAft>
-            </a:pPr>
-            <a:r>
-              <a:rPr sz="2600" b="1" i="0">
-                <a:solidFill>
-                  <a:srgbClr val="F47B20"/>
-                </a:solidFill>
-                <a:latin typeface="Source Serif 4"/>
-              </a:rPr>
-              <a:t>•</a:t>
-            </a:r>
-          </a:p>
-        </p:txBody>
-      </p:sp>
-      <p:sp>
-        <p:nvSpPr>
-          <p:cNvPr id="13" name="TextBox 12"/>
-          <p:cNvSpPr txBox="1"/>
-          <p:nvPr/>
-        </p:nvSpPr>
-        <p:spPr>
-          <a:xfrm>
-            <a:off x="1463040" y="4507992"/>
-            <a:ext cx="9875520" cy="804672"/>
-          </a:xfrm>
-          <a:prstGeom prst="rect">
-            <a:avLst/>
-          </a:prstGeom>
-          <a:noFill/>
-        </p:spPr>
-        <p:txBody>
-          <a:bodyPr wrap="square" anchor="t" lIns="0" rIns="0" tIns="0" bIns="0">
-            <a:spAutoFit/>
-          </a:bodyPr>
-          <a:lstStyle/>
-          <a:p>
-            <a:pPr algn="l">
-              <a:spcAft>
-                <a:spcPts val="945"/>
-              </a:spcAft>
-            </a:pPr>
-            <a:r>
-              <a:rPr sz="2100" b="1" i="0">
-                <a:solidFill>
-                  <a:srgbClr val="1C1B19"/>
-                </a:solidFill>
-                <a:latin typeface="Source Serif 4"/>
-              </a:rPr>
-              <a:t>"I feel overwhelmed."</a:t>
-            </a:r>
-          </a:p>
-        </p:txBody>
-      </p:sp>
-      <p:sp>
-        <p:nvSpPr>
-          <p:cNvPr id="14" name="TextBox 13"/>
-          <p:cNvSpPr txBox="1"/>
-          <p:nvPr/>
-        </p:nvSpPr>
-        <p:spPr>
-          <a:xfrm>
-            <a:off x="822960" y="5276088"/>
-            <a:ext cx="548640" cy="804672"/>
-          </a:xfrm>
-          <a:prstGeom prst="rect">
-            <a:avLst/>
-          </a:prstGeom>
-          <a:noFill/>
-        </p:spPr>
-        <p:txBody>
-          <a:bodyPr wrap="square" anchor="t" lIns="0" rIns="0" tIns="0" bIns="0">
-            <a:spAutoFit/>
-          </a:bodyPr>
-          <a:lstStyle/>
-          <a:p>
-            <a:pPr algn="l">
-              <a:spcAft>
-                <a:spcPts val="1170"/>
-              </a:spcAft>
-            </a:pPr>
-            <a:r>
-              <a:rPr sz="2600" b="1" i="0">
-                <a:solidFill>
-                  <a:srgbClr val="F47B20"/>
-                </a:solidFill>
-                <a:latin typeface="Source Serif 4"/>
-              </a:rPr>
-              <a:t>•</a:t>
-            </a:r>
-          </a:p>
-        </p:txBody>
-      </p:sp>
-      <p:sp>
-        <p:nvSpPr>
-          <p:cNvPr id="15" name="TextBox 14"/>
-          <p:cNvSpPr txBox="1"/>
-          <p:nvPr/>
-        </p:nvSpPr>
-        <p:spPr>
-          <a:xfrm>
-            <a:off x="1463040" y="5312664"/>
-            <a:ext cx="9875520" cy="804672"/>
-          </a:xfrm>
-          <a:prstGeom prst="rect">
-            <a:avLst/>
-          </a:prstGeom>
-          <a:noFill/>
-        </p:spPr>
-        <p:txBody>
-          <a:bodyPr wrap="square" anchor="t" lIns="0" rIns="0" tIns="0" bIns="0">
-            <a:spAutoFit/>
-          </a:bodyPr>
-          <a:lstStyle/>
-          <a:p>
-            <a:pPr algn="l">
-              <a:spcAft>
-                <a:spcPts val="945"/>
-              </a:spcAft>
-            </a:pPr>
-            <a:r>
-              <a:rPr sz="2100" b="1" i="0">
-                <a:solidFill>
-                  <a:srgbClr val="1C1B19"/>
-                </a:solidFill>
-                <a:latin typeface="Source Serif 4"/>
-              </a:rPr>
-              <a:t>"I feel manipulated."</a:t>
+                <a:spcPts val="810"/>
+              </a:spcAft>
+            </a:pPr>
+            <a:r>
+              <a:rPr sz="1800" b="0" i="0">
+                <a:solidFill>
+                  <a:srgbClr val="5D5A54"/>
+                </a:solidFill>
+                <a:latin typeface="Inter Tight"/>
+              </a:rPr>
+              <a:t>Any word except fine, good, tired or stressed. Any language. "Pass" is fine too.</a:t>
             </a:r>
           </a:p>
         </p:txBody>
@@ -5230,7 +6970,7 @@
 </p:sld>
 </file>
 
-<file path=ppt/slides/slide11.xml><?xml version="1.0" encoding="utf-8"?>
+<file path=ppt/slides/slide4.xml><?xml version="1.0" encoding="utf-8"?>
 <p:sld xmlns:a="http://schemas.openxmlformats.org/drawingml/2006/main" xmlns:p="http://schemas.openxmlformats.org/presentationml/2006/main" xmlns:r="http://schemas.openxmlformats.org/officeDocument/2006/relationships">
   <p:cSld>
     <p:bg>
@@ -5326,7 +7066,7 @@
                 </a:solidFill>
                 <a:latin typeface="Inter Tight"/>
               </a:rPr>
-              <a:t>THE CORE SKILL</a:t>
+              <a:t>WHY NAMING HELPS</a:t>
             </a:r>
           </a:p>
         </p:txBody>
@@ -5404,7 +7144,7 @@
                 </a:solidFill>
                 <a:latin typeface="Source Serif 4"/>
               </a:rPr>
-              <a:t>Feeling. Need. Request.</a:t>
+              <a:t>Put it into words and the alarm turns down.</a:t>
             </a:r>
           </a:p>
         </p:txBody>
@@ -5417,8 +7157,8 @@
         </p:nvSpPr>
         <p:spPr>
           <a:xfrm>
-            <a:off x="822960" y="2743200"/>
-            <a:ext cx="1874519" cy="1005840"/>
+            <a:off x="822960" y="2103120"/>
+            <a:ext cx="5120640" cy="3931920"/>
           </a:xfrm>
           <a:prstGeom prst="rect">
             <a:avLst/>
@@ -5428,7 +7168,7 @@
           </a:solidFill>
           <a:ln w="15875">
             <a:solidFill>
-              <a:srgbClr val="0B2D5B"/>
+              <a:srgbClr val="D8D2C6"/>
             </a:solidFill>
           </a:ln>
           <a:effectLst/>
@@ -5463,8 +7203,8 @@
         </p:nvSpPr>
         <p:spPr>
           <a:xfrm>
-            <a:off x="822960" y="2743200"/>
-            <a:ext cx="1874519" cy="1005840"/>
+            <a:off x="1097280" y="2286000"/>
+            <a:ext cx="4572000" cy="457200"/>
           </a:xfrm>
           <a:prstGeom prst="rect">
             <a:avLst/>
@@ -5472,64 +7212,115 @@
           <a:noFill/>
         </p:spPr>
         <p:txBody>
-          <a:bodyPr wrap="square" anchor="ctr" lIns="0" rIns="0" tIns="0" bIns="0">
+          <a:bodyPr wrap="square" anchor="t" lIns="0" rIns="0" tIns="0" bIns="0">
             <a:spAutoFit/>
           </a:bodyPr>
           <a:lstStyle/>
           <a:p>
-            <a:pPr algn="ctr">
-              <a:spcAft>
-                <a:spcPts val="900"/>
-              </a:spcAft>
-            </a:pPr>
-            <a:r>
-              <a:rPr sz="2000" b="1" i="0">
+            <a:pPr algn="l">
+              <a:spcAft>
+                <a:spcPts val="585"/>
+              </a:spcAft>
+            </a:pPr>
+            <a:r>
+              <a:rPr sz="1300" b="1" i="0">
+                <a:solidFill>
+                  <a:srgbClr val="0B2D5B"/>
+                </a:solidFill>
+                <a:latin typeface="Inter Tight"/>
+              </a:rPr>
+              <a:t>WHAT THE RESEARCH FOUND</a:t>
+            </a:r>
+          </a:p>
+        </p:txBody>
+      </p:sp>
+      <p:sp>
+        <p:nvSpPr>
+          <p:cNvPr id="8" name="TextBox 7"/>
+          <p:cNvSpPr txBox="1"/>
+          <p:nvPr/>
+        </p:nvSpPr>
+        <p:spPr>
+          <a:xfrm>
+            <a:off x="1097280" y="2788920"/>
+            <a:ext cx="4572000" cy="3108960"/>
+          </a:xfrm>
+          <a:prstGeom prst="rect">
+            <a:avLst/>
+          </a:prstGeom>
+          <a:noFill/>
+        </p:spPr>
+        <p:txBody>
+          <a:bodyPr wrap="square" anchor="t" lIns="0" rIns="0" tIns="0" bIns="0">
+            <a:spAutoFit/>
+          </a:bodyPr>
+          <a:lstStyle/>
+          <a:p>
+            <a:pPr algn="l">
+              <a:spcAft>
+                <a:spcPts val="855"/>
+              </a:spcAft>
+            </a:pPr>
+            <a:r>
+              <a:rPr sz="1900" b="0" i="0">
                 <a:solidFill>
                   <a:srgbClr val="1C1B19"/>
                 </a:solidFill>
                 <a:latin typeface="Source Serif 4"/>
               </a:rPr>
-              <a:t>Get granular</a:t>
-            </a:r>
-          </a:p>
-        </p:txBody>
-      </p:sp>
-      <p:cxnSp>
-        <p:nvCxnSpPr>
-          <p:cNvPr id="8" name="Connector 7"/>
-          <p:cNvCxnSpPr/>
-          <p:nvPr/>
-        </p:nvCxnSpPr>
-        <p:spPr>
-          <a:xfrm>
-            <a:off x="2752344" y="3246120"/>
-            <a:ext cx="896112" cy="0"/>
-          </a:xfrm>
-          <a:prstGeom prst="line">
-            <a:avLst/>
-          </a:prstGeom>
-          <a:ln w="31750">
-            <a:solidFill>
-              <a:srgbClr val="F47B20"/>
-            </a:solidFill>
-            <a:tailEnd type="triangle"/>
-          </a:ln>
-        </p:spPr>
-        <p:style>
-          <a:lnRef idx="2">
-            <a:schemeClr val="accent1"/>
-          </a:lnRef>
-          <a:fillRef idx="0">
-            <a:schemeClr val="accent1"/>
-          </a:fillRef>
-          <a:effectRef idx="1">
-            <a:schemeClr val="accent1"/>
-          </a:effectRef>
-          <a:fontRef idx="minor">
-            <a:schemeClr val="tx1"/>
-          </a:fontRef>
-        </p:style>
-      </p:cxnSp>
+              <a:t>Naming a feeling quiets the brain's alarm</a:t>
+            </a:r>
+          </a:p>
+          <a:p>
+            <a:pPr algn="l">
+              <a:spcAft>
+                <a:spcPts val="855"/>
+              </a:spcAft>
+            </a:pPr>
+            <a:r>
+              <a:rPr sz="1900" b="0" i="0">
+                <a:solidFill>
+                  <a:srgbClr val="1C1B19"/>
+                </a:solidFill>
+                <a:latin typeface="Source Serif 4"/>
+              </a:rPr>
+              <a:t>Saying fear out loud shrank it a week later</a:t>
+            </a:r>
+          </a:p>
+          <a:p>
+            <a:pPr algn="l">
+              <a:spcAft>
+                <a:spcPts val="855"/>
+              </a:spcAft>
+            </a:pPr>
+            <a:r>
+              <a:rPr sz="1900" b="0" i="0">
+                <a:solidFill>
+                  <a:srgbClr val="1C1B19"/>
+                </a:solidFill>
+                <a:latin typeface="Source Serif 4"/>
+              </a:rPr>
+              <a:t>More precise words, steadier mood</a:t>
+            </a:r>
+          </a:p>
+          <a:p>
+            <a:pPr algn="l">
+              <a:spcAft>
+                <a:spcPts val="855"/>
+              </a:spcAft>
+            </a:pPr>
+            <a:r>
+              <a:rPr sz="1900" b="0" i="0">
+                <a:solidFill>
+                  <a:srgbClr val="1C1B19"/>
+                </a:solidFill>
+                <a:latin typeface="Source Serif 4"/>
+              </a:rPr>
+              <a:t>Your body often knows before you do</a:t>
+            </a:r>
+          </a:p>
+        </p:txBody>
+      </p:sp>
       <p:sp>
         <p:nvSpPr>
           <p:cNvPr id="9" name="Rectangle 8"/>
@@ -5538,8 +7329,8 @@
         </p:nvSpPr>
         <p:spPr>
           <a:xfrm>
-            <a:off x="3703320" y="2743200"/>
-            <a:ext cx="1874519" cy="1005840"/>
+            <a:off x="6309360" y="2103120"/>
+            <a:ext cx="5120640" cy="3931920"/>
           </a:xfrm>
           <a:prstGeom prst="rect">
             <a:avLst/>
@@ -5549,7 +7340,7 @@
           </a:solidFill>
           <a:ln w="15875">
             <a:solidFill>
-              <a:srgbClr val="0B2D5B"/>
+              <a:srgbClr val="D8D2C6"/>
             </a:solidFill>
           </a:ln>
           <a:effectLst/>
@@ -5584,289 +7375,8 @@
         </p:nvSpPr>
         <p:spPr>
           <a:xfrm>
-            <a:off x="3703320" y="2743200"/>
-            <a:ext cx="1874519" cy="1005840"/>
-          </a:xfrm>
-          <a:prstGeom prst="rect">
-            <a:avLst/>
-          </a:prstGeom>
-          <a:noFill/>
-        </p:spPr>
-        <p:txBody>
-          <a:bodyPr wrap="square" anchor="ctr" lIns="0" rIns="0" tIns="0" bIns="0">
-            <a:spAutoFit/>
-          </a:bodyPr>
-          <a:lstStyle/>
-          <a:p>
-            <a:pPr algn="ctr">
-              <a:spcAft>
-                <a:spcPts val="900"/>
-              </a:spcAft>
-            </a:pPr>
-            <a:r>
-              <a:rPr sz="2000" b="1" i="0">
-                <a:solidFill>
-                  <a:srgbClr val="1C1B19"/>
-                </a:solidFill>
-                <a:latin typeface="Source Serif 4"/>
-              </a:rPr>
-              <a:t>Check your body</a:t>
-            </a:r>
-          </a:p>
-        </p:txBody>
-      </p:sp>
-      <p:cxnSp>
-        <p:nvCxnSpPr>
-          <p:cNvPr id="11" name="Connector 10"/>
-          <p:cNvCxnSpPr/>
-          <p:nvPr/>
-        </p:nvCxnSpPr>
-        <p:spPr>
-          <a:xfrm>
-            <a:off x="5632704" y="3246120"/>
-            <a:ext cx="896112" cy="0"/>
-          </a:xfrm>
-          <a:prstGeom prst="line">
-            <a:avLst/>
-          </a:prstGeom>
-          <a:ln w="31750">
-            <a:solidFill>
-              <a:srgbClr val="F47B20"/>
-            </a:solidFill>
-            <a:tailEnd type="triangle"/>
-          </a:ln>
-        </p:spPr>
-        <p:style>
-          <a:lnRef idx="2">
-            <a:schemeClr val="accent1"/>
-          </a:lnRef>
-          <a:fillRef idx="0">
-            <a:schemeClr val="accent1"/>
-          </a:fillRef>
-          <a:effectRef idx="1">
-            <a:schemeClr val="accent1"/>
-          </a:effectRef>
-          <a:fontRef idx="minor">
-            <a:schemeClr val="tx1"/>
-          </a:fontRef>
-        </p:style>
-      </p:cxnSp>
-      <p:sp>
-        <p:nvSpPr>
-          <p:cNvPr id="12" name="Rectangle 11"/>
-          <p:cNvSpPr/>
-          <p:nvPr/>
-        </p:nvSpPr>
-        <p:spPr>
-          <a:xfrm>
-            <a:off x="6583680" y="2743200"/>
-            <a:ext cx="1874519" cy="1005840"/>
-          </a:xfrm>
-          <a:prstGeom prst="rect">
-            <a:avLst/>
-          </a:prstGeom>
-          <a:solidFill>
-            <a:srgbClr val="FFFFFF"/>
-          </a:solidFill>
-          <a:ln w="15875">
-            <a:solidFill>
-              <a:srgbClr val="0B2D5B"/>
-            </a:solidFill>
-          </a:ln>
-          <a:effectLst/>
-        </p:spPr>
-        <p:style>
-          <a:lnRef idx="1">
-            <a:schemeClr val="accent1"/>
-          </a:lnRef>
-          <a:fillRef idx="3">
-            <a:schemeClr val="accent1"/>
-          </a:fillRef>
-          <a:effectRef idx="2">
-            <a:schemeClr val="accent1"/>
-          </a:effectRef>
-          <a:fontRef idx="minor">
-            <a:schemeClr val="lt1"/>
-          </a:fontRef>
-        </p:style>
-        <p:txBody>
-          <a:bodyPr rtlCol="0" anchor="ctr"/>
-          <a:lstStyle/>
-          <a:p>
-            <a:pPr algn="ctr"/>
-          </a:p>
-        </p:txBody>
-      </p:sp>
-      <p:sp>
-        <p:nvSpPr>
-          <p:cNvPr id="13" name="TextBox 12"/>
-          <p:cNvSpPr txBox="1"/>
-          <p:nvPr/>
-        </p:nvSpPr>
-        <p:spPr>
-          <a:xfrm>
-            <a:off x="6583680" y="2743200"/>
-            <a:ext cx="1874519" cy="1005840"/>
-          </a:xfrm>
-          <a:prstGeom prst="rect">
-            <a:avLst/>
-          </a:prstGeom>
-          <a:noFill/>
-        </p:spPr>
-        <p:txBody>
-          <a:bodyPr wrap="square" anchor="ctr" lIns="0" rIns="0" tIns="0" bIns="0">
-            <a:spAutoFit/>
-          </a:bodyPr>
-          <a:lstStyle/>
-          <a:p>
-            <a:pPr algn="ctr">
-              <a:spcAft>
-                <a:spcPts val="900"/>
-              </a:spcAft>
-            </a:pPr>
-            <a:r>
-              <a:rPr sz="2000" b="1" i="0">
-                <a:solidFill>
-                  <a:srgbClr val="1C1B19"/>
-                </a:solidFill>
-                <a:latin typeface="Source Serif 4"/>
-              </a:rPr>
-              <a:t>Find the need</a:t>
-            </a:r>
-          </a:p>
-        </p:txBody>
-      </p:sp>
-      <p:cxnSp>
-        <p:nvCxnSpPr>
-          <p:cNvPr id="14" name="Connector 13"/>
-          <p:cNvCxnSpPr/>
-          <p:nvPr/>
-        </p:nvCxnSpPr>
-        <p:spPr>
-          <a:xfrm>
-            <a:off x="8513064" y="3246120"/>
-            <a:ext cx="896112" cy="0"/>
-          </a:xfrm>
-          <a:prstGeom prst="line">
-            <a:avLst/>
-          </a:prstGeom>
-          <a:ln w="31750">
-            <a:solidFill>
-              <a:srgbClr val="F47B20"/>
-            </a:solidFill>
-            <a:tailEnd type="triangle"/>
-          </a:ln>
-        </p:spPr>
-        <p:style>
-          <a:lnRef idx="2">
-            <a:schemeClr val="accent1"/>
-          </a:lnRef>
-          <a:fillRef idx="0">
-            <a:schemeClr val="accent1"/>
-          </a:fillRef>
-          <a:effectRef idx="1">
-            <a:schemeClr val="accent1"/>
-          </a:effectRef>
-          <a:fontRef idx="minor">
-            <a:schemeClr val="tx1"/>
-          </a:fontRef>
-        </p:style>
-      </p:cxnSp>
-      <p:sp>
-        <p:nvSpPr>
-          <p:cNvPr id="15" name="Rectangle 14"/>
-          <p:cNvSpPr/>
-          <p:nvPr/>
-        </p:nvSpPr>
-        <p:spPr>
-          <a:xfrm>
-            <a:off x="9464040" y="2743200"/>
-            <a:ext cx="1874519" cy="1005840"/>
-          </a:xfrm>
-          <a:prstGeom prst="rect">
-            <a:avLst/>
-          </a:prstGeom>
-          <a:solidFill>
-            <a:srgbClr val="FFFFFF"/>
-          </a:solidFill>
-          <a:ln w="15875">
-            <a:solidFill>
-              <a:srgbClr val="0B2D5B"/>
-            </a:solidFill>
-          </a:ln>
-          <a:effectLst/>
-        </p:spPr>
-        <p:style>
-          <a:lnRef idx="1">
-            <a:schemeClr val="accent1"/>
-          </a:lnRef>
-          <a:fillRef idx="3">
-            <a:schemeClr val="accent1"/>
-          </a:fillRef>
-          <a:effectRef idx="2">
-            <a:schemeClr val="accent1"/>
-          </a:effectRef>
-          <a:fontRef idx="minor">
-            <a:schemeClr val="lt1"/>
-          </a:fontRef>
-        </p:style>
-        <p:txBody>
-          <a:bodyPr rtlCol="0" anchor="ctr"/>
-          <a:lstStyle/>
-          <a:p>
-            <a:pPr algn="ctr"/>
-          </a:p>
-        </p:txBody>
-      </p:sp>
-      <p:sp>
-        <p:nvSpPr>
-          <p:cNvPr id="16" name="TextBox 15"/>
-          <p:cNvSpPr txBox="1"/>
-          <p:nvPr/>
-        </p:nvSpPr>
-        <p:spPr>
-          <a:xfrm>
-            <a:off x="9464040" y="2743200"/>
-            <a:ext cx="1874519" cy="1005840"/>
-          </a:xfrm>
-          <a:prstGeom prst="rect">
-            <a:avLst/>
-          </a:prstGeom>
-          <a:noFill/>
-        </p:spPr>
-        <p:txBody>
-          <a:bodyPr wrap="square" anchor="ctr" lIns="0" rIns="0" tIns="0" bIns="0">
-            <a:spAutoFit/>
-          </a:bodyPr>
-          <a:lstStyle/>
-          <a:p>
-            <a:pPr algn="ctr">
-              <a:spcAft>
-                <a:spcPts val="900"/>
-              </a:spcAft>
-            </a:pPr>
-            <a:r>
-              <a:rPr sz="2000" b="1" i="0">
-                <a:solidFill>
-                  <a:srgbClr val="1C1B19"/>
-                </a:solidFill>
-                <a:latin typeface="Source Serif 4"/>
-              </a:rPr>
-              <a:t>Make a request</a:t>
-            </a:r>
-          </a:p>
-        </p:txBody>
-      </p:sp>
-      <p:sp>
-        <p:nvSpPr>
-          <p:cNvPr id="17" name="TextBox 16"/>
-          <p:cNvSpPr txBox="1"/>
-          <p:nvPr/>
-        </p:nvSpPr>
-        <p:spPr>
-          <a:xfrm>
-            <a:off x="822960" y="4160520"/>
-            <a:ext cx="10515600" cy="457200"/>
+            <a:off x="6583680" y="2286000"/>
+            <a:ext cx="4572000" cy="457200"/>
           </a:xfrm>
           <a:prstGeom prst="rect">
             <a:avLst/>
@@ -5879,33 +7389,33 @@
           </a:bodyPr>
           <a:lstStyle/>
           <a:p>
-            <a:pPr algn="ctr">
-              <a:spcAft>
-                <a:spcPts val="810"/>
-              </a:spcAft>
-            </a:pPr>
-            <a:r>
-              <a:rPr sz="1800" b="1" i="0">
-                <a:solidFill>
-                  <a:srgbClr val="F47B20"/>
+            <a:pPr algn="l">
+              <a:spcAft>
+                <a:spcPts val="585"/>
+              </a:spcAft>
+            </a:pPr>
+            <a:r>
+              <a:rPr sz="1300" b="1" i="0">
+                <a:solidFill>
+                  <a:srgbClr val="0B2D5B"/>
                 </a:solidFill>
                 <a:latin typeface="Inter Tight"/>
               </a:rPr>
-              <a:t>↺  and around again</a:t>
-            </a:r>
-          </a:p>
-        </p:txBody>
-      </p:sp>
-      <p:sp>
-        <p:nvSpPr>
-          <p:cNvPr id="18" name="TextBox 17"/>
+              <a:t>WHAT THAT MEANS FOR YOU</a:t>
+            </a:r>
+          </a:p>
+        </p:txBody>
+      </p:sp>
+      <p:sp>
+        <p:nvSpPr>
+          <p:cNvPr id="11" name="TextBox 10"/>
           <p:cNvSpPr txBox="1"/>
           <p:nvPr/>
         </p:nvSpPr>
         <p:spPr>
           <a:xfrm>
-            <a:off x="822960" y="4846320"/>
-            <a:ext cx="10515600" cy="1188720"/>
+            <a:off x="6583680" y="2788920"/>
+            <a:ext cx="4572000" cy="3108960"/>
           </a:xfrm>
           <a:prstGeom prst="rect">
             <a:avLst/>
@@ -5918,19 +7428,67 @@
           </a:bodyPr>
           <a:lstStyle/>
           <a:p>
-            <a:pPr algn="ctr">
-              <a:spcAft>
-                <a:spcPts val="900"/>
-              </a:spcAft>
-            </a:pPr>
-            <a:r>
-              <a:rPr sz="2000" b="0" i="1">
-                <a:solidFill>
-                  <a:srgbClr val="5D5A54"/>
+            <a:pPr algn="l">
+              <a:spcAft>
+                <a:spcPts val="855"/>
+              </a:spcAft>
+            </a:pPr>
+            <a:r>
+              <a:rPr sz="1900" b="0" i="0">
+                <a:solidFill>
+                  <a:srgbClr val="1C1B19"/>
                 </a:solidFill>
                 <a:latin typeface="Source Serif 4"/>
               </a:rPr>
-              <a:t>Most conflicts skip from feeling straight to blame. The need is in between.</a:t>
+              <a:t>"Fine" leaves the alarm running</a:t>
+            </a:r>
+          </a:p>
+          <a:p>
+            <a:pPr algn="l">
+              <a:spcAft>
+                <a:spcPts val="855"/>
+              </a:spcAft>
+            </a:pPr>
+            <a:r>
+              <a:rPr sz="1900" b="0" i="0">
+                <a:solidFill>
+                  <a:srgbClr val="1C1B19"/>
+                </a:solidFill>
+                <a:latin typeface="Source Serif 4"/>
+              </a:rPr>
+              <a:t>Go one word past "stressed"</a:t>
+            </a:r>
+          </a:p>
+          <a:p>
+            <a:pPr algn="l">
+              <a:spcAft>
+                <a:spcPts val="855"/>
+              </a:spcAft>
+            </a:pPr>
+            <a:r>
+              <a:rPr sz="1900" b="0" i="0">
+                <a:solidFill>
+                  <a:srgbClr val="1C1B19"/>
+                </a:solidFill>
+                <a:latin typeface="Source Serif 4"/>
+              </a:rPr>
+              <a:t>It's a vocabulary, so it grows with use</a:t>
+            </a:r>
+          </a:p>
+          <a:p>
+            <a:pPr algn="l">
+              <a:spcAft>
+                <a:spcPts val="855"/>
+              </a:spcAft>
+            </a:pPr>
+            <a:r>
+              <a:rPr sz="1900" b="0" i="0">
+                <a:solidFill>
+                  <a:srgbClr val="1C1B19"/>
+                </a:solidFill>
+                <a:latin typeface="Source Serif 4"/>
+              </a:rPr>
+              <a:t>Check chest, stomach, jaw, shoulders</a:t>
             </a:r>
           </a:p>
         </p:txBody>
@@ -5943,7 +7501,7 @@
 </p:sld>
 </file>
 
-<file path=ppt/slides/slide12.xml><?xml version="1.0" encoding="utf-8"?>
+<file path=ppt/slides/slide5.xml><?xml version="1.0" encoding="utf-8"?>
 <p:sld xmlns:a="http://schemas.openxmlformats.org/drawingml/2006/main" xmlns:p="http://schemas.openxmlformats.org/presentationml/2006/main" xmlns:r="http://schemas.openxmlformats.org/officeDocument/2006/relationships">
   <p:cSld>
     <p:bg>
@@ -6039,7 +7597,7 @@
                 </a:solidFill>
                 <a:latin typeface="Inter Tight"/>
               </a:rPr>
-              <a:t>BEFORE YOU GO</a:t>
+              <a:t>SEVEN NEEDS</a:t>
             </a:r>
           </a:p>
         </p:txBody>
@@ -6091,7 +7649,7 @@
         </p:nvSpPr>
         <p:spPr>
           <a:xfrm>
-            <a:off x="822960" y="1188720"/>
+            <a:off x="822960" y="1005840"/>
             <a:ext cx="10515600" cy="914400"/>
           </a:xfrm>
           <a:prstGeom prst="rect">
@@ -6107,70 +7665,31 @@
           <a:p>
             <a:pPr algn="l">
               <a:spcAft>
-                <a:spcPts val="1620"/>
-              </a:spcAft>
-            </a:pPr>
-            <a:r>
-              <a:rPr sz="3600" b="1" i="0">
+                <a:spcPts val="1530"/>
+              </a:spcAft>
+            </a:pPr>
+            <a:r>
+              <a:rPr sz="3400" b="1" i="0">
                 <a:solidFill>
                   <a:srgbClr val="1C1B19"/>
                 </a:solidFill>
                 <a:latin typeface="Source Serif 4"/>
               </a:rPr>
-              <a:t>I feel ___ because I need ___.</a:t>
-            </a:r>
-          </a:p>
-        </p:txBody>
-      </p:sp>
-      <p:sp>
-        <p:nvSpPr>
-          <p:cNvPr id="6" name="TextBox 5"/>
-          <p:cNvSpPr txBox="1"/>
-          <p:nvPr/>
-        </p:nvSpPr>
-        <p:spPr>
-          <a:xfrm>
-            <a:off x="822960" y="2286000"/>
-            <a:ext cx="10515600" cy="1463040"/>
-          </a:xfrm>
-          <a:prstGeom prst="rect">
-            <a:avLst/>
-          </a:prstGeom>
-          <a:noFill/>
-        </p:spPr>
-        <p:txBody>
-          <a:bodyPr wrap="square" anchor="t" lIns="0" rIns="0" tIns="0" bIns="0">
-            <a:spAutoFit/>
-          </a:bodyPr>
-          <a:lstStyle/>
-          <a:p>
-            <a:pPr algn="l">
-              <a:spcAft>
-                <a:spcPts val="1080"/>
-              </a:spcAft>
-            </a:pPr>
-            <a:r>
-              <a:rPr sz="2400" b="0" i="0">
-                <a:solidFill>
-                  <a:srgbClr val="1C1B19"/>
-                </a:solidFill>
-                <a:latin typeface="Source Serif 4"/>
-              </a:rPr>
-              <a:t>Something small from this week, on your card. A request you could make, if you want one.</a:t>
-            </a:r>
-          </a:p>
-        </p:txBody>
-      </p:sp>
-      <p:sp>
-        <p:nvSpPr>
-          <p:cNvPr id="7" name="Rectangle 6"/>
+              <a:t>Everyone has all of them.</a:t>
+            </a:r>
+          </a:p>
+        </p:txBody>
+      </p:sp>
+      <p:sp>
+        <p:nvSpPr>
+          <p:cNvPr id="6" name="Rectangle 5"/>
           <p:cNvSpPr/>
           <p:nvPr/>
         </p:nvSpPr>
         <p:spPr>
           <a:xfrm>
-            <a:off x="822960" y="4023360"/>
-            <a:ext cx="10515600" cy="1371600"/>
+            <a:off x="822960" y="2103120"/>
+            <a:ext cx="5120640" cy="3931920"/>
           </a:xfrm>
           <a:prstGeom prst="rect">
             <a:avLst/>
@@ -6180,7 +7699,7 @@
           </a:solidFill>
           <a:ln w="15875">
             <a:solidFill>
-              <a:srgbClr val="1C1B19"/>
+              <a:srgbClr val="D8D2C6"/>
             </a:solidFill>
           </a:ln>
           <a:effectLst/>
@@ -6209,14 +7728,14 @@
       </p:sp>
       <p:sp>
         <p:nvSpPr>
-          <p:cNvPr id="8" name="TextBox 7"/>
+          <p:cNvPr id="7" name="TextBox 6"/>
           <p:cNvSpPr txBox="1"/>
           <p:nvPr/>
         </p:nvSpPr>
         <p:spPr>
           <a:xfrm>
-            <a:off x="1097280" y="4206240"/>
-            <a:ext cx="10058400" cy="365760"/>
+            <a:off x="1097280" y="2286000"/>
+            <a:ext cx="4572000" cy="457200"/>
           </a:xfrm>
           <a:prstGeom prst="rect">
             <a:avLst/>
@@ -6231,31 +7750,31 @@
           <a:p>
             <a:pPr algn="l">
               <a:spcAft>
-                <a:spcPts val="540"/>
-              </a:spcAft>
-            </a:pPr>
-            <a:r>
-              <a:rPr sz="1200" b="1" i="0">
+                <a:spcPts val="585"/>
+              </a:spcAft>
+            </a:pPr>
+            <a:r>
+              <a:rPr sz="1300" b="1" i="0">
                 <a:solidFill>
                   <a:srgbClr val="0B2D5B"/>
                 </a:solidFill>
                 <a:latin typeface="Inter Tight"/>
               </a:rPr>
-              <a:t>STUDENT PAGE</a:t>
-            </a:r>
-          </a:p>
-        </p:txBody>
-      </p:sp>
-      <p:sp>
-        <p:nvSpPr>
-          <p:cNvPr id="9" name="TextBox 8"/>
+              <a:t>NEEDS 1 TO 4</a:t>
+            </a:r>
+          </a:p>
+        </p:txBody>
+      </p:sp>
+      <p:sp>
+        <p:nvSpPr>
+          <p:cNvPr id="8" name="TextBox 7"/>
           <p:cNvSpPr txBox="1"/>
           <p:nvPr/>
         </p:nvSpPr>
         <p:spPr>
           <a:xfrm>
-            <a:off x="1097280" y="4617720"/>
-            <a:ext cx="10058400" cy="640080"/>
+            <a:off x="1097280" y="2788920"/>
+            <a:ext cx="4572000" cy="3108960"/>
           </a:xfrm>
           <a:prstGeom prst="rect">
             <a:avLst/>
@@ -6270,66 +7789,90 @@
           <a:p>
             <a:pPr algn="l">
               <a:spcAft>
-                <a:spcPts val="900"/>
-              </a:spcAft>
-            </a:pPr>
-            <a:r>
-              <a:rPr sz="2000" b="0" i="0">
+                <a:spcPts val="855"/>
+              </a:spcAft>
+            </a:pPr>
+            <a:r>
+              <a:rPr sz="1900" b="0" i="0">
                 <a:solidFill>
                   <a:srgbClr val="1C1B19"/>
                 </a:solidFill>
-                <a:latin typeface="Inter Tight"/>
-              </a:rPr>
-              <a:t>https://rmwtoolkit.github.io/bcds-toolkit/name-the-need-high-school.html</a:t>
-            </a:r>
-          </a:p>
-        </p:txBody>
-      </p:sp>
-    </p:spTree>
-  </p:cSld>
-  <p:clrMapOvr>
-    <a:masterClrMapping/>
-  </p:clrMapOvr>
-</p:sld>
-</file>
-
-<file path=ppt/slides/slide2.xml><?xml version="1.0" encoding="utf-8"?>
-<p:sld xmlns:a="http://schemas.openxmlformats.org/drawingml/2006/main" xmlns:p="http://schemas.openxmlformats.org/presentationml/2006/main" xmlns:r="http://schemas.openxmlformats.org/officeDocument/2006/relationships" show="0">
-  <p:cSld>
-    <p:bg>
-      <p:bgPr>
-        <a:solidFill>
-          <a:srgbClr val="EEEBE4"/>
-        </a:solidFill>
-        <a:effectLst/>
-      </p:bgPr>
-    </p:bg>
-    <p:spTree>
-      <p:nvGrpSpPr>
-        <p:cNvPr id="1" name=""/>
-        <p:cNvGrpSpPr/>
-        <p:nvPr/>
-      </p:nvGrpSpPr>
-      <p:grpSpPr/>
-      <p:sp>
-        <p:nvSpPr>
-          <p:cNvPr id="2" name="Rectangle 1"/>
+                <a:latin typeface="Source Serif 4"/>
+              </a:rPr>
+              <a:t>Connection: belonging, being seen</a:t>
+            </a:r>
+          </a:p>
+          <a:p>
+            <a:pPr algn="l">
+              <a:spcAft>
+                <a:spcPts val="855"/>
+              </a:spcAft>
+            </a:pPr>
+            <a:r>
+              <a:rPr sz="1900" b="0" i="0">
+                <a:solidFill>
+                  <a:srgbClr val="1C1B19"/>
+                </a:solidFill>
+                <a:latin typeface="Source Serif 4"/>
+              </a:rPr>
+              <a:t>Body: rest, food, movement, safety</a:t>
+            </a:r>
+          </a:p>
+          <a:p>
+            <a:pPr algn="l">
+              <a:spcAft>
+                <a:spcPts val="855"/>
+              </a:spcAft>
+            </a:pPr>
+            <a:r>
+              <a:rPr sz="1900" b="0" i="0">
+                <a:solidFill>
+                  <a:srgbClr val="1C1B19"/>
+                </a:solidFill>
+                <a:latin typeface="Source Serif 4"/>
+              </a:rPr>
+              <a:t>Honesty: same person in every room</a:t>
+            </a:r>
+          </a:p>
+          <a:p>
+            <a:pPr algn="l">
+              <a:spcAft>
+                <a:spcPts val="855"/>
+              </a:spcAft>
+            </a:pPr>
+            <a:r>
+              <a:rPr sz="1900" b="0" i="0">
+                <a:solidFill>
+                  <a:srgbClr val="1C1B19"/>
+                </a:solidFill>
+                <a:latin typeface="Source Serif 4"/>
+              </a:rPr>
+              <a:t>Play: fun for its own sake</a:t>
+            </a:r>
+          </a:p>
+        </p:txBody>
+      </p:sp>
+      <p:sp>
+        <p:nvSpPr>
+          <p:cNvPr id="9" name="Rectangle 8"/>
           <p:cNvSpPr/>
           <p:nvPr/>
         </p:nvSpPr>
         <p:spPr>
           <a:xfrm>
-            <a:off x="0" y="0"/>
-            <a:ext cx="12191695" cy="384048"/>
+            <a:off x="6309360" y="2103120"/>
+            <a:ext cx="5120640" cy="3931920"/>
           </a:xfrm>
           <a:prstGeom prst="rect">
             <a:avLst/>
           </a:prstGeom>
           <a:solidFill>
-            <a:srgbClr val="0B2D5B"/>
+            <a:srgbClr val="FFFFFF"/>
           </a:solidFill>
-          <a:ln>
-            <a:noFill/>
+          <a:ln w="15875">
+            <a:solidFill>
+              <a:srgbClr val="D8D2C6"/>
+            </a:solidFill>
           </a:ln>
           <a:effectLst/>
         </p:spPr>
@@ -6357,14 +7900,14 @@
       </p:sp>
       <p:sp>
         <p:nvSpPr>
-          <p:cNvPr id="3" name="TextBox 2"/>
+          <p:cNvPr id="10" name="TextBox 9"/>
           <p:cNvSpPr txBox="1"/>
           <p:nvPr/>
         </p:nvSpPr>
         <p:spPr>
           <a:xfrm>
-            <a:off x="548640" y="100584"/>
-            <a:ext cx="10972800" cy="274320"/>
+            <a:off x="6583680" y="2286000"/>
+            <a:ext cx="4572000" cy="457200"/>
           </a:xfrm>
           <a:prstGeom prst="rect">
             <a:avLst/>
@@ -6379,31 +7922,31 @@
           <a:p>
             <a:pPr algn="l">
               <a:spcAft>
-                <a:spcPts val="495"/>
-              </a:spcAft>
-            </a:pPr>
-            <a:r>
-              <a:rPr sz="1100" b="1" i="0">
-                <a:solidFill>
-                  <a:srgbClr val="FFFFFF"/>
+                <a:spcPts val="585"/>
+              </a:spcAft>
+            </a:pPr>
+            <a:r>
+              <a:rPr sz="1300" b="1" i="0">
+                <a:solidFill>
+                  <a:srgbClr val="0B2D5B"/>
                 </a:solidFill>
                 <a:latin typeface="Inter Tight"/>
               </a:rPr>
-              <a:t>TEACHER PAGE  ·  skipped when you present  ·  Before you teach</a:t>
-            </a:r>
-          </a:p>
-        </p:txBody>
-      </p:sp>
-      <p:sp>
-        <p:nvSpPr>
-          <p:cNvPr id="4" name="TextBox 3"/>
+              <a:t>NEEDS 5 TO 7</a:t>
+            </a:r>
+          </a:p>
+        </p:txBody>
+      </p:sp>
+      <p:sp>
+        <p:nvSpPr>
+          <p:cNvPr id="11" name="TextBox 10"/>
           <p:cNvSpPr txBox="1"/>
           <p:nvPr/>
         </p:nvSpPr>
         <p:spPr>
           <a:xfrm>
-            <a:off x="548640" y="685800"/>
-            <a:ext cx="10972800" cy="640080"/>
+            <a:off x="6583680" y="2788920"/>
+            <a:ext cx="4572000" cy="3108960"/>
           </a:xfrm>
           <a:prstGeom prst="rect">
             <a:avLst/>
@@ -6418,1555 +7961,65 @@
           <a:p>
             <a:pPr algn="l">
               <a:spcAft>
-                <a:spcPts val="1350"/>
-              </a:spcAft>
-            </a:pPr>
-            <a:r>
-              <a:rPr sz="3000" b="1" i="0">
+                <a:spcPts val="855"/>
+              </a:spcAft>
+            </a:pPr>
+            <a:r>
+              <a:rPr sz="1900" b="0" i="0">
                 <a:solidFill>
                   <a:srgbClr val="1C1B19"/>
                 </a:solidFill>
                 <a:latin typeface="Source Serif 4"/>
               </a:rPr>
-              <a:t>Before you teach</a:t>
-            </a:r>
-          </a:p>
-        </p:txBody>
-      </p:sp>
-      <p:sp>
-        <p:nvSpPr>
-          <p:cNvPr id="5" name="TextBox 4"/>
-          <p:cNvSpPr txBox="1"/>
-          <p:nvPr/>
-        </p:nvSpPr>
-        <p:spPr>
-          <a:xfrm>
-            <a:off x="548640" y="1463040"/>
-            <a:ext cx="5394960" cy="4937760"/>
-          </a:xfrm>
-          <a:prstGeom prst="rect">
-            <a:avLst/>
-          </a:prstGeom>
-          <a:noFill/>
-        </p:spPr>
-        <p:txBody>
-          <a:bodyPr wrap="square" anchor="t" lIns="0" rIns="0" tIns="0" bIns="0">
-            <a:spAutoFit/>
-          </a:bodyPr>
-          <a:lstStyle/>
-          <a:p>
-            <a:pPr algn="l">
-              <a:spcAft>
-                <a:spcPts val="585"/>
-              </a:spcAft>
-            </a:pPr>
-            <a:r>
-              <a:rPr sz="1500" b="1" i="0">
+              <a:t>Peace: calm, order, things feeling fair</a:t>
+            </a:r>
+          </a:p>
+          <a:p>
+            <a:pPr algn="l">
+              <a:spcAft>
+                <a:spcPts val="855"/>
+              </a:spcAft>
+            </a:pPr>
+            <a:r>
+              <a:rPr sz="1900" b="0" i="0">
                 <a:solidFill>
                   <a:srgbClr val="1C1B19"/>
                 </a:solidFill>
                 <a:latin typeface="Source Serif 4"/>
               </a:rPr>
-              <a:t>Keep it on the characters.</a:t>
-            </a:r>
-          </a:p>
-          <a:p>
-            <a:pPr algn="l">
-              <a:spcAft>
-                <a:spcPts val="585"/>
-              </a:spcAft>
-            </a:pPr>
-            <a:r>
-              <a:rPr sz="1300" b="0" i="0">
+              <a:t>Freedom: choice, space, a say</a:t>
+            </a:r>
+          </a:p>
+          <a:p>
+            <a:pPr algn="l">
+              <a:spcAft>
+                <a:spcPts val="855"/>
+              </a:spcAft>
+            </a:pPr>
+            <a:r>
+              <a:rPr sz="1900" b="0" i="0">
                 <a:solidFill>
                   <a:srgbClr val="1C1B19"/>
                 </a:solidFill>
                 <a:latin typeface="Source Serif 4"/>
               </a:rPr>
-              <a:t>Nobody should have to share their own feelings out loud. The stories are made-up students, not anyone in the room. If students disagree about the need, that's a good discussion: a feeling can come from more than one need.</a:t>
-            </a:r>
-          </a:p>
-          <a:p>
-            <a:pPr algn="l">
-              <a:spcAft>
-                <a:spcPts val="585"/>
-              </a:spcAft>
-            </a:pPr>
-            <a:r>
-              <a:rPr sz="1300" b="0" i="0">
+              <a:t>Meaning: purpose, growth, to matter</a:t>
+            </a:r>
+          </a:p>
+          <a:p>
+            <a:pPr algn="l">
+              <a:spcAft>
+                <a:spcPts val="855"/>
+              </a:spcAft>
+            </a:pPr>
+            <a:r>
+              <a:rPr sz="1900" b="0" i="0">
                 <a:solidFill>
                   <a:srgbClr val="1C1B19"/>
                 </a:solidFill>
                 <a:latin typeface="Source Serif 4"/>
               </a:rPr>
-              <a:t/>
-            </a:r>
-          </a:p>
-          <a:p>
-            <a:pPr algn="l">
-              <a:spcAft>
-                <a:spcPts val="585"/>
-              </a:spcAft>
-            </a:pPr>
-            <a:r>
-              <a:rPr sz="1500" b="1" i="0">
-                <a:solidFill>
-                  <a:srgbClr val="1C1B19"/>
-                </a:solidFill>
-                <a:latin typeface="Source Serif 4"/>
-              </a:rPr>
-              <a:t>Passing is always allowed.</a:t>
-            </a:r>
-          </a:p>
-          <a:p>
-            <a:pPr algn="l">
-              <a:spcAft>
-                <a:spcPts val="585"/>
-              </a:spcAft>
-            </a:pPr>
-            <a:r>
-              <a:rPr sz="1300" b="0" i="0">
-                <a:solidFill>
-                  <a:srgbClr val="1C1B19"/>
-                </a:solidFill>
-                <a:latin typeface="Source Serif 4"/>
-              </a:rPr>
-              <a:t>In the check-in, "pass" is a full answer. Some students are having a hard week and don't want the circle to know. Move on without comment.</a:t>
-            </a:r>
-          </a:p>
-          <a:p>
-            <a:pPr algn="l">
-              <a:spcAft>
-                <a:spcPts val="585"/>
-              </a:spcAft>
-            </a:pPr>
-            <a:r>
-              <a:rPr sz="1300" b="0" i="0">
-                <a:solidFill>
-                  <a:srgbClr val="1C1B19"/>
-                </a:solidFill>
-                <a:latin typeface="Source Serif 4"/>
-              </a:rPr>
-              <a:t/>
-            </a:r>
-          </a:p>
-          <a:p>
-            <a:pPr algn="l">
-              <a:spcAft>
-                <a:spcPts val="585"/>
-              </a:spcAft>
-            </a:pPr>
-            <a:r>
-              <a:rPr sz="1500" b="1" i="0">
-                <a:solidFill>
-                  <a:srgbClr val="1C1B19"/>
-                </a:solidFill>
-                <a:latin typeface="Source Serif 4"/>
-              </a:rPr>
-              <a:t>If a word in the check-in worries you.</a:t>
-            </a:r>
-          </a:p>
-          <a:p>
-            <a:pPr algn="l">
-              <a:spcAft>
-                <a:spcPts val="585"/>
-              </a:spcAft>
-            </a:pPr>
-            <a:r>
-              <a:rPr sz="1300" b="0" i="0">
-                <a:solidFill>
-                  <a:srgbClr val="1C1B19"/>
-                </a:solidFill>
-                <a:latin typeface="Source Serif 4"/>
-              </a:rPr>
-              <a:t>If someone says "hopeless," "numb" or something heavier, don't stop the circle to ask about it. Check in privately afterward and connect them with a counselor that day. Don't ask screening questions in advisory.</a:t>
-            </a:r>
-          </a:p>
-          <a:p>
-            <a:pPr algn="l">
-              <a:spcAft>
-                <a:spcPts val="585"/>
-              </a:spcAft>
-            </a:pPr>
-            <a:r>
-              <a:rPr sz="1300" b="0" i="0">
-                <a:solidFill>
-                  <a:srgbClr val="1C1B19"/>
-                </a:solidFill>
-                <a:latin typeface="Source Serif 4"/>
-              </a:rPr>
-              <a:t/>
-            </a:r>
-          </a:p>
-        </p:txBody>
-      </p:sp>
-      <p:sp>
-        <p:nvSpPr>
-          <p:cNvPr id="6" name="TextBox 5"/>
-          <p:cNvSpPr txBox="1"/>
-          <p:nvPr/>
-        </p:nvSpPr>
-        <p:spPr>
-          <a:xfrm>
-            <a:off x="6217920" y="1463040"/>
-            <a:ext cx="5394960" cy="4937760"/>
-          </a:xfrm>
-          <a:prstGeom prst="rect">
-            <a:avLst/>
-          </a:prstGeom>
-          <a:noFill/>
-        </p:spPr>
-        <p:txBody>
-          <a:bodyPr wrap="square" anchor="t" lIns="0" rIns="0" tIns="0" bIns="0">
-            <a:spAutoFit/>
-          </a:bodyPr>
-          <a:lstStyle/>
-          <a:p>
-            <a:pPr algn="l">
-              <a:spcAft>
-                <a:spcPts val="585"/>
-              </a:spcAft>
-            </a:pPr>
-            <a:r>
-              <a:rPr sz="1500" b="1" i="0">
-                <a:solidFill>
-                  <a:srgbClr val="1C1B19"/>
-                </a:solidFill>
-                <a:latin typeface="Source Serif 4"/>
-              </a:rPr>
-              <a:t>Safety is a need too.</a:t>
-            </a:r>
-          </a:p>
-          <a:p>
-            <a:pPr algn="l">
-              <a:spcAft>
-                <a:spcPts val="585"/>
-              </a:spcAft>
-            </a:pPr>
-            <a:r>
-              <a:rPr sz="1300" b="0" i="0">
-                <a:solidFill>
-                  <a:srgbClr val="1C1B19"/>
-                </a:solidFill>
-                <a:latin typeface="Source Serif 4"/>
-              </a:rPr>
-              <a:t>If a student says a need for safety isn't being met, at home, online or in a relationship, that goes to a counselor the same day.</a:t>
-            </a:r>
-          </a:p>
-          <a:p>
-            <a:pPr algn="l">
-              <a:spcAft>
-                <a:spcPts val="585"/>
-              </a:spcAft>
-            </a:pPr>
-            <a:r>
-              <a:rPr sz="1300" b="0" i="0">
-                <a:solidFill>
-                  <a:srgbClr val="1C1B19"/>
-                </a:solidFill>
-                <a:latin typeface="Source Serif 4"/>
-              </a:rPr>
-              <a:t/>
-            </a:r>
-          </a:p>
-          <a:p>
-            <a:pPr algn="l">
-              <a:spcAft>
-                <a:spcPts val="585"/>
-              </a:spcAft>
-            </a:pPr>
-            <a:r>
-              <a:rPr sz="1500" b="1" i="0">
-                <a:solidFill>
-                  <a:srgbClr val="1C1B19"/>
-                </a:solidFill>
-                <a:latin typeface="Source Serif 4"/>
-              </a:rPr>
-              <a:t>Tuan's story may be someone's life.</a:t>
-            </a:r>
-          </a:p>
-          <a:p>
-            <a:pPr algn="l">
-              <a:spcAft>
-                <a:spcPts val="585"/>
-              </a:spcAft>
-            </a:pPr>
-            <a:r>
-              <a:rPr sz="1300" b="0" i="0">
-                <a:solidFill>
-                  <a:srgbClr val="1C1B19"/>
-                </a:solidFill>
-                <a:latin typeface="Source Serif 4"/>
-              </a:rPr>
-              <a:t>Some students translate for their families or help with bills. Don't look at anyone while reading it, and don't invite students to say it's them.</a:t>
-            </a:r>
-          </a:p>
-          <a:p>
-            <a:pPr algn="l">
-              <a:spcAft>
-                <a:spcPts val="585"/>
-              </a:spcAft>
-            </a:pPr>
-            <a:r>
-              <a:rPr sz="1300" b="0" i="0">
-                <a:solidFill>
-                  <a:srgbClr val="1C1B19"/>
-                </a:solidFill>
-                <a:latin typeface="Source Serif 4"/>
-              </a:rPr>
-              <a:t/>
-            </a:r>
-          </a:p>
-          <a:p>
-            <a:pPr algn="l">
-              <a:spcAft>
-                <a:spcPts val="585"/>
-              </a:spcAft>
-            </a:pPr>
-            <a:r>
-              <a:rPr sz="1500" b="1" i="0">
-                <a:solidFill>
-                  <a:srgbClr val="1C1B19"/>
-                </a:solidFill>
-                <a:latin typeface="Source Serif 4"/>
-              </a:rPr>
-              <a:t>Nadia's story can sting in the fall.</a:t>
-            </a:r>
-          </a:p>
-          <a:p>
-            <a:pPr algn="l">
-              <a:spcAft>
-                <a:spcPts val="585"/>
-              </a:spcAft>
-            </a:pPr>
-            <a:r>
-              <a:rPr sz="1300" b="0" i="0">
-                <a:solidFill>
-                  <a:srgbClr val="1C1B19"/>
-                </a:solidFill>
-                <a:latin typeface="Source Serif 4"/>
-              </a:rPr>
-              <a:t>College conversations at home are tense for many seniors right now. Keep it on Nadia, and treat both of her needs as real.</a:t>
-            </a:r>
-          </a:p>
-          <a:p>
-            <a:pPr algn="l">
-              <a:spcAft>
-                <a:spcPts val="585"/>
-              </a:spcAft>
-            </a:pPr>
-            <a:r>
-              <a:rPr sz="1300" b="0" i="0">
-                <a:solidFill>
-                  <a:srgbClr val="1C1B19"/>
-                </a:solidFill>
-                <a:latin typeface="Source Serif 4"/>
-              </a:rPr>
-              <a:t/>
-            </a:r>
-          </a:p>
-        </p:txBody>
-      </p:sp>
-    </p:spTree>
-  </p:cSld>
-  <p:clrMapOvr>
-    <a:masterClrMapping/>
-  </p:clrMapOvr>
-</p:sld>
-</file>
-
-<file path=ppt/slides/slide3.xml><?xml version="1.0" encoding="utf-8"?>
-<p:sld xmlns:a="http://schemas.openxmlformats.org/drawingml/2006/main" xmlns:p="http://schemas.openxmlformats.org/presentationml/2006/main" xmlns:r="http://schemas.openxmlformats.org/officeDocument/2006/relationships" show="0">
-  <p:cSld>
-    <p:bg>
-      <p:bgPr>
-        <a:solidFill>
-          <a:srgbClr val="EEEBE4"/>
-        </a:solidFill>
-        <a:effectLst/>
-      </p:bgPr>
-    </p:bg>
-    <p:spTree>
-      <p:nvGrpSpPr>
-        <p:cNvPr id="1" name=""/>
-        <p:cNvGrpSpPr/>
-        <p:nvPr/>
-      </p:nvGrpSpPr>
-      <p:grpSpPr/>
-      <p:sp>
-        <p:nvSpPr>
-          <p:cNvPr id="2" name="Rectangle 1"/>
-          <p:cNvSpPr/>
-          <p:nvPr/>
-        </p:nvSpPr>
-        <p:spPr>
-          <a:xfrm>
-            <a:off x="0" y="0"/>
-            <a:ext cx="12191695" cy="384048"/>
-          </a:xfrm>
-          <a:prstGeom prst="rect">
-            <a:avLst/>
-          </a:prstGeom>
-          <a:solidFill>
-            <a:srgbClr val="0B2D5B"/>
-          </a:solidFill>
-          <a:ln>
-            <a:noFill/>
-          </a:ln>
-          <a:effectLst/>
-        </p:spPr>
-        <p:style>
-          <a:lnRef idx="1">
-            <a:schemeClr val="accent1"/>
-          </a:lnRef>
-          <a:fillRef idx="3">
-            <a:schemeClr val="accent1"/>
-          </a:fillRef>
-          <a:effectRef idx="2">
-            <a:schemeClr val="accent1"/>
-          </a:effectRef>
-          <a:fontRef idx="minor">
-            <a:schemeClr val="lt1"/>
-          </a:fontRef>
-        </p:style>
-        <p:txBody>
-          <a:bodyPr rtlCol="0" anchor="ctr"/>
-          <a:lstStyle/>
-          <a:p>
-            <a:pPr algn="ctr"/>
-          </a:p>
-        </p:txBody>
-      </p:sp>
-      <p:sp>
-        <p:nvSpPr>
-          <p:cNvPr id="3" name="TextBox 2"/>
-          <p:cNvSpPr txBox="1"/>
-          <p:nvPr/>
-        </p:nvSpPr>
-        <p:spPr>
-          <a:xfrm>
-            <a:off x="548640" y="100584"/>
-            <a:ext cx="10972800" cy="274320"/>
-          </a:xfrm>
-          <a:prstGeom prst="rect">
-            <a:avLst/>
-          </a:prstGeom>
-          <a:noFill/>
-        </p:spPr>
-        <p:txBody>
-          <a:bodyPr wrap="square" anchor="t" lIns="0" rIns="0" tIns="0" bIns="0">
-            <a:spAutoFit/>
-          </a:bodyPr>
-          <a:lstStyle/>
-          <a:p>
-            <a:pPr algn="l">
-              <a:spcAft>
-                <a:spcPts val="495"/>
-              </a:spcAft>
-            </a:pPr>
-            <a:r>
-              <a:rPr sz="1100" b="1" i="0">
-                <a:solidFill>
-                  <a:srgbClr val="FFFFFF"/>
-                </a:solidFill>
-                <a:latin typeface="Inter Tight"/>
-              </a:rPr>
-              <a:t>TEACHER PAGE  ·  skipped when you present  ·  Every student in the room</a:t>
-            </a:r>
-          </a:p>
-        </p:txBody>
-      </p:sp>
-      <p:sp>
-        <p:nvSpPr>
-          <p:cNvPr id="4" name="TextBox 3"/>
-          <p:cNvSpPr txBox="1"/>
-          <p:nvPr/>
-        </p:nvSpPr>
-        <p:spPr>
-          <a:xfrm>
-            <a:off x="548640" y="685800"/>
-            <a:ext cx="10972800" cy="640080"/>
-          </a:xfrm>
-          <a:prstGeom prst="rect">
-            <a:avLst/>
-          </a:prstGeom>
-          <a:noFill/>
-        </p:spPr>
-        <p:txBody>
-          <a:bodyPr wrap="square" anchor="t" lIns="0" rIns="0" tIns="0" bIns="0">
-            <a:spAutoFit/>
-          </a:bodyPr>
-          <a:lstStyle/>
-          <a:p>
-            <a:pPr algn="l">
-              <a:spcAft>
-                <a:spcPts val="1350"/>
-              </a:spcAft>
-            </a:pPr>
-            <a:r>
-              <a:rPr sz="3000" b="1" i="0">
-                <a:solidFill>
-                  <a:srgbClr val="1C1B19"/>
-                </a:solidFill>
-                <a:latin typeface="Source Serif 4"/>
-              </a:rPr>
-              <a:t>Every student in the room</a:t>
-            </a:r>
-          </a:p>
-        </p:txBody>
-      </p:sp>
-      <p:sp>
-        <p:nvSpPr>
-          <p:cNvPr id="5" name="TextBox 4"/>
-          <p:cNvSpPr txBox="1"/>
-          <p:nvPr/>
-        </p:nvSpPr>
-        <p:spPr>
-          <a:xfrm>
-            <a:off x="548640" y="1325880"/>
-            <a:ext cx="10972800" cy="365760"/>
-          </a:xfrm>
-          <a:prstGeom prst="rect">
-            <a:avLst/>
-          </a:prstGeom>
-          <a:noFill/>
-        </p:spPr>
-        <p:txBody>
-          <a:bodyPr wrap="square" anchor="t" lIns="0" rIns="0" tIns="0" bIns="0">
-            <a:spAutoFit/>
-          </a:bodyPr>
-          <a:lstStyle/>
-          <a:p>
-            <a:pPr algn="l">
-              <a:spcAft>
-                <a:spcPts val="630"/>
-              </a:spcAft>
-            </a:pPr>
-            <a:r>
-              <a:rPr sz="1400" b="0" i="0">
-                <a:solidFill>
-                  <a:srgbClr val="5D5A54"/>
-                </a:solidFill>
-                <a:latin typeface="Inter Tight"/>
-              </a:rPr>
-              <a:t>Culture, family, identity, ability and money: what to keep in mind for this topic.</a:t>
-            </a:r>
-          </a:p>
-        </p:txBody>
-      </p:sp>
-      <p:sp>
-        <p:nvSpPr>
-          <p:cNvPr id="6" name="TextBox 5"/>
-          <p:cNvSpPr txBox="1"/>
-          <p:nvPr/>
-        </p:nvSpPr>
-        <p:spPr>
-          <a:xfrm>
-            <a:off x="548640" y="1828800"/>
-            <a:ext cx="5394960" cy="4572000"/>
-          </a:xfrm>
-          <a:prstGeom prst="rect">
-            <a:avLst/>
-          </a:prstGeom>
-          <a:noFill/>
-        </p:spPr>
-        <p:txBody>
-          <a:bodyPr wrap="square" anchor="t" lIns="0" rIns="0" tIns="0" bIns="0">
-            <a:spAutoFit/>
-          </a:bodyPr>
-          <a:lstStyle/>
-          <a:p>
-            <a:pPr algn="l">
-              <a:spcAft>
-                <a:spcPts val="585"/>
-              </a:spcAft>
-            </a:pPr>
-            <a:r>
-              <a:rPr sz="1500" b="1" i="0">
-                <a:solidFill>
-                  <a:srgbClr val="1C1B19"/>
-                </a:solidFill>
-                <a:latin typeface="Source Serif 4"/>
-              </a:rPr>
-              <a:t>Feelings in more than one language.</a:t>
-            </a:r>
-          </a:p>
-          <a:p>
-            <a:pPr algn="l">
-              <a:spcAft>
-                <a:spcPts val="585"/>
-              </a:spcAft>
-            </a:pPr>
-            <a:r>
-              <a:rPr sz="1300" b="0" i="0">
-                <a:solidFill>
-                  <a:srgbClr val="1C1B19"/>
-                </a:solidFill>
-                <a:latin typeface="Source Serif 4"/>
-              </a:rPr>
-              <a:t>Some students think about feelings in a language other than English, or have a family word that English doesn't. Say clearly that any language counts in the check-in and on the card. Tuan's story makes room for students who interpret for their families.</a:t>
-            </a:r>
-          </a:p>
-          <a:p>
-            <a:pPr algn="l">
-              <a:spcAft>
-                <a:spcPts val="585"/>
-              </a:spcAft>
-            </a:pPr>
-            <a:r>
-              <a:rPr sz="1300" b="0" i="0">
-                <a:solidFill>
-                  <a:srgbClr val="1C1B19"/>
-                </a:solidFill>
-                <a:latin typeface="Source Serif 4"/>
-              </a:rPr>
-              <a:t/>
-            </a:r>
-          </a:p>
-          <a:p>
-            <a:pPr algn="l">
-              <a:spcAft>
-                <a:spcPts val="585"/>
-              </a:spcAft>
-            </a:pPr>
-            <a:r>
-              <a:rPr sz="1500" b="1" i="0">
-                <a:solidFill>
-                  <a:srgbClr val="1C1B19"/>
-                </a:solidFill>
-                <a:latin typeface="Source Serif 4"/>
-              </a:rPr>
-              <a:t>Which feelings get said out loud varies.</a:t>
-            </a:r>
-          </a:p>
-          <a:p>
-            <a:pPr algn="l">
-              <a:spcAft>
-                <a:spcPts val="585"/>
-              </a:spcAft>
-            </a:pPr>
-            <a:r>
-              <a:rPr sz="1300" b="0" i="0">
-                <a:solidFill>
-                  <a:srgbClr val="1C1B19"/>
-                </a:solidFill>
-                <a:latin typeface="Source Serif 4"/>
-              </a:rPr>
-              <a:t>The Tsai study shows that cultures value different feelings (excited versus calm), and families differ on which feelings get named and to whom. Avoid "In X families" generalizations. Ask students to notice their own home's rules, privately.</a:t>
-            </a:r>
-          </a:p>
-          <a:p>
-            <a:pPr algn="l">
-              <a:spcAft>
-                <a:spcPts val="585"/>
-              </a:spcAft>
-            </a:pPr>
-            <a:r>
-              <a:rPr sz="1300" b="0" i="0">
-                <a:solidFill>
-                  <a:srgbClr val="1C1B19"/>
-                </a:solidFill>
-                <a:latin typeface="Source Serif 4"/>
-              </a:rPr>
-              <a:t/>
-            </a:r>
-          </a:p>
-          <a:p>
-            <a:pPr algn="l">
-              <a:spcAft>
-                <a:spcPts val="585"/>
-              </a:spcAft>
-            </a:pPr>
-            <a:r>
-              <a:rPr sz="1500" b="1" i="0">
-                <a:solidFill>
-                  <a:srgbClr val="1C1B19"/>
-                </a:solidFill>
-                <a:latin typeface="Source Serif 4"/>
-              </a:rPr>
-              <a:t>Naming feelings is harder for some brains.</a:t>
-            </a:r>
-          </a:p>
-          <a:p>
-            <a:pPr algn="l">
-              <a:spcAft>
-                <a:spcPts val="585"/>
-              </a:spcAft>
-            </a:pPr>
-            <a:r>
-              <a:rPr sz="1300" b="0" i="0">
-                <a:solidFill>
-                  <a:srgbClr val="1C1B19"/>
-                </a:solidFill>
-                <a:latin typeface="Source Serif 4"/>
-              </a:rPr>
-              <a:t>Some autistic students, and others, find it hard to put feelings into words or notice body signals later. That's a difference to meet with patience. The word banks, the body check (chest, stomach, jaw, shoulders) and multiple-choice options help. Don't require eye contact in the circle.</a:t>
-            </a:r>
-          </a:p>
-          <a:p>
-            <a:pPr algn="l">
-              <a:spcAft>
-                <a:spcPts val="585"/>
-              </a:spcAft>
-            </a:pPr>
-            <a:r>
-              <a:rPr sz="1300" b="0" i="0">
-                <a:solidFill>
-                  <a:srgbClr val="1C1B19"/>
-                </a:solidFill>
-                <a:latin typeface="Source Serif 4"/>
-              </a:rPr>
-              <a:t/>
-            </a:r>
-          </a:p>
-        </p:txBody>
-      </p:sp>
-      <p:sp>
-        <p:nvSpPr>
-          <p:cNvPr id="7" name="TextBox 6"/>
-          <p:cNvSpPr txBox="1"/>
-          <p:nvPr/>
-        </p:nvSpPr>
-        <p:spPr>
-          <a:xfrm>
-            <a:off x="6217920" y="1828800"/>
-            <a:ext cx="5394960" cy="4572000"/>
-          </a:xfrm>
-          <a:prstGeom prst="rect">
-            <a:avLst/>
-          </a:prstGeom>
-          <a:noFill/>
-        </p:spPr>
-        <p:txBody>
-          <a:bodyPr wrap="square" anchor="t" lIns="0" rIns="0" tIns="0" bIns="0">
-            <a:spAutoFit/>
-          </a:bodyPr>
-          <a:lstStyle/>
-          <a:p>
-            <a:pPr algn="l">
-              <a:spcAft>
-                <a:spcPts val="585"/>
-              </a:spcAft>
-            </a:pPr>
-            <a:r>
-              <a:rPr sz="1500" b="1" i="0">
-                <a:solidFill>
-                  <a:srgbClr val="1C1B19"/>
-                </a:solidFill>
-                <a:latin typeface="Source Serif 4"/>
-              </a:rPr>
-              <a:t>Family structure.</a:t>
-            </a:r>
-          </a:p>
-          <a:p>
-            <a:pPr algn="l">
-              <a:spcAft>
-                <a:spcPts val="585"/>
-              </a:spcAft>
-            </a:pPr>
-            <a:r>
-              <a:rPr sz="1300" b="0" i="0">
-                <a:solidFill>
-                  <a:srgbClr val="1C1B19"/>
-                </a:solidFill>
-                <a:latin typeface="Source Serif 4"/>
-              </a:rPr>
-              <a:t>Nadia's parents are in her story, but say "parent or caregiver" when you talk about needs at home. Students live with grandparents, one parent, two moms or two dads, in foster or kinship care, or across two homes.</a:t>
-            </a:r>
-          </a:p>
-          <a:p>
-            <a:pPr algn="l">
-              <a:spcAft>
-                <a:spcPts val="585"/>
-              </a:spcAft>
-            </a:pPr>
-            <a:r>
-              <a:rPr sz="1300" b="0" i="0">
-                <a:solidFill>
-                  <a:srgbClr val="1C1B19"/>
-                </a:solidFill>
-                <a:latin typeface="Source Serif 4"/>
-              </a:rPr>
-              <a:t/>
-            </a:r>
-          </a:p>
-          <a:p>
-            <a:pPr algn="l">
-              <a:spcAft>
-                <a:spcPts val="585"/>
-              </a:spcAft>
-            </a:pPr>
-            <a:r>
-              <a:rPr sz="1500" b="1" i="0">
-                <a:solidFill>
-                  <a:srgbClr val="1C1B19"/>
-                </a:solidFill>
-                <a:latin typeface="Source Serif 4"/>
-              </a:rPr>
-              <a:t>Rest isn't equally available.</a:t>
-            </a:r>
-          </a:p>
-          <a:p>
-            <a:pPr algn="l">
-              <a:spcAft>
-                <a:spcPts val="585"/>
-              </a:spcAft>
-            </a:pPr>
-            <a:r>
-              <a:rPr sz="1300" b="0" i="0">
-                <a:solidFill>
-                  <a:srgbClr val="1C1B19"/>
-                </a:solidFill>
-                <a:latin typeface="Source Serif 4"/>
-              </a:rPr>
-              <a:t>Marisol works weekends and Tuan helps with bills. Some students can't just take a night off. When talking about the Body need, offer small, free options and avoid implying that rest is a choice everyone has.</a:t>
-            </a:r>
-          </a:p>
-          <a:p>
-            <a:pPr algn="l">
-              <a:spcAft>
-                <a:spcPts val="585"/>
-              </a:spcAft>
-            </a:pPr>
-            <a:r>
-              <a:rPr sz="1300" b="0" i="0">
-                <a:solidFill>
-                  <a:srgbClr val="1C1B19"/>
-                </a:solidFill>
-                <a:latin typeface="Source Serif 4"/>
-              </a:rPr>
-              <a:t/>
-            </a:r>
-          </a:p>
-          <a:p>
-            <a:pPr algn="l">
-              <a:spcAft>
-                <a:spcPts val="585"/>
-              </a:spcAft>
-            </a:pPr>
-            <a:r>
-              <a:rPr sz="1500" b="1" i="0">
-                <a:solidFill>
-                  <a:srgbClr val="1C1B19"/>
-                </a:solidFill>
-                <a:latin typeface="Source Serif 4"/>
-              </a:rPr>
-              <a:t>Boys get to be hurt and lonely.</a:t>
-            </a:r>
-          </a:p>
-          <a:p>
-            <a:pPr algn="l">
-              <a:spcAft>
-                <a:spcPts val="585"/>
-              </a:spcAft>
-            </a:pPr>
-            <a:r>
-              <a:rPr sz="1300" b="0" i="0">
-                <a:solidFill>
-                  <a:srgbClr val="1C1B19"/>
-                </a:solidFill>
-                <a:latin typeface="Source Serif 4"/>
-              </a:rPr>
-              <a:t>Students hear that some feelings belong to some genders. Mix genders when giving examples, and when a student offers "hurt" or "lonely" for Andre or Tuan, treat it as an ordinary, accurate answer.</a:t>
-            </a:r>
-          </a:p>
-          <a:p>
-            <a:pPr algn="l">
-              <a:spcAft>
-                <a:spcPts val="585"/>
-              </a:spcAft>
-            </a:pPr>
-            <a:r>
-              <a:rPr sz="1300" b="0" i="0">
-                <a:solidFill>
-                  <a:srgbClr val="1C1B19"/>
-                </a:solidFill>
-                <a:latin typeface="Source Serif 4"/>
-              </a:rPr>
-              <a:t/>
-            </a:r>
-          </a:p>
-        </p:txBody>
-      </p:sp>
-    </p:spTree>
-  </p:cSld>
-  <p:clrMapOvr>
-    <a:masterClrMapping/>
-  </p:clrMapOvr>
-</p:sld>
-</file>
-
-<file path=ppt/slides/slide4.xml><?xml version="1.0" encoding="utf-8"?>
-<p:sld xmlns:a="http://schemas.openxmlformats.org/drawingml/2006/main" xmlns:p="http://schemas.openxmlformats.org/presentationml/2006/main" xmlns:r="http://schemas.openxmlformats.org/officeDocument/2006/relationships" show="0">
-  <p:cSld>
-    <p:bg>
-      <p:bgPr>
-        <a:solidFill>
-          <a:srgbClr val="EEEBE4"/>
-        </a:solidFill>
-        <a:effectLst/>
-      </p:bgPr>
-    </p:bg>
-    <p:spTree>
-      <p:nvGrpSpPr>
-        <p:cNvPr id="1" name=""/>
-        <p:cNvGrpSpPr/>
-        <p:nvPr/>
-      </p:nvGrpSpPr>
-      <p:grpSpPr/>
-      <p:sp>
-        <p:nvSpPr>
-          <p:cNvPr id="2" name="Rectangle 1"/>
-          <p:cNvSpPr/>
-          <p:nvPr/>
-        </p:nvSpPr>
-        <p:spPr>
-          <a:xfrm>
-            <a:off x="0" y="0"/>
-            <a:ext cx="12191695" cy="384048"/>
-          </a:xfrm>
-          <a:prstGeom prst="rect">
-            <a:avLst/>
-          </a:prstGeom>
-          <a:solidFill>
-            <a:srgbClr val="0B2D5B"/>
-          </a:solidFill>
-          <a:ln>
-            <a:noFill/>
-          </a:ln>
-          <a:effectLst/>
-        </p:spPr>
-        <p:style>
-          <a:lnRef idx="1">
-            <a:schemeClr val="accent1"/>
-          </a:lnRef>
-          <a:fillRef idx="3">
-            <a:schemeClr val="accent1"/>
-          </a:fillRef>
-          <a:effectRef idx="2">
-            <a:schemeClr val="accent1"/>
-          </a:effectRef>
-          <a:fontRef idx="minor">
-            <a:schemeClr val="lt1"/>
-          </a:fontRef>
-        </p:style>
-        <p:txBody>
-          <a:bodyPr rtlCol="0" anchor="ctr"/>
-          <a:lstStyle/>
-          <a:p>
-            <a:pPr algn="ctr"/>
-          </a:p>
-        </p:txBody>
-      </p:sp>
-      <p:sp>
-        <p:nvSpPr>
-          <p:cNvPr id="3" name="TextBox 2"/>
-          <p:cNvSpPr txBox="1"/>
-          <p:nvPr/>
-        </p:nvSpPr>
-        <p:spPr>
-          <a:xfrm>
-            <a:off x="548640" y="100584"/>
-            <a:ext cx="10972800" cy="274320"/>
-          </a:xfrm>
-          <a:prstGeom prst="rect">
-            <a:avLst/>
-          </a:prstGeom>
-          <a:noFill/>
-        </p:spPr>
-        <p:txBody>
-          <a:bodyPr wrap="square" anchor="t" lIns="0" rIns="0" tIns="0" bIns="0">
-            <a:spAutoFit/>
-          </a:bodyPr>
-          <a:lstStyle/>
-          <a:p>
-            <a:pPr algn="l">
-              <a:spcAft>
-                <a:spcPts val="495"/>
-              </a:spcAft>
-            </a:pPr>
-            <a:r>
-              <a:rPr sz="1100" b="1" i="0">
-                <a:solidFill>
-                  <a:srgbClr val="FFFFFF"/>
-                </a:solidFill>
-                <a:latin typeface="Inter Tight"/>
-              </a:rPr>
-              <a:t>TEACHER PAGE  ·  skipped when you present  ·  Background</a:t>
-            </a:r>
-          </a:p>
-        </p:txBody>
-      </p:sp>
-      <p:sp>
-        <p:nvSpPr>
-          <p:cNvPr id="4" name="TextBox 3"/>
-          <p:cNvSpPr txBox="1"/>
-          <p:nvPr/>
-        </p:nvSpPr>
-        <p:spPr>
-          <a:xfrm>
-            <a:off x="548640" y="685800"/>
-            <a:ext cx="10972800" cy="640080"/>
-          </a:xfrm>
-          <a:prstGeom prst="rect">
-            <a:avLst/>
-          </a:prstGeom>
-          <a:noFill/>
-        </p:spPr>
-        <p:txBody>
-          <a:bodyPr wrap="square" anchor="t" lIns="0" rIns="0" tIns="0" bIns="0">
-            <a:spAutoFit/>
-          </a:bodyPr>
-          <a:lstStyle/>
-          <a:p>
-            <a:pPr algn="l">
-              <a:spcAft>
-                <a:spcPts val="1350"/>
-              </a:spcAft>
-            </a:pPr>
-            <a:r>
-              <a:rPr sz="3000" b="1" i="0">
-                <a:solidFill>
-                  <a:srgbClr val="1C1B19"/>
-                </a:solidFill>
-                <a:latin typeface="Source Serif 4"/>
-              </a:rPr>
-              <a:t>What the research says</a:t>
-            </a:r>
-          </a:p>
-        </p:txBody>
-      </p:sp>
-      <p:sp>
-        <p:nvSpPr>
-          <p:cNvPr id="5" name="TextBox 4"/>
-          <p:cNvSpPr txBox="1"/>
-          <p:nvPr/>
-        </p:nvSpPr>
-        <p:spPr>
-          <a:xfrm>
-            <a:off x="548640" y="1463040"/>
-            <a:ext cx="5394960" cy="4937760"/>
-          </a:xfrm>
-          <a:prstGeom prst="rect">
-            <a:avLst/>
-          </a:prstGeom>
-          <a:noFill/>
-        </p:spPr>
-        <p:txBody>
-          <a:bodyPr wrap="square" anchor="t" lIns="0" rIns="0" tIns="0" bIns="0">
-            <a:spAutoFit/>
-          </a:bodyPr>
-          <a:lstStyle/>
-          <a:p>
-            <a:pPr algn="l">
-              <a:spcAft>
-                <a:spcPts val="585"/>
-              </a:spcAft>
-            </a:pPr>
-            <a:r>
-              <a:rPr sz="1300" b="0" i="0">
-                <a:solidFill>
-                  <a:srgbClr val="1C1B19"/>
-                </a:solidFill>
-                <a:latin typeface="Source Serif 4"/>
-              </a:rPr>
-              <a:t>Putting a word to the emotion in a face ("angry," "scared") turned down activity in the amygdala and turned up activity in the right ventrolateral prefrontal cortex. The two moved in opposite directions.</a:t>
-            </a:r>
-          </a:p>
-          <a:p>
-            <a:pPr algn="l">
-              <a:spcAft>
-                <a:spcPts val="585"/>
-              </a:spcAft>
-            </a:pPr>
-            <a:r>
-              <a:rPr sz="1050" b="0" i="0">
-                <a:solidFill>
-                  <a:srgbClr val="5D5A54"/>
-                </a:solidFill>
-                <a:latin typeface="Inter Tight"/>
-              </a:rPr>
-              <a:t>Lieberman et al., 2007, Psychological Science (UCLA)</a:t>
-            </a:r>
-          </a:p>
-          <a:p>
-            <a:pPr algn="l">
-              <a:spcAft>
-                <a:spcPts val="585"/>
-              </a:spcAft>
-            </a:pPr>
-            <a:r>
-              <a:rPr sz="1300" b="0" i="0">
-                <a:solidFill>
-                  <a:srgbClr val="1C1B19"/>
-                </a:solidFill>
-                <a:latin typeface="Source Serif 4"/>
-              </a:rPr>
-              <a:t>People afraid of spiders who described their feelings out loud while near one had smaller physical fear responses a week later than people who distracted themselves or tried to talk themselves out of it.</a:t>
-            </a:r>
-          </a:p>
-          <a:p>
-            <a:pPr algn="l">
-              <a:spcAft>
-                <a:spcPts val="585"/>
-              </a:spcAft>
-            </a:pPr>
-            <a:r>
-              <a:rPr sz="1050" b="0" i="0">
-                <a:solidFill>
-                  <a:srgbClr val="5D5A54"/>
-                </a:solidFill>
-                <a:latin typeface="Inter Tight"/>
-              </a:rPr>
-              <a:t>Kircanski, Lieberman and Craske, 2012, Psychological Science</a:t>
-            </a:r>
-          </a:p>
-          <a:p>
-            <a:pPr algn="l">
-              <a:spcAft>
-                <a:spcPts val="585"/>
-              </a:spcAft>
-            </a:pPr>
-            <a:r>
-              <a:rPr sz="1300" b="0" i="0">
-                <a:solidFill>
-                  <a:srgbClr val="1C1B19"/>
-                </a:solidFill>
-                <a:latin typeface="Source Serif 4"/>
-              </a:rPr>
-              <a:t>The insula tracks signals from inside the body (heartbeat, gut, breathing, muscle tension). Neuroscientist Bud Craig proposed it's where those signals become conscious feelings.</a:t>
-            </a:r>
-          </a:p>
-          <a:p>
-            <a:pPr algn="l">
-              <a:spcAft>
-                <a:spcPts val="585"/>
-              </a:spcAft>
-            </a:pPr>
-            <a:r>
-              <a:rPr sz="1050" b="0" i="0">
-                <a:solidFill>
-                  <a:srgbClr val="5D5A54"/>
-                </a:solidFill>
-                <a:latin typeface="Inter Tight"/>
-              </a:rPr>
-              <a:t>Craig, 2009, Nature Reviews Neuroscience</a:t>
-            </a:r>
-          </a:p>
-          <a:p>
-            <a:pPr algn="l">
-              <a:spcAft>
-                <a:spcPts val="585"/>
-              </a:spcAft>
-            </a:pPr>
-            <a:r>
-              <a:rPr sz="1300" b="0" i="0">
-                <a:solidFill>
-                  <a:srgbClr val="1C1B19"/>
-                </a:solidFill>
-                <a:latin typeface="Source Serif 4"/>
-              </a:rPr>
-              <a:t>People who describe emotions in more detail (emotional granularity) are less likely to binge drink, lash out or hurt themselves when upset, and report less severe anxiety and depression.</a:t>
-            </a:r>
-          </a:p>
-          <a:p>
-            <a:pPr algn="l">
-              <a:spcAft>
-                <a:spcPts val="585"/>
-              </a:spcAft>
-            </a:pPr>
-            <a:r>
-              <a:rPr sz="1050" b="0" i="0">
-                <a:solidFill>
-                  <a:srgbClr val="5D5A54"/>
-                </a:solidFill>
-                <a:latin typeface="Inter Tight"/>
-              </a:rPr>
-              <a:t>Kashdan, Barrett and McKnight, 2015, Current Directions in Psychological Science</a:t>
-            </a:r>
-          </a:p>
-        </p:txBody>
-      </p:sp>
-      <p:sp>
-        <p:nvSpPr>
-          <p:cNvPr id="6" name="TextBox 5"/>
-          <p:cNvSpPr txBox="1"/>
-          <p:nvPr/>
-        </p:nvSpPr>
-        <p:spPr>
-          <a:xfrm>
-            <a:off x="6217920" y="1463040"/>
-            <a:ext cx="5394960" cy="4937760"/>
-          </a:xfrm>
-          <a:prstGeom prst="rect">
-            <a:avLst/>
-          </a:prstGeom>
-          <a:noFill/>
-        </p:spPr>
-        <p:txBody>
-          <a:bodyPr wrap="square" anchor="t" lIns="0" rIns="0" tIns="0" bIns="0">
-            <a:spAutoFit/>
-          </a:bodyPr>
-          <a:lstStyle/>
-          <a:p>
-            <a:pPr algn="l">
-              <a:spcAft>
-                <a:spcPts val="585"/>
-              </a:spcAft>
-            </a:pPr>
-            <a:r>
-              <a:rPr sz="1300" b="0" i="0">
-                <a:solidFill>
-                  <a:srgbClr val="1C1B19"/>
-                </a:solidFill>
-                <a:latin typeface="Source Serif 4"/>
-              </a:rPr>
-              <a:t>Self-determination theory points to three needs at the core of motivation and well-being: autonomy, competence and relatedness.</a:t>
-            </a:r>
-          </a:p>
-          <a:p>
-            <a:pPr algn="l">
-              <a:spcAft>
-                <a:spcPts val="585"/>
-              </a:spcAft>
-            </a:pPr>
-            <a:r>
-              <a:rPr sz="1050" b="0" i="0">
-                <a:solidFill>
-                  <a:srgbClr val="5D5A54"/>
-                </a:solidFill>
-                <a:latin typeface="Inter Tight"/>
-              </a:rPr>
-              <a:t>Ryan and Deci, 2000, American Psychologist</a:t>
-            </a:r>
-          </a:p>
-          <a:p>
-            <a:pPr algn="l">
-              <a:spcAft>
-                <a:spcPts val="585"/>
-              </a:spcAft>
-            </a:pPr>
-            <a:r>
-              <a:rPr sz="1300" b="0" i="0">
-                <a:solidFill>
-                  <a:srgbClr val="1C1B19"/>
-                </a:solidFill>
-                <a:latin typeface="Source Serif 4"/>
-              </a:rPr>
-              <a:t>European American participants ideally wanted to feel excited more than Hong Kong Chinese participants, who valued calm more. Chinese American participants landed in between.</a:t>
-            </a:r>
-          </a:p>
-          <a:p>
-            <a:pPr algn="l">
-              <a:spcAft>
-                <a:spcPts val="585"/>
-              </a:spcAft>
-            </a:pPr>
-            <a:r>
-              <a:rPr sz="1050" b="0" i="0">
-                <a:solidFill>
-                  <a:srgbClr val="5D5A54"/>
-                </a:solidFill>
-                <a:latin typeface="Inter Tight"/>
-              </a:rPr>
-              <a:t>Tsai, Knutson and Fung, 2006, Journal of Personality and Social Psychology (Stanford)</a:t>
-            </a:r>
-          </a:p>
-          <a:p>
-            <a:pPr algn="l">
-              <a:spcAft>
-                <a:spcPts val="585"/>
-              </a:spcAft>
-            </a:pPr>
-            <a:r>
-              <a:rPr sz="1300" b="0" i="0">
-                <a:solidFill>
-                  <a:srgbClr val="1C1B19"/>
-                </a:solidFill>
-                <a:latin typeface="Source Serif 4"/>
-              </a:rPr>
-              <a:t>The seven need categories and the feeling word banks are adapted from the Feelings Inventory and Needs Inventory.</a:t>
-            </a:r>
-          </a:p>
-          <a:p>
-            <a:pPr algn="l">
-              <a:spcAft>
-                <a:spcPts val="585"/>
-              </a:spcAft>
-            </a:pPr>
-            <a:r>
-              <a:rPr sz="1050" b="0" i="0">
-                <a:solidFill>
-                  <a:srgbClr val="5D5A54"/>
-                </a:solidFill>
-                <a:latin typeface="Inter Tight"/>
-              </a:rPr>
-              <a:t>© 2005 Center for Nonviolent Communication, www.cnvc.org</a:t>
-            </a:r>
-          </a:p>
-        </p:txBody>
-      </p:sp>
-    </p:spTree>
-  </p:cSld>
-  <p:clrMapOvr>
-    <a:masterClrMapping/>
-  </p:clrMapOvr>
-</p:sld>
-</file>
-
-<file path=ppt/slides/slide5.xml><?xml version="1.0" encoding="utf-8"?>
-<p:sld xmlns:a="http://schemas.openxmlformats.org/drawingml/2006/main" xmlns:p="http://schemas.openxmlformats.org/presentationml/2006/main" xmlns:r="http://schemas.openxmlformats.org/officeDocument/2006/relationships">
-  <p:cSld>
-    <p:bg>
-      <p:bgPr>
-        <a:solidFill>
-          <a:srgbClr val="0B2D5B"/>
-        </a:solidFill>
-        <a:effectLst/>
-      </p:bgPr>
-    </p:bg>
-    <p:spTree>
-      <p:nvGrpSpPr>
-        <p:cNvPr id="1" name=""/>
-        <p:cNvGrpSpPr/>
-        <p:nvPr/>
-      </p:nvGrpSpPr>
-      <p:grpSpPr/>
-      <p:sp>
-        <p:nvSpPr>
-          <p:cNvPr id="2" name="Rectangle 1"/>
-          <p:cNvSpPr/>
-          <p:nvPr/>
-        </p:nvSpPr>
-        <p:spPr>
-          <a:xfrm>
-            <a:off x="548640" y="502920"/>
-            <a:ext cx="457200" cy="54864"/>
-          </a:xfrm>
-          <a:prstGeom prst="rect">
-            <a:avLst/>
-          </a:prstGeom>
-          <a:solidFill>
-            <a:srgbClr val="F47B20"/>
-          </a:solidFill>
-          <a:ln>
-            <a:noFill/>
-          </a:ln>
-          <a:effectLst/>
-        </p:spPr>
-        <p:style>
-          <a:lnRef idx="1">
-            <a:schemeClr val="accent1"/>
-          </a:lnRef>
-          <a:fillRef idx="3">
-            <a:schemeClr val="accent1"/>
-          </a:fillRef>
-          <a:effectRef idx="2">
-            <a:schemeClr val="accent1"/>
-          </a:effectRef>
-          <a:fontRef idx="minor">
-            <a:schemeClr val="lt1"/>
-          </a:fontRef>
-        </p:style>
-        <p:txBody>
-          <a:bodyPr rtlCol="0" anchor="ctr"/>
-          <a:lstStyle/>
-          <a:p>
-            <a:pPr algn="ctr"/>
-          </a:p>
-        </p:txBody>
-      </p:sp>
-      <p:sp>
-        <p:nvSpPr>
-          <p:cNvPr id="3" name="TextBox 2"/>
-          <p:cNvSpPr txBox="1"/>
-          <p:nvPr/>
-        </p:nvSpPr>
-        <p:spPr>
-          <a:xfrm>
-            <a:off x="1143000" y="393192"/>
-            <a:ext cx="8229600" cy="274320"/>
-          </a:xfrm>
-          <a:prstGeom prst="rect">
-            <a:avLst/>
-          </a:prstGeom>
-          <a:noFill/>
-        </p:spPr>
-        <p:txBody>
-          <a:bodyPr wrap="square" anchor="t" lIns="0" rIns="0" tIns="0" bIns="0">
-            <a:spAutoFit/>
-          </a:bodyPr>
-          <a:lstStyle/>
-          <a:p>
-            <a:pPr algn="l">
-              <a:spcAft>
-                <a:spcPts val="540"/>
-              </a:spcAft>
-            </a:pPr>
-            <a:r>
-              <a:rPr sz="1200" b="1" i="0">
-                <a:solidFill>
-                  <a:srgbClr val="5D5A54"/>
-                </a:solidFill>
-                <a:latin typeface="Inter Tight"/>
-              </a:rPr>
-              <a:t>NAME THE NEED</a:t>
-            </a:r>
-          </a:p>
-        </p:txBody>
-      </p:sp>
-      <p:sp>
-        <p:nvSpPr>
-          <p:cNvPr id="4" name="TextBox 3"/>
-          <p:cNvSpPr txBox="1"/>
-          <p:nvPr/>
-        </p:nvSpPr>
-        <p:spPr>
-          <a:xfrm>
-            <a:off x="8229600" y="6400800"/>
-            <a:ext cx="3410712" cy="274320"/>
-          </a:xfrm>
-          <a:prstGeom prst="rect">
-            <a:avLst/>
-          </a:prstGeom>
-          <a:noFill/>
-        </p:spPr>
-        <p:txBody>
-          <a:bodyPr wrap="square" anchor="t" lIns="0" rIns="0" tIns="0" bIns="0">
-            <a:spAutoFit/>
-          </a:bodyPr>
-          <a:lstStyle/>
-          <a:p>
-            <a:pPr algn="r">
-              <a:spcAft>
-                <a:spcPts val="450"/>
-              </a:spcAft>
-            </a:pPr>
-            <a:r>
-              <a:rPr sz="1000" b="0" i="0">
-                <a:solidFill>
-                  <a:srgbClr val="5D5A54"/>
-                </a:solidFill>
-                <a:latin typeface="Inter Tight"/>
-              </a:rPr>
-              <a:t>Beaver Counseling</a:t>
-            </a:r>
-          </a:p>
-        </p:txBody>
-      </p:sp>
-      <p:sp>
-        <p:nvSpPr>
-          <p:cNvPr id="5" name="TextBox 4"/>
-          <p:cNvSpPr txBox="1"/>
-          <p:nvPr/>
-        </p:nvSpPr>
-        <p:spPr>
-          <a:xfrm>
-            <a:off x="822960" y="2011680"/>
-            <a:ext cx="10515600" cy="1463040"/>
-          </a:xfrm>
-          <a:prstGeom prst="rect">
-            <a:avLst/>
-          </a:prstGeom>
-          <a:noFill/>
-        </p:spPr>
-        <p:txBody>
-          <a:bodyPr wrap="square" anchor="b" lIns="0" rIns="0" tIns="0" bIns="0">
-            <a:spAutoFit/>
-          </a:bodyPr>
-          <a:lstStyle/>
-          <a:p>
-            <a:pPr algn="l">
-              <a:spcAft>
-                <a:spcPts val="2700"/>
-              </a:spcAft>
-            </a:pPr>
-            <a:r>
-              <a:rPr sz="6000" b="1" i="0">
-                <a:solidFill>
-                  <a:srgbClr val="FFFFFF"/>
-                </a:solidFill>
-                <a:latin typeface="Source Serif 4"/>
-              </a:rPr>
-              <a:t>Name the Need</a:t>
-            </a:r>
-          </a:p>
-        </p:txBody>
-      </p:sp>
-      <p:sp>
-        <p:nvSpPr>
-          <p:cNvPr id="6" name="TextBox 5"/>
-          <p:cNvSpPr txBox="1"/>
-          <p:nvPr/>
-        </p:nvSpPr>
-        <p:spPr>
-          <a:xfrm>
-            <a:off x="822960" y="3611880"/>
-            <a:ext cx="10515600" cy="914400"/>
-          </a:xfrm>
-          <a:prstGeom prst="rect">
-            <a:avLst/>
-          </a:prstGeom>
-          <a:noFill/>
-        </p:spPr>
-        <p:txBody>
-          <a:bodyPr wrap="square" anchor="t" lIns="0" rIns="0" tIns="0" bIns="0">
-            <a:spAutoFit/>
-          </a:bodyPr>
-          <a:lstStyle/>
-          <a:p>
-            <a:pPr algn="l">
-              <a:spcAft>
-                <a:spcPts val="1080"/>
-              </a:spcAft>
-            </a:pPr>
-            <a:r>
-              <a:rPr sz="2400" b="0" i="1">
-                <a:solidFill>
-                  <a:srgbClr val="E8E4DA"/>
-                </a:solidFill>
-                <a:latin typeface="Source Serif 4"/>
-              </a:rPr>
-              <a:t>"Fine" covers a lot of ground. Every feeling is a notification from a need.</a:t>
-            </a:r>
-          </a:p>
-        </p:txBody>
-      </p:sp>
-      <p:sp>
-        <p:nvSpPr>
-          <p:cNvPr id="7" name="TextBox 6"/>
-          <p:cNvSpPr txBox="1"/>
-          <p:nvPr/>
-        </p:nvSpPr>
-        <p:spPr>
-          <a:xfrm>
-            <a:off x="822960" y="6035040"/>
-            <a:ext cx="7315200" cy="365760"/>
-          </a:xfrm>
-          <a:prstGeom prst="rect">
-            <a:avLst/>
-          </a:prstGeom>
-          <a:noFill/>
-        </p:spPr>
-        <p:txBody>
-          <a:bodyPr wrap="square" anchor="t" lIns="0" rIns="0" tIns="0" bIns="0">
-            <a:spAutoFit/>
-          </a:bodyPr>
-          <a:lstStyle/>
-          <a:p>
-            <a:pPr algn="l">
-              <a:spcAft>
-                <a:spcPts val="585"/>
-              </a:spcAft>
-            </a:pPr>
-            <a:r>
-              <a:rPr sz="1300" b="0" i="0">
-                <a:solidFill>
-                  <a:srgbClr val="E8E4DA"/>
-                </a:solidFill>
-                <a:latin typeface="Inter Tight"/>
-              </a:rPr>
-              <a:t>Beaver Upper School · Counseling</a:t>
+              <a:t>Each one can feel met or not met</a:t>
             </a:r>
           </a:p>
         </p:txBody>
@@ -8075,7 +8128,7 @@
                 </a:solidFill>
                 <a:latin typeface="Inter Tight"/>
               </a:rPr>
-              <a:t>ONE-WORD CHECK-IN</a:t>
+              <a:t>NAME THAT NEED</a:t>
             </a:r>
           </a:p>
         </p:txBody>
@@ -8121,23 +8174,64 @@
       </p:sp>
       <p:sp>
         <p:nvSpPr>
-          <p:cNvPr id="5" name="Rectangle 4"/>
+          <p:cNvPr id="5" name="TextBox 4"/>
+          <p:cNvSpPr txBox="1"/>
+          <p:nvPr/>
+        </p:nvSpPr>
+        <p:spPr>
+          <a:xfrm>
+            <a:off x="822960" y="1005840"/>
+            <a:ext cx="10515600" cy="914400"/>
+          </a:xfrm>
+          <a:prstGeom prst="rect">
+            <a:avLst/>
+          </a:prstGeom>
+          <a:noFill/>
+        </p:spPr>
+        <p:txBody>
+          <a:bodyPr wrap="square" anchor="t" lIns="0" rIns="0" tIns="0" bIns="0">
+            <a:spAutoFit/>
+          </a:bodyPr>
+          <a:lstStyle/>
+          <a:p>
+            <a:pPr algn="l">
+              <a:spcAft>
+                <a:spcPts val="1530"/>
+              </a:spcAft>
+            </a:pPr>
+            <a:r>
+              <a:rPr sz="3400" b="1" i="0">
+                <a:solidFill>
+                  <a:srgbClr val="1C1B19"/>
+                </a:solidFill>
+                <a:latin typeface="Source Serif 4"/>
+              </a:rPr>
+              <a:t>Pick a feeling word. Then find the need.</a:t>
+            </a:r>
+          </a:p>
+        </p:txBody>
+      </p:sp>
+      <p:sp>
+        <p:nvSpPr>
+          <p:cNvPr id="6" name="Rectangle 5"/>
           <p:cNvSpPr/>
           <p:nvPr/>
         </p:nvSpPr>
         <p:spPr>
           <a:xfrm>
-            <a:off x="822960" y="1371600"/>
-            <a:ext cx="73152" cy="3566160"/>
+            <a:off x="822960" y="2103120"/>
+            <a:ext cx="3322320" cy="3840480"/>
           </a:xfrm>
           <a:prstGeom prst="rect">
             <a:avLst/>
           </a:prstGeom>
           <a:solidFill>
-            <a:srgbClr val="F47B20"/>
+            <a:srgbClr val="FFFFFF"/>
           </a:solidFill>
-          <a:ln>
-            <a:noFill/>
+          <a:ln w="15875">
+            <a:solidFill>
+              <a:srgbClr val="D8D2C6"/>
+            </a:solidFill>
           </a:ln>
           <a:effectLst/>
         </p:spPr>
@@ -8165,53 +8259,14 @@
       </p:sp>
       <p:sp>
         <p:nvSpPr>
-          <p:cNvPr id="6" name="TextBox 5"/>
-          <p:cNvSpPr txBox="1"/>
-          <p:nvPr/>
-        </p:nvSpPr>
-        <p:spPr>
-          <a:xfrm>
-            <a:off x="1188720" y="1371600"/>
-            <a:ext cx="10058400" cy="3566160"/>
-          </a:xfrm>
-          <a:prstGeom prst="rect">
-            <a:avLst/>
-          </a:prstGeom>
-          <a:noFill/>
-        </p:spPr>
-        <p:txBody>
-          <a:bodyPr wrap="square" anchor="ctr" lIns="0" rIns="0" tIns="0" bIns="0">
-            <a:spAutoFit/>
-          </a:bodyPr>
-          <a:lstStyle/>
-          <a:p>
-            <a:pPr algn="l">
-              <a:spcAft>
-                <a:spcPts val="1800"/>
-              </a:spcAft>
-            </a:pPr>
-            <a:r>
-              <a:rPr sz="4000" b="0" i="1">
-                <a:solidFill>
-                  <a:srgbClr val="1C1B19"/>
-                </a:solidFill>
-                <a:latin typeface="Source Serif 4"/>
-              </a:rPr>
-              <a:t>How are you, in one word?</a:t>
-            </a:r>
-          </a:p>
-        </p:txBody>
-      </p:sp>
-      <p:sp>
-        <p:nvSpPr>
           <p:cNvPr id="7" name="TextBox 6"/>
           <p:cNvSpPr txBox="1"/>
           <p:nvPr/>
         </p:nvSpPr>
         <p:spPr>
           <a:xfrm>
-            <a:off x="1188720" y="5120640"/>
-            <a:ext cx="10058400" cy="914400"/>
+            <a:off x="1051560" y="2286000"/>
+            <a:ext cx="2865120" cy="365760"/>
           </a:xfrm>
           <a:prstGeom prst="rect">
             <a:avLst/>
@@ -8226,17 +8281,304 @@
           <a:p>
             <a:pPr algn="l">
               <a:spcAft>
+                <a:spcPts val="585"/>
+              </a:spcAft>
+            </a:pPr>
+            <a:r>
+              <a:rPr sz="1300" b="1" i="0">
+                <a:solidFill>
+                  <a:srgbClr val="0B2D5B"/>
+                </a:solidFill>
+                <a:latin typeface="Inter Tight"/>
+              </a:rPr>
+              <a:t>MARISOL</a:t>
+            </a:r>
+          </a:p>
+        </p:txBody>
+      </p:sp>
+      <p:sp>
+        <p:nvSpPr>
+          <p:cNvPr id="8" name="TextBox 7"/>
+          <p:cNvSpPr txBox="1"/>
+          <p:nvPr/>
+        </p:nvSpPr>
+        <p:spPr>
+          <a:xfrm>
+            <a:off x="1051560" y="2743200"/>
+            <a:ext cx="2865120" cy="3017520"/>
+          </a:xfrm>
+          <a:prstGeom prst="rect">
+            <a:avLst/>
+          </a:prstGeom>
+          <a:noFill/>
+        </p:spPr>
+        <p:txBody>
+          <a:bodyPr wrap="square" anchor="t" lIns="0" rIns="0" tIns="0" bIns="0">
+            <a:spAutoFit/>
+          </a:bodyPr>
+          <a:lstStyle/>
+          <a:p>
+            <a:pPr algn="l">
+              <a:spcAft>
                 <a:spcPts val="810"/>
               </a:spcAft>
             </a:pPr>
             <a:r>
               <a:rPr sz="1800" b="0" i="0">
                 <a:solidFill>
-                  <a:srgbClr val="5D5A54"/>
+                  <a:srgbClr val="1C1B19"/>
+                </a:solidFill>
+                <a:latin typeface="Source Serif 4"/>
+              </a:rPr>
+              <a:t>Asked for a Saturday off a month ago. Her manager gave it to a coworker who asked last week, and scheduled Marisol to close.</a:t>
+            </a:r>
+          </a:p>
+        </p:txBody>
+      </p:sp>
+      <p:sp>
+        <p:nvSpPr>
+          <p:cNvPr id="9" name="Rectangle 8"/>
+          <p:cNvSpPr/>
+          <p:nvPr/>
+        </p:nvSpPr>
+        <p:spPr>
+          <a:xfrm>
+            <a:off x="4419600" y="2103120"/>
+            <a:ext cx="3322320" cy="3840480"/>
+          </a:xfrm>
+          <a:prstGeom prst="rect">
+            <a:avLst/>
+          </a:prstGeom>
+          <a:solidFill>
+            <a:srgbClr val="FFFFFF"/>
+          </a:solidFill>
+          <a:ln w="15875">
+            <a:solidFill>
+              <a:srgbClr val="D8D2C6"/>
+            </a:solidFill>
+          </a:ln>
+          <a:effectLst/>
+        </p:spPr>
+        <p:style>
+          <a:lnRef idx="1">
+            <a:schemeClr val="accent1"/>
+          </a:lnRef>
+          <a:fillRef idx="3">
+            <a:schemeClr val="accent1"/>
+          </a:fillRef>
+          <a:effectRef idx="2">
+            <a:schemeClr val="accent1"/>
+          </a:effectRef>
+          <a:fontRef idx="minor">
+            <a:schemeClr val="lt1"/>
+          </a:fontRef>
+        </p:style>
+        <p:txBody>
+          <a:bodyPr rtlCol="0" anchor="ctr"/>
+          <a:lstStyle/>
+          <a:p>
+            <a:pPr algn="ctr"/>
+          </a:p>
+        </p:txBody>
+      </p:sp>
+      <p:sp>
+        <p:nvSpPr>
+          <p:cNvPr id="10" name="TextBox 9"/>
+          <p:cNvSpPr txBox="1"/>
+          <p:nvPr/>
+        </p:nvSpPr>
+        <p:spPr>
+          <a:xfrm>
+            <a:off x="4648200" y="2286000"/>
+            <a:ext cx="2865120" cy="365760"/>
+          </a:xfrm>
+          <a:prstGeom prst="rect">
+            <a:avLst/>
+          </a:prstGeom>
+          <a:noFill/>
+        </p:spPr>
+        <p:txBody>
+          <a:bodyPr wrap="square" anchor="t" lIns="0" rIns="0" tIns="0" bIns="0">
+            <a:spAutoFit/>
+          </a:bodyPr>
+          <a:lstStyle/>
+          <a:p>
+            <a:pPr algn="l">
+              <a:spcAft>
+                <a:spcPts val="585"/>
+              </a:spcAft>
+            </a:pPr>
+            <a:r>
+              <a:rPr sz="1300" b="1" i="0">
+                <a:solidFill>
+                  <a:srgbClr val="0B2D5B"/>
                 </a:solidFill>
                 <a:latin typeface="Inter Tight"/>
               </a:rPr>
-              <a:t>Any word except fine, good, tired or stressed. Any language. "Pass" is fine too.</a:t>
+              <a:t>TUAN</a:t>
+            </a:r>
+          </a:p>
+        </p:txBody>
+      </p:sp>
+      <p:sp>
+        <p:nvSpPr>
+          <p:cNvPr id="11" name="TextBox 10"/>
+          <p:cNvSpPr txBox="1"/>
+          <p:nvPr/>
+        </p:nvSpPr>
+        <p:spPr>
+          <a:xfrm>
+            <a:off x="4648200" y="2743200"/>
+            <a:ext cx="2865120" cy="3017520"/>
+          </a:xfrm>
+          <a:prstGeom prst="rect">
+            <a:avLst/>
+          </a:prstGeom>
+          <a:noFill/>
+        </p:spPr>
+        <p:txBody>
+          <a:bodyPr wrap="square" anchor="t" lIns="0" rIns="0" tIns="0" bIns="0">
+            <a:spAutoFit/>
+          </a:bodyPr>
+          <a:lstStyle/>
+          <a:p>
+            <a:pPr algn="l">
+              <a:spcAft>
+                <a:spcPts val="810"/>
+              </a:spcAft>
+            </a:pPr>
+            <a:r>
+              <a:rPr sz="1800" b="0" i="0">
+                <a:solidFill>
+                  <a:srgbClr val="1C1B19"/>
+                </a:solidFill>
+                <a:latin typeface="Source Serif 4"/>
+              </a:rPr>
+              <a:t>Translates at his parents' medical appointments and helps with bills. It matters to him. At school nobody knows. He feels drained and kind of invisible.</a:t>
+            </a:r>
+          </a:p>
+        </p:txBody>
+      </p:sp>
+      <p:sp>
+        <p:nvSpPr>
+          <p:cNvPr id="12" name="Rectangle 11"/>
+          <p:cNvSpPr/>
+          <p:nvPr/>
+        </p:nvSpPr>
+        <p:spPr>
+          <a:xfrm>
+            <a:off x="8016239" y="2103120"/>
+            <a:ext cx="3322320" cy="3840480"/>
+          </a:xfrm>
+          <a:prstGeom prst="rect">
+            <a:avLst/>
+          </a:prstGeom>
+          <a:solidFill>
+            <a:srgbClr val="FFFFFF"/>
+          </a:solidFill>
+          <a:ln w="15875">
+            <a:solidFill>
+              <a:srgbClr val="D8D2C6"/>
+            </a:solidFill>
+          </a:ln>
+          <a:effectLst/>
+        </p:spPr>
+        <p:style>
+          <a:lnRef idx="1">
+            <a:schemeClr val="accent1"/>
+          </a:lnRef>
+          <a:fillRef idx="3">
+            <a:schemeClr val="accent1"/>
+          </a:fillRef>
+          <a:effectRef idx="2">
+            <a:schemeClr val="accent1"/>
+          </a:effectRef>
+          <a:fontRef idx="minor">
+            <a:schemeClr val="lt1"/>
+          </a:fontRef>
+        </p:style>
+        <p:txBody>
+          <a:bodyPr rtlCol="0" anchor="ctr"/>
+          <a:lstStyle/>
+          <a:p>
+            <a:pPr algn="ctr"/>
+          </a:p>
+        </p:txBody>
+      </p:sp>
+      <p:sp>
+        <p:nvSpPr>
+          <p:cNvPr id="13" name="TextBox 12"/>
+          <p:cNvSpPr txBox="1"/>
+          <p:nvPr/>
+        </p:nvSpPr>
+        <p:spPr>
+          <a:xfrm>
+            <a:off x="8244839" y="2286000"/>
+            <a:ext cx="2865120" cy="365760"/>
+          </a:xfrm>
+          <a:prstGeom prst="rect">
+            <a:avLst/>
+          </a:prstGeom>
+          <a:noFill/>
+        </p:spPr>
+        <p:txBody>
+          <a:bodyPr wrap="square" anchor="t" lIns="0" rIns="0" tIns="0" bIns="0">
+            <a:spAutoFit/>
+          </a:bodyPr>
+          <a:lstStyle/>
+          <a:p>
+            <a:pPr algn="l">
+              <a:spcAft>
+                <a:spcPts val="585"/>
+              </a:spcAft>
+            </a:pPr>
+            <a:r>
+              <a:rPr sz="1300" b="1" i="0">
+                <a:solidFill>
+                  <a:srgbClr val="0B2D5B"/>
+                </a:solidFill>
+                <a:latin typeface="Inter Tight"/>
+              </a:rPr>
+              <a:t>NADIA</a:t>
+            </a:r>
+          </a:p>
+        </p:txBody>
+      </p:sp>
+      <p:sp>
+        <p:nvSpPr>
+          <p:cNvPr id="14" name="TextBox 13"/>
+          <p:cNvSpPr txBox="1"/>
+          <p:nvPr/>
+        </p:nvSpPr>
+        <p:spPr>
+          <a:xfrm>
+            <a:off x="8244839" y="2743200"/>
+            <a:ext cx="2865120" cy="3017520"/>
+          </a:xfrm>
+          <a:prstGeom prst="rect">
+            <a:avLst/>
+          </a:prstGeom>
+          <a:noFill/>
+        </p:spPr>
+        <p:txBody>
+          <a:bodyPr wrap="square" anchor="t" lIns="0" rIns="0" tIns="0" bIns="0">
+            <a:spAutoFit/>
+          </a:bodyPr>
+          <a:lstStyle/>
+          <a:p>
+            <a:pPr algn="l">
+              <a:spcAft>
+                <a:spcPts val="810"/>
+              </a:spcAft>
+            </a:pPr>
+            <a:r>
+              <a:rPr sz="1800" b="0" i="0">
+                <a:solidFill>
+                  <a:srgbClr val="1C1B19"/>
+                </a:solidFill>
+                <a:latin typeface="Source Serif 4"/>
+              </a:rPr>
+              <a:t>Wants to apply to colleges across the country. Her parents want her close to home. Every conversation ends in silence.</a:t>
             </a:r>
           </a:p>
         </p:txBody>
@@ -8345,7 +8687,7 @@
                 </a:solidFill>
                 <a:latin typeface="Inter Tight"/>
               </a:rPr>
-              <a:t>WHY NAMING HELPS</a:t>
+              <a:t>THUMBS VOTE</a:t>
             </a:r>
           </a:p>
         </p:txBody>
@@ -8398,7 +8740,7 @@
         <p:spPr>
           <a:xfrm>
             <a:off x="822960" y="1005840"/>
-            <a:ext cx="10515600" cy="914400"/>
+            <a:ext cx="10515600" cy="1097280"/>
           </a:xfrm>
           <a:prstGeom prst="rect">
             <a:avLst/>
@@ -8413,77 +8755,31 @@
           <a:p>
             <a:pPr algn="l">
               <a:spcAft>
-                <a:spcPts val="1530"/>
-              </a:spcAft>
-            </a:pPr>
-            <a:r>
-              <a:rPr sz="3400" b="1" i="0">
+                <a:spcPts val="1620"/>
+              </a:spcAft>
+            </a:pPr>
+            <a:r>
+              <a:rPr sz="3600" b="1" i="0">
                 <a:solidFill>
                   <a:srgbClr val="1C1B19"/>
                 </a:solidFill>
                 <a:latin typeface="Source Serif 4"/>
               </a:rPr>
-              <a:t>Put it into words and the alarm turns down.</a:t>
-            </a:r>
-          </a:p>
-        </p:txBody>
-      </p:sp>
-      <p:sp>
-        <p:nvSpPr>
-          <p:cNvPr id="6" name="Rectangle 5"/>
-          <p:cNvSpPr/>
-          <p:nvPr/>
-        </p:nvSpPr>
-        <p:spPr>
-          <a:xfrm>
-            <a:off x="822960" y="2103120"/>
-            <a:ext cx="5120640" cy="3931920"/>
-          </a:xfrm>
-          <a:prstGeom prst="rect">
-            <a:avLst/>
-          </a:prstGeom>
-          <a:solidFill>
-            <a:srgbClr val="FFFFFF"/>
-          </a:solidFill>
-          <a:ln w="15875">
-            <a:solidFill>
-              <a:srgbClr val="D8D2C6"/>
-            </a:solidFill>
-          </a:ln>
-          <a:effectLst/>
-        </p:spPr>
-        <p:style>
-          <a:lnRef idx="1">
-            <a:schemeClr val="accent1"/>
-          </a:lnRef>
-          <a:fillRef idx="3">
-            <a:schemeClr val="accent1"/>
-          </a:fillRef>
-          <a:effectRef idx="2">
-            <a:schemeClr val="accent1"/>
-          </a:effectRef>
-          <a:fontRef idx="minor">
-            <a:schemeClr val="lt1"/>
-          </a:fontRef>
-        </p:style>
-        <p:txBody>
-          <a:bodyPr rtlCol="0" anchor="ctr"/>
-          <a:lstStyle/>
-          <a:p>
-            <a:pPr algn="ctr"/>
-          </a:p>
-        </p:txBody>
-      </p:sp>
-      <p:sp>
-        <p:nvSpPr>
-          <p:cNvPr id="7" name="TextBox 6"/>
+              <a:t>Feeling, or a thought in disguise?</a:t>
+            </a:r>
+          </a:p>
+        </p:txBody>
+      </p:sp>
+      <p:sp>
+        <p:nvSpPr>
+          <p:cNvPr id="6" name="TextBox 5"/>
           <p:cNvSpPr txBox="1"/>
           <p:nvPr/>
         </p:nvSpPr>
         <p:spPr>
           <a:xfrm>
-            <a:off x="1097280" y="2286000"/>
-            <a:ext cx="4572000" cy="457200"/>
+            <a:off x="822960" y="2057400"/>
+            <a:ext cx="548640" cy="804672"/>
           </a:xfrm>
           <a:prstGeom prst="rect">
             <a:avLst/>
@@ -8498,31 +8794,31 @@
           <a:p>
             <a:pPr algn="l">
               <a:spcAft>
-                <a:spcPts val="585"/>
-              </a:spcAft>
-            </a:pPr>
-            <a:r>
-              <a:rPr sz="1300" b="1" i="0">
-                <a:solidFill>
-                  <a:srgbClr val="0B2D5B"/>
-                </a:solidFill>
-                <a:latin typeface="Inter Tight"/>
-              </a:rPr>
-              <a:t>WHAT THE RESEARCH FOUND</a:t>
-            </a:r>
-          </a:p>
-        </p:txBody>
-      </p:sp>
-      <p:sp>
-        <p:nvSpPr>
-          <p:cNvPr id="8" name="TextBox 7"/>
+                <a:spcPts val="1170"/>
+              </a:spcAft>
+            </a:pPr>
+            <a:r>
+              <a:rPr sz="2600" b="1" i="0">
+                <a:solidFill>
+                  <a:srgbClr val="F47B20"/>
+                </a:solidFill>
+                <a:latin typeface="Source Serif 4"/>
+              </a:rPr>
+              <a:t>•</a:t>
+            </a:r>
+          </a:p>
+        </p:txBody>
+      </p:sp>
+      <p:sp>
+        <p:nvSpPr>
+          <p:cNvPr id="7" name="TextBox 6"/>
           <p:cNvSpPr txBox="1"/>
           <p:nvPr/>
         </p:nvSpPr>
         <p:spPr>
           <a:xfrm>
-            <a:off x="1097280" y="2788920"/>
-            <a:ext cx="4572000" cy="3108960"/>
+            <a:off x="1463040" y="2093976"/>
+            <a:ext cx="9875520" cy="804672"/>
           </a:xfrm>
           <a:prstGeom prst="rect">
             <a:avLst/>
@@ -8537,125 +8833,31 @@
           <a:p>
             <a:pPr algn="l">
               <a:spcAft>
-                <a:spcPts val="855"/>
-              </a:spcAft>
-            </a:pPr>
-            <a:r>
-              <a:rPr sz="1900" b="0" i="0">
+                <a:spcPts val="945"/>
+              </a:spcAft>
+            </a:pPr>
+            <a:r>
+              <a:rPr sz="2100" b="1" i="0">
                 <a:solidFill>
                   <a:srgbClr val="1C1B19"/>
                 </a:solidFill>
                 <a:latin typeface="Source Serif 4"/>
               </a:rPr>
-              <a:t>Naming a feeling quiets the brain's alarm</a:t>
-            </a:r>
-          </a:p>
-          <a:p>
-            <a:pPr algn="l">
-              <a:spcAft>
-                <a:spcPts val="855"/>
-              </a:spcAft>
-            </a:pPr>
-            <a:r>
-              <a:rPr sz="1900" b="0" i="0">
-                <a:solidFill>
-                  <a:srgbClr val="1C1B19"/>
-                </a:solidFill>
-                <a:latin typeface="Source Serif 4"/>
-              </a:rPr>
-              <a:t>Saying fear out loud shrank it a week later</a:t>
-            </a:r>
-          </a:p>
-          <a:p>
-            <a:pPr algn="l">
-              <a:spcAft>
-                <a:spcPts val="855"/>
-              </a:spcAft>
-            </a:pPr>
-            <a:r>
-              <a:rPr sz="1900" b="0" i="0">
-                <a:solidFill>
-                  <a:srgbClr val="1C1B19"/>
-                </a:solidFill>
-                <a:latin typeface="Source Serif 4"/>
-              </a:rPr>
-              <a:t>More precise words, steadier mood</a:t>
-            </a:r>
-          </a:p>
-          <a:p>
-            <a:pPr algn="l">
-              <a:spcAft>
-                <a:spcPts val="855"/>
-              </a:spcAft>
-            </a:pPr>
-            <a:r>
-              <a:rPr sz="1900" b="0" i="0">
-                <a:solidFill>
-                  <a:srgbClr val="1C1B19"/>
-                </a:solidFill>
-                <a:latin typeface="Source Serif 4"/>
-              </a:rPr>
-              <a:t>Your body often knows before you do</a:t>
-            </a:r>
-          </a:p>
-        </p:txBody>
-      </p:sp>
-      <p:sp>
-        <p:nvSpPr>
-          <p:cNvPr id="9" name="Rectangle 8"/>
-          <p:cNvSpPr/>
-          <p:nvPr/>
-        </p:nvSpPr>
-        <p:spPr>
-          <a:xfrm>
-            <a:off x="6309360" y="2103120"/>
-            <a:ext cx="5120640" cy="3931920"/>
-          </a:xfrm>
-          <a:prstGeom prst="rect">
-            <a:avLst/>
-          </a:prstGeom>
-          <a:solidFill>
-            <a:srgbClr val="FFFFFF"/>
-          </a:solidFill>
-          <a:ln w="15875">
-            <a:solidFill>
-              <a:srgbClr val="D8D2C6"/>
-            </a:solidFill>
-          </a:ln>
-          <a:effectLst/>
-        </p:spPr>
-        <p:style>
-          <a:lnRef idx="1">
-            <a:schemeClr val="accent1"/>
-          </a:lnRef>
-          <a:fillRef idx="3">
-            <a:schemeClr val="accent1"/>
-          </a:fillRef>
-          <a:effectRef idx="2">
-            <a:schemeClr val="accent1"/>
-          </a:effectRef>
-          <a:fontRef idx="minor">
-            <a:schemeClr val="lt1"/>
-          </a:fontRef>
-        </p:style>
-        <p:txBody>
-          <a:bodyPr rtlCol="0" anchor="ctr"/>
-          <a:lstStyle/>
-          <a:p>
-            <a:pPr algn="ctr"/>
-          </a:p>
-        </p:txBody>
-      </p:sp>
-      <p:sp>
-        <p:nvSpPr>
-          <p:cNvPr id="10" name="TextBox 9"/>
+              <a:t>"I feel used."</a:t>
+            </a:r>
+          </a:p>
+        </p:txBody>
+      </p:sp>
+      <p:sp>
+        <p:nvSpPr>
+          <p:cNvPr id="8" name="TextBox 7"/>
           <p:cNvSpPr txBox="1"/>
           <p:nvPr/>
         </p:nvSpPr>
         <p:spPr>
           <a:xfrm>
-            <a:off x="6583680" y="2286000"/>
-            <a:ext cx="4572000" cy="457200"/>
+            <a:off x="822960" y="2862072"/>
+            <a:ext cx="548640" cy="804672"/>
           </a:xfrm>
           <a:prstGeom prst="rect">
             <a:avLst/>
@@ -8670,31 +8872,31 @@
           <a:p>
             <a:pPr algn="l">
               <a:spcAft>
-                <a:spcPts val="585"/>
-              </a:spcAft>
-            </a:pPr>
-            <a:r>
-              <a:rPr sz="1300" b="1" i="0">
-                <a:solidFill>
-                  <a:srgbClr val="0B2D5B"/>
-                </a:solidFill>
-                <a:latin typeface="Inter Tight"/>
-              </a:rPr>
-              <a:t>WHAT THAT MEANS FOR YOU</a:t>
-            </a:r>
-          </a:p>
-        </p:txBody>
-      </p:sp>
-      <p:sp>
-        <p:nvSpPr>
-          <p:cNvPr id="11" name="TextBox 10"/>
+                <a:spcPts val="1170"/>
+              </a:spcAft>
+            </a:pPr>
+            <a:r>
+              <a:rPr sz="2600" b="1" i="0">
+                <a:solidFill>
+                  <a:srgbClr val="F47B20"/>
+                </a:solidFill>
+                <a:latin typeface="Source Serif 4"/>
+              </a:rPr>
+              <a:t>•</a:t>
+            </a:r>
+          </a:p>
+        </p:txBody>
+      </p:sp>
+      <p:sp>
+        <p:nvSpPr>
+          <p:cNvPr id="9" name="TextBox 8"/>
           <p:cNvSpPr txBox="1"/>
           <p:nvPr/>
         </p:nvSpPr>
         <p:spPr>
           <a:xfrm>
-            <a:off x="6583680" y="2788920"/>
-            <a:ext cx="4572000" cy="3108960"/>
+            <a:off x="1463040" y="2898648"/>
+            <a:ext cx="9875520" cy="804672"/>
           </a:xfrm>
           <a:prstGeom prst="rect">
             <a:avLst/>
@@ -8709,65 +8911,251 @@
           <a:p>
             <a:pPr algn="l">
               <a:spcAft>
-                <a:spcPts val="855"/>
-              </a:spcAft>
-            </a:pPr>
-            <a:r>
-              <a:rPr sz="1900" b="0" i="0">
+                <a:spcPts val="945"/>
+              </a:spcAft>
+            </a:pPr>
+            <a:r>
+              <a:rPr sz="2100" b="1" i="0">
                 <a:solidFill>
                   <a:srgbClr val="1C1B19"/>
                 </a:solidFill>
                 <a:latin typeface="Source Serif 4"/>
               </a:rPr>
-              <a:t>"Fine" leaves the alarm running</a:t>
-            </a:r>
-          </a:p>
-          <a:p>
-            <a:pPr algn="l">
-              <a:spcAft>
-                <a:spcPts val="855"/>
-              </a:spcAft>
-            </a:pPr>
-            <a:r>
-              <a:rPr sz="1900" b="0" i="0">
+              <a:t>"I feel resentful."</a:t>
+            </a:r>
+          </a:p>
+        </p:txBody>
+      </p:sp>
+      <p:sp>
+        <p:nvSpPr>
+          <p:cNvPr id="10" name="TextBox 9"/>
+          <p:cNvSpPr txBox="1"/>
+          <p:nvPr/>
+        </p:nvSpPr>
+        <p:spPr>
+          <a:xfrm>
+            <a:off x="822960" y="3666744"/>
+            <a:ext cx="548640" cy="804672"/>
+          </a:xfrm>
+          <a:prstGeom prst="rect">
+            <a:avLst/>
+          </a:prstGeom>
+          <a:noFill/>
+        </p:spPr>
+        <p:txBody>
+          <a:bodyPr wrap="square" anchor="t" lIns="0" rIns="0" tIns="0" bIns="0">
+            <a:spAutoFit/>
+          </a:bodyPr>
+          <a:lstStyle/>
+          <a:p>
+            <a:pPr algn="l">
+              <a:spcAft>
+                <a:spcPts val="1170"/>
+              </a:spcAft>
+            </a:pPr>
+            <a:r>
+              <a:rPr sz="2600" b="1" i="0">
+                <a:solidFill>
+                  <a:srgbClr val="F47B20"/>
+                </a:solidFill>
+                <a:latin typeface="Source Serif 4"/>
+              </a:rPr>
+              <a:t>•</a:t>
+            </a:r>
+          </a:p>
+        </p:txBody>
+      </p:sp>
+      <p:sp>
+        <p:nvSpPr>
+          <p:cNvPr id="11" name="TextBox 10"/>
+          <p:cNvSpPr txBox="1"/>
+          <p:nvPr/>
+        </p:nvSpPr>
+        <p:spPr>
+          <a:xfrm>
+            <a:off x="1463040" y="3703320"/>
+            <a:ext cx="9875520" cy="804672"/>
+          </a:xfrm>
+          <a:prstGeom prst="rect">
+            <a:avLst/>
+          </a:prstGeom>
+          <a:noFill/>
+        </p:spPr>
+        <p:txBody>
+          <a:bodyPr wrap="square" anchor="t" lIns="0" rIns="0" tIns="0" bIns="0">
+            <a:spAutoFit/>
+          </a:bodyPr>
+          <a:lstStyle/>
+          <a:p>
+            <a:pPr algn="l">
+              <a:spcAft>
+                <a:spcPts val="945"/>
+              </a:spcAft>
+            </a:pPr>
+            <a:r>
+              <a:rPr sz="2100" b="1" i="0">
                 <a:solidFill>
                   <a:srgbClr val="1C1B19"/>
                 </a:solidFill>
                 <a:latin typeface="Source Serif 4"/>
               </a:rPr>
-              <a:t>Go one word past "stressed"</a:t>
-            </a:r>
-          </a:p>
-          <a:p>
-            <a:pPr algn="l">
-              <a:spcAft>
-                <a:spcPts val="855"/>
-              </a:spcAft>
-            </a:pPr>
-            <a:r>
-              <a:rPr sz="1900" b="0" i="0">
+              <a:t>"I feel like I'm not good enough."</a:t>
+            </a:r>
+          </a:p>
+        </p:txBody>
+      </p:sp>
+      <p:sp>
+        <p:nvSpPr>
+          <p:cNvPr id="12" name="TextBox 11"/>
+          <p:cNvSpPr txBox="1"/>
+          <p:nvPr/>
+        </p:nvSpPr>
+        <p:spPr>
+          <a:xfrm>
+            <a:off x="822960" y="4471416"/>
+            <a:ext cx="548640" cy="804672"/>
+          </a:xfrm>
+          <a:prstGeom prst="rect">
+            <a:avLst/>
+          </a:prstGeom>
+          <a:noFill/>
+        </p:spPr>
+        <p:txBody>
+          <a:bodyPr wrap="square" anchor="t" lIns="0" rIns="0" tIns="0" bIns="0">
+            <a:spAutoFit/>
+          </a:bodyPr>
+          <a:lstStyle/>
+          <a:p>
+            <a:pPr algn="l">
+              <a:spcAft>
+                <a:spcPts val="1170"/>
+              </a:spcAft>
+            </a:pPr>
+            <a:r>
+              <a:rPr sz="2600" b="1" i="0">
+                <a:solidFill>
+                  <a:srgbClr val="F47B20"/>
+                </a:solidFill>
+                <a:latin typeface="Source Serif 4"/>
+              </a:rPr>
+              <a:t>•</a:t>
+            </a:r>
+          </a:p>
+        </p:txBody>
+      </p:sp>
+      <p:sp>
+        <p:nvSpPr>
+          <p:cNvPr id="13" name="TextBox 12"/>
+          <p:cNvSpPr txBox="1"/>
+          <p:nvPr/>
+        </p:nvSpPr>
+        <p:spPr>
+          <a:xfrm>
+            <a:off x="1463040" y="4507992"/>
+            <a:ext cx="9875520" cy="804672"/>
+          </a:xfrm>
+          <a:prstGeom prst="rect">
+            <a:avLst/>
+          </a:prstGeom>
+          <a:noFill/>
+        </p:spPr>
+        <p:txBody>
+          <a:bodyPr wrap="square" anchor="t" lIns="0" rIns="0" tIns="0" bIns="0">
+            <a:spAutoFit/>
+          </a:bodyPr>
+          <a:lstStyle/>
+          <a:p>
+            <a:pPr algn="l">
+              <a:spcAft>
+                <a:spcPts val="945"/>
+              </a:spcAft>
+            </a:pPr>
+            <a:r>
+              <a:rPr sz="2100" b="1" i="0">
                 <a:solidFill>
                   <a:srgbClr val="1C1B19"/>
                 </a:solidFill>
                 <a:latin typeface="Source Serif 4"/>
               </a:rPr>
-              <a:t>It's a vocabulary, so it grows with use</a:t>
-            </a:r>
-          </a:p>
-          <a:p>
-            <a:pPr algn="l">
-              <a:spcAft>
-                <a:spcPts val="855"/>
-              </a:spcAft>
-            </a:pPr>
-            <a:r>
-              <a:rPr sz="1900" b="0" i="0">
+              <a:t>"I feel overwhelmed."</a:t>
+            </a:r>
+          </a:p>
+        </p:txBody>
+      </p:sp>
+      <p:sp>
+        <p:nvSpPr>
+          <p:cNvPr id="14" name="TextBox 13"/>
+          <p:cNvSpPr txBox="1"/>
+          <p:nvPr/>
+        </p:nvSpPr>
+        <p:spPr>
+          <a:xfrm>
+            <a:off x="822960" y="5276088"/>
+            <a:ext cx="548640" cy="804672"/>
+          </a:xfrm>
+          <a:prstGeom prst="rect">
+            <a:avLst/>
+          </a:prstGeom>
+          <a:noFill/>
+        </p:spPr>
+        <p:txBody>
+          <a:bodyPr wrap="square" anchor="t" lIns="0" rIns="0" tIns="0" bIns="0">
+            <a:spAutoFit/>
+          </a:bodyPr>
+          <a:lstStyle/>
+          <a:p>
+            <a:pPr algn="l">
+              <a:spcAft>
+                <a:spcPts val="1170"/>
+              </a:spcAft>
+            </a:pPr>
+            <a:r>
+              <a:rPr sz="2600" b="1" i="0">
+                <a:solidFill>
+                  <a:srgbClr val="F47B20"/>
+                </a:solidFill>
+                <a:latin typeface="Source Serif 4"/>
+              </a:rPr>
+              <a:t>•</a:t>
+            </a:r>
+          </a:p>
+        </p:txBody>
+      </p:sp>
+      <p:sp>
+        <p:nvSpPr>
+          <p:cNvPr id="15" name="TextBox 14"/>
+          <p:cNvSpPr txBox="1"/>
+          <p:nvPr/>
+        </p:nvSpPr>
+        <p:spPr>
+          <a:xfrm>
+            <a:off x="1463040" y="5312664"/>
+            <a:ext cx="9875520" cy="804672"/>
+          </a:xfrm>
+          <a:prstGeom prst="rect">
+            <a:avLst/>
+          </a:prstGeom>
+          <a:noFill/>
+        </p:spPr>
+        <p:txBody>
+          <a:bodyPr wrap="square" anchor="t" lIns="0" rIns="0" tIns="0" bIns="0">
+            <a:spAutoFit/>
+          </a:bodyPr>
+          <a:lstStyle/>
+          <a:p>
+            <a:pPr algn="l">
+              <a:spcAft>
+                <a:spcPts val="945"/>
+              </a:spcAft>
+            </a:pPr>
+            <a:r>
+              <a:rPr sz="2100" b="1" i="0">
                 <a:solidFill>
                   <a:srgbClr val="1C1B19"/>
                 </a:solidFill>
                 <a:latin typeface="Source Serif 4"/>
               </a:rPr>
-              <a:t>Check chest, stomach, jaw, shoulders</a:t>
+              <a:t>"I feel manipulated."</a:t>
             </a:r>
           </a:p>
         </p:txBody>
@@ -8876,7 +9264,7 @@
                 </a:solidFill>
                 <a:latin typeface="Inter Tight"/>
               </a:rPr>
-              <a:t>SEVEN NEEDS</a:t>
+              <a:t>THE CORE SKILL</a:t>
             </a:r>
           </a:p>
         </p:txBody>
@@ -8954,7 +9342,7 @@
                 </a:solidFill>
                 <a:latin typeface="Source Serif 4"/>
               </a:rPr>
-              <a:t>Everyone has all of them.</a:t>
+              <a:t>Feeling. Need. Request.</a:t>
             </a:r>
           </a:p>
         </p:txBody>
@@ -8967,8 +9355,8 @@
         </p:nvSpPr>
         <p:spPr>
           <a:xfrm>
-            <a:off x="822960" y="2103120"/>
-            <a:ext cx="5120640" cy="3931920"/>
+            <a:off x="822960" y="2743200"/>
+            <a:ext cx="1874519" cy="1005840"/>
           </a:xfrm>
           <a:prstGeom prst="rect">
             <a:avLst/>
@@ -8978,7 +9366,7 @@
           </a:solidFill>
           <a:ln w="15875">
             <a:solidFill>
-              <a:srgbClr val="D8D2C6"/>
+              <a:srgbClr val="0B2D5B"/>
             </a:solidFill>
           </a:ln>
           <a:effectLst/>
@@ -9013,8 +9401,8 @@
         </p:nvSpPr>
         <p:spPr>
           <a:xfrm>
-            <a:off x="1097280" y="2286000"/>
-            <a:ext cx="4572000" cy="457200"/>
+            <a:off x="822960" y="2743200"/>
+            <a:ext cx="1874519" cy="1005840"/>
           </a:xfrm>
           <a:prstGeom prst="rect">
             <a:avLst/>
@@ -9022,115 +9410,64 @@
           <a:noFill/>
         </p:spPr>
         <p:txBody>
-          <a:bodyPr wrap="square" anchor="t" lIns="0" rIns="0" tIns="0" bIns="0">
+          <a:bodyPr wrap="square" anchor="ctr" lIns="0" rIns="0" tIns="0" bIns="0">
             <a:spAutoFit/>
           </a:bodyPr>
           <a:lstStyle/>
           <a:p>
-            <a:pPr algn="l">
-              <a:spcAft>
-                <a:spcPts val="585"/>
-              </a:spcAft>
-            </a:pPr>
-            <a:r>
-              <a:rPr sz="1300" b="1" i="0">
-                <a:solidFill>
-                  <a:srgbClr val="0B2D5B"/>
-                </a:solidFill>
-                <a:latin typeface="Inter Tight"/>
-              </a:rPr>
-              <a:t>NEEDS 1 TO 4</a:t>
-            </a:r>
-          </a:p>
-        </p:txBody>
-      </p:sp>
-      <p:sp>
-        <p:nvSpPr>
-          <p:cNvPr id="8" name="TextBox 7"/>
-          <p:cNvSpPr txBox="1"/>
-          <p:nvPr/>
-        </p:nvSpPr>
-        <p:spPr>
-          <a:xfrm>
-            <a:off x="1097280" y="2788920"/>
-            <a:ext cx="4572000" cy="3108960"/>
-          </a:xfrm>
-          <a:prstGeom prst="rect">
-            <a:avLst/>
-          </a:prstGeom>
-          <a:noFill/>
-        </p:spPr>
-        <p:txBody>
-          <a:bodyPr wrap="square" anchor="t" lIns="0" rIns="0" tIns="0" bIns="0">
-            <a:spAutoFit/>
-          </a:bodyPr>
-          <a:lstStyle/>
-          <a:p>
-            <a:pPr algn="l">
-              <a:spcAft>
-                <a:spcPts val="855"/>
-              </a:spcAft>
-            </a:pPr>
-            <a:r>
-              <a:rPr sz="1900" b="0" i="0">
+            <a:pPr algn="ctr">
+              <a:spcAft>
+                <a:spcPts val="900"/>
+              </a:spcAft>
+            </a:pPr>
+            <a:r>
+              <a:rPr sz="2000" b="1" i="0">
                 <a:solidFill>
                   <a:srgbClr val="1C1B19"/>
                 </a:solidFill>
                 <a:latin typeface="Source Serif 4"/>
               </a:rPr>
-              <a:t>Connection: belonging, being seen</a:t>
-            </a:r>
-          </a:p>
-          <a:p>
-            <a:pPr algn="l">
-              <a:spcAft>
-                <a:spcPts val="855"/>
-              </a:spcAft>
-            </a:pPr>
-            <a:r>
-              <a:rPr sz="1900" b="0" i="0">
-                <a:solidFill>
-                  <a:srgbClr val="1C1B19"/>
-                </a:solidFill>
-                <a:latin typeface="Source Serif 4"/>
-              </a:rPr>
-              <a:t>Body: rest, food, movement, safety</a:t>
-            </a:r>
-          </a:p>
-          <a:p>
-            <a:pPr algn="l">
-              <a:spcAft>
-                <a:spcPts val="855"/>
-              </a:spcAft>
-            </a:pPr>
-            <a:r>
-              <a:rPr sz="1900" b="0" i="0">
-                <a:solidFill>
-                  <a:srgbClr val="1C1B19"/>
-                </a:solidFill>
-                <a:latin typeface="Source Serif 4"/>
-              </a:rPr>
-              <a:t>Honesty: same person in every room</a:t>
-            </a:r>
-          </a:p>
-          <a:p>
-            <a:pPr algn="l">
-              <a:spcAft>
-                <a:spcPts val="855"/>
-              </a:spcAft>
-            </a:pPr>
-            <a:r>
-              <a:rPr sz="1900" b="0" i="0">
-                <a:solidFill>
-                  <a:srgbClr val="1C1B19"/>
-                </a:solidFill>
-                <a:latin typeface="Source Serif 4"/>
-              </a:rPr>
-              <a:t>Play: fun for its own sake</a:t>
-            </a:r>
-          </a:p>
-        </p:txBody>
-      </p:sp>
+              <a:t>Get granular</a:t>
+            </a:r>
+          </a:p>
+        </p:txBody>
+      </p:sp>
+      <p:cxnSp>
+        <p:nvCxnSpPr>
+          <p:cNvPr id="8" name="Connector 7"/>
+          <p:cNvCxnSpPr/>
+          <p:nvPr/>
+        </p:nvCxnSpPr>
+        <p:spPr>
+          <a:xfrm>
+            <a:off x="2752344" y="3246120"/>
+            <a:ext cx="896112" cy="0"/>
+          </a:xfrm>
+          <a:prstGeom prst="line">
+            <a:avLst/>
+          </a:prstGeom>
+          <a:ln w="31750">
+            <a:solidFill>
+              <a:srgbClr val="F47B20"/>
+            </a:solidFill>
+            <a:tailEnd type="triangle"/>
+          </a:ln>
+        </p:spPr>
+        <p:style>
+          <a:lnRef idx="2">
+            <a:schemeClr val="accent1"/>
+          </a:lnRef>
+          <a:fillRef idx="0">
+            <a:schemeClr val="accent1"/>
+          </a:fillRef>
+          <a:effectRef idx="1">
+            <a:schemeClr val="accent1"/>
+          </a:effectRef>
+          <a:fontRef idx="minor">
+            <a:schemeClr val="tx1"/>
+          </a:fontRef>
+        </p:style>
+      </p:cxnSp>
       <p:sp>
         <p:nvSpPr>
           <p:cNvPr id="9" name="Rectangle 8"/>
@@ -9139,8 +9476,8 @@
         </p:nvSpPr>
         <p:spPr>
           <a:xfrm>
-            <a:off x="6309360" y="2103120"/>
-            <a:ext cx="5120640" cy="3931920"/>
+            <a:off x="3703320" y="2743200"/>
+            <a:ext cx="1874519" cy="1005840"/>
           </a:xfrm>
           <a:prstGeom prst="rect">
             <a:avLst/>
@@ -9150,7 +9487,7 @@
           </a:solidFill>
           <a:ln w="15875">
             <a:solidFill>
-              <a:srgbClr val="D8D2C6"/>
+              <a:srgbClr val="0B2D5B"/>
             </a:solidFill>
           </a:ln>
           <a:effectLst/>
@@ -9185,8 +9522,289 @@
         </p:nvSpPr>
         <p:spPr>
           <a:xfrm>
-            <a:off x="6583680" y="2286000"/>
-            <a:ext cx="4572000" cy="457200"/>
+            <a:off x="3703320" y="2743200"/>
+            <a:ext cx="1874519" cy="1005840"/>
+          </a:xfrm>
+          <a:prstGeom prst="rect">
+            <a:avLst/>
+          </a:prstGeom>
+          <a:noFill/>
+        </p:spPr>
+        <p:txBody>
+          <a:bodyPr wrap="square" anchor="ctr" lIns="0" rIns="0" tIns="0" bIns="0">
+            <a:spAutoFit/>
+          </a:bodyPr>
+          <a:lstStyle/>
+          <a:p>
+            <a:pPr algn="ctr">
+              <a:spcAft>
+                <a:spcPts val="900"/>
+              </a:spcAft>
+            </a:pPr>
+            <a:r>
+              <a:rPr sz="2000" b="1" i="0">
+                <a:solidFill>
+                  <a:srgbClr val="1C1B19"/>
+                </a:solidFill>
+                <a:latin typeface="Source Serif 4"/>
+              </a:rPr>
+              <a:t>Check your body</a:t>
+            </a:r>
+          </a:p>
+        </p:txBody>
+      </p:sp>
+      <p:cxnSp>
+        <p:nvCxnSpPr>
+          <p:cNvPr id="11" name="Connector 10"/>
+          <p:cNvCxnSpPr/>
+          <p:nvPr/>
+        </p:nvCxnSpPr>
+        <p:spPr>
+          <a:xfrm>
+            <a:off x="5632704" y="3246120"/>
+            <a:ext cx="896112" cy="0"/>
+          </a:xfrm>
+          <a:prstGeom prst="line">
+            <a:avLst/>
+          </a:prstGeom>
+          <a:ln w="31750">
+            <a:solidFill>
+              <a:srgbClr val="F47B20"/>
+            </a:solidFill>
+            <a:tailEnd type="triangle"/>
+          </a:ln>
+        </p:spPr>
+        <p:style>
+          <a:lnRef idx="2">
+            <a:schemeClr val="accent1"/>
+          </a:lnRef>
+          <a:fillRef idx="0">
+            <a:schemeClr val="accent1"/>
+          </a:fillRef>
+          <a:effectRef idx="1">
+            <a:schemeClr val="accent1"/>
+          </a:effectRef>
+          <a:fontRef idx="minor">
+            <a:schemeClr val="tx1"/>
+          </a:fontRef>
+        </p:style>
+      </p:cxnSp>
+      <p:sp>
+        <p:nvSpPr>
+          <p:cNvPr id="12" name="Rectangle 11"/>
+          <p:cNvSpPr/>
+          <p:nvPr/>
+        </p:nvSpPr>
+        <p:spPr>
+          <a:xfrm>
+            <a:off x="6583680" y="2743200"/>
+            <a:ext cx="1874519" cy="1005840"/>
+          </a:xfrm>
+          <a:prstGeom prst="rect">
+            <a:avLst/>
+          </a:prstGeom>
+          <a:solidFill>
+            <a:srgbClr val="FFFFFF"/>
+          </a:solidFill>
+          <a:ln w="15875">
+            <a:solidFill>
+              <a:srgbClr val="0B2D5B"/>
+            </a:solidFill>
+          </a:ln>
+          <a:effectLst/>
+        </p:spPr>
+        <p:style>
+          <a:lnRef idx="1">
+            <a:schemeClr val="accent1"/>
+          </a:lnRef>
+          <a:fillRef idx="3">
+            <a:schemeClr val="accent1"/>
+          </a:fillRef>
+          <a:effectRef idx="2">
+            <a:schemeClr val="accent1"/>
+          </a:effectRef>
+          <a:fontRef idx="minor">
+            <a:schemeClr val="lt1"/>
+          </a:fontRef>
+        </p:style>
+        <p:txBody>
+          <a:bodyPr rtlCol="0" anchor="ctr"/>
+          <a:lstStyle/>
+          <a:p>
+            <a:pPr algn="ctr"/>
+          </a:p>
+        </p:txBody>
+      </p:sp>
+      <p:sp>
+        <p:nvSpPr>
+          <p:cNvPr id="13" name="TextBox 12"/>
+          <p:cNvSpPr txBox="1"/>
+          <p:nvPr/>
+        </p:nvSpPr>
+        <p:spPr>
+          <a:xfrm>
+            <a:off x="6583680" y="2743200"/>
+            <a:ext cx="1874519" cy="1005840"/>
+          </a:xfrm>
+          <a:prstGeom prst="rect">
+            <a:avLst/>
+          </a:prstGeom>
+          <a:noFill/>
+        </p:spPr>
+        <p:txBody>
+          <a:bodyPr wrap="square" anchor="ctr" lIns="0" rIns="0" tIns="0" bIns="0">
+            <a:spAutoFit/>
+          </a:bodyPr>
+          <a:lstStyle/>
+          <a:p>
+            <a:pPr algn="ctr">
+              <a:spcAft>
+                <a:spcPts val="900"/>
+              </a:spcAft>
+            </a:pPr>
+            <a:r>
+              <a:rPr sz="2000" b="1" i="0">
+                <a:solidFill>
+                  <a:srgbClr val="1C1B19"/>
+                </a:solidFill>
+                <a:latin typeface="Source Serif 4"/>
+              </a:rPr>
+              <a:t>Find the need</a:t>
+            </a:r>
+          </a:p>
+        </p:txBody>
+      </p:sp>
+      <p:cxnSp>
+        <p:nvCxnSpPr>
+          <p:cNvPr id="14" name="Connector 13"/>
+          <p:cNvCxnSpPr/>
+          <p:nvPr/>
+        </p:nvCxnSpPr>
+        <p:spPr>
+          <a:xfrm>
+            <a:off x="8513064" y="3246120"/>
+            <a:ext cx="896112" cy="0"/>
+          </a:xfrm>
+          <a:prstGeom prst="line">
+            <a:avLst/>
+          </a:prstGeom>
+          <a:ln w="31750">
+            <a:solidFill>
+              <a:srgbClr val="F47B20"/>
+            </a:solidFill>
+            <a:tailEnd type="triangle"/>
+          </a:ln>
+        </p:spPr>
+        <p:style>
+          <a:lnRef idx="2">
+            <a:schemeClr val="accent1"/>
+          </a:lnRef>
+          <a:fillRef idx="0">
+            <a:schemeClr val="accent1"/>
+          </a:fillRef>
+          <a:effectRef idx="1">
+            <a:schemeClr val="accent1"/>
+          </a:effectRef>
+          <a:fontRef idx="minor">
+            <a:schemeClr val="tx1"/>
+          </a:fontRef>
+        </p:style>
+      </p:cxnSp>
+      <p:sp>
+        <p:nvSpPr>
+          <p:cNvPr id="15" name="Rectangle 14"/>
+          <p:cNvSpPr/>
+          <p:nvPr/>
+        </p:nvSpPr>
+        <p:spPr>
+          <a:xfrm>
+            <a:off x="9464040" y="2743200"/>
+            <a:ext cx="1874519" cy="1005840"/>
+          </a:xfrm>
+          <a:prstGeom prst="rect">
+            <a:avLst/>
+          </a:prstGeom>
+          <a:solidFill>
+            <a:srgbClr val="FFFFFF"/>
+          </a:solidFill>
+          <a:ln w="15875">
+            <a:solidFill>
+              <a:srgbClr val="0B2D5B"/>
+            </a:solidFill>
+          </a:ln>
+          <a:effectLst/>
+        </p:spPr>
+        <p:style>
+          <a:lnRef idx="1">
+            <a:schemeClr val="accent1"/>
+          </a:lnRef>
+          <a:fillRef idx="3">
+            <a:schemeClr val="accent1"/>
+          </a:fillRef>
+          <a:effectRef idx="2">
+            <a:schemeClr val="accent1"/>
+          </a:effectRef>
+          <a:fontRef idx="minor">
+            <a:schemeClr val="lt1"/>
+          </a:fontRef>
+        </p:style>
+        <p:txBody>
+          <a:bodyPr rtlCol="0" anchor="ctr"/>
+          <a:lstStyle/>
+          <a:p>
+            <a:pPr algn="ctr"/>
+          </a:p>
+        </p:txBody>
+      </p:sp>
+      <p:sp>
+        <p:nvSpPr>
+          <p:cNvPr id="16" name="TextBox 15"/>
+          <p:cNvSpPr txBox="1"/>
+          <p:nvPr/>
+        </p:nvSpPr>
+        <p:spPr>
+          <a:xfrm>
+            <a:off x="9464040" y="2743200"/>
+            <a:ext cx="1874519" cy="1005840"/>
+          </a:xfrm>
+          <a:prstGeom prst="rect">
+            <a:avLst/>
+          </a:prstGeom>
+          <a:noFill/>
+        </p:spPr>
+        <p:txBody>
+          <a:bodyPr wrap="square" anchor="ctr" lIns="0" rIns="0" tIns="0" bIns="0">
+            <a:spAutoFit/>
+          </a:bodyPr>
+          <a:lstStyle/>
+          <a:p>
+            <a:pPr algn="ctr">
+              <a:spcAft>
+                <a:spcPts val="900"/>
+              </a:spcAft>
+            </a:pPr>
+            <a:r>
+              <a:rPr sz="2000" b="1" i="0">
+                <a:solidFill>
+                  <a:srgbClr val="1C1B19"/>
+                </a:solidFill>
+                <a:latin typeface="Source Serif 4"/>
+              </a:rPr>
+              <a:t>Make a request</a:t>
+            </a:r>
+          </a:p>
+        </p:txBody>
+      </p:sp>
+      <p:sp>
+        <p:nvSpPr>
+          <p:cNvPr id="17" name="TextBox 16"/>
+          <p:cNvSpPr txBox="1"/>
+          <p:nvPr/>
+        </p:nvSpPr>
+        <p:spPr>
+          <a:xfrm>
+            <a:off x="822960" y="4160520"/>
+            <a:ext cx="10515600" cy="457200"/>
           </a:xfrm>
           <a:prstGeom prst="rect">
             <a:avLst/>
@@ -9199,33 +9817,33 @@
           </a:bodyPr>
           <a:lstStyle/>
           <a:p>
-            <a:pPr algn="l">
-              <a:spcAft>
-                <a:spcPts val="585"/>
-              </a:spcAft>
-            </a:pPr>
-            <a:r>
-              <a:rPr sz="1300" b="1" i="0">
-                <a:solidFill>
-                  <a:srgbClr val="0B2D5B"/>
+            <a:pPr algn="ctr">
+              <a:spcAft>
+                <a:spcPts val="810"/>
+              </a:spcAft>
+            </a:pPr>
+            <a:r>
+              <a:rPr sz="1800" b="1" i="0">
+                <a:solidFill>
+                  <a:srgbClr val="F47B20"/>
                 </a:solidFill>
                 <a:latin typeface="Inter Tight"/>
               </a:rPr>
-              <a:t>NEEDS 5 TO 7</a:t>
-            </a:r>
-          </a:p>
-        </p:txBody>
-      </p:sp>
-      <p:sp>
-        <p:nvSpPr>
-          <p:cNvPr id="11" name="TextBox 10"/>
+              <a:t>↺  and around again</a:t>
+            </a:r>
+          </a:p>
+        </p:txBody>
+      </p:sp>
+      <p:sp>
+        <p:nvSpPr>
+          <p:cNvPr id="18" name="TextBox 17"/>
           <p:cNvSpPr txBox="1"/>
           <p:nvPr/>
         </p:nvSpPr>
         <p:spPr>
           <a:xfrm>
-            <a:off x="6583680" y="2788920"/>
-            <a:ext cx="4572000" cy="3108960"/>
+            <a:off x="822960" y="4846320"/>
+            <a:ext cx="10515600" cy="1188720"/>
           </a:xfrm>
           <a:prstGeom prst="rect">
             <a:avLst/>
@@ -9238,67 +9856,19 @@
           </a:bodyPr>
           <a:lstStyle/>
           <a:p>
-            <a:pPr algn="l">
-              <a:spcAft>
-                <a:spcPts val="855"/>
-              </a:spcAft>
-            </a:pPr>
-            <a:r>
-              <a:rPr sz="1900" b="0" i="0">
-                <a:solidFill>
-                  <a:srgbClr val="1C1B19"/>
+            <a:pPr algn="ctr">
+              <a:spcAft>
+                <a:spcPts val="900"/>
+              </a:spcAft>
+            </a:pPr>
+            <a:r>
+              <a:rPr sz="2000" b="0" i="1">
+                <a:solidFill>
+                  <a:srgbClr val="5D5A54"/>
                 </a:solidFill>
                 <a:latin typeface="Source Serif 4"/>
               </a:rPr>
-              <a:t>Peace: calm, order, things feeling fair</a:t>
-            </a:r>
-          </a:p>
-          <a:p>
-            <a:pPr algn="l">
-              <a:spcAft>
-                <a:spcPts val="855"/>
-              </a:spcAft>
-            </a:pPr>
-            <a:r>
-              <a:rPr sz="1900" b="0" i="0">
-                <a:solidFill>
-                  <a:srgbClr val="1C1B19"/>
-                </a:solidFill>
-                <a:latin typeface="Source Serif 4"/>
-              </a:rPr>
-              <a:t>Freedom: choice, space, a say</a:t>
-            </a:r>
-          </a:p>
-          <a:p>
-            <a:pPr algn="l">
-              <a:spcAft>
-                <a:spcPts val="855"/>
-              </a:spcAft>
-            </a:pPr>
-            <a:r>
-              <a:rPr sz="1900" b="0" i="0">
-                <a:solidFill>
-                  <a:srgbClr val="1C1B19"/>
-                </a:solidFill>
-                <a:latin typeface="Source Serif 4"/>
-              </a:rPr>
-              <a:t>Meaning: purpose, growth, to matter</a:t>
-            </a:r>
-          </a:p>
-          <a:p>
-            <a:pPr algn="l">
-              <a:spcAft>
-                <a:spcPts val="855"/>
-              </a:spcAft>
-            </a:pPr>
-            <a:r>
-              <a:rPr sz="1900" b="0" i="0">
-                <a:solidFill>
-                  <a:srgbClr val="1C1B19"/>
-                </a:solidFill>
-                <a:latin typeface="Source Serif 4"/>
-              </a:rPr>
-              <a:t>Each one can feel met or not met</a:t>
+              <a:t>Most conflicts skip from feeling straight to blame. The need is in between.</a:t>
             </a:r>
           </a:p>
         </p:txBody>
@@ -9407,7 +9977,7 @@
                 </a:solidFill>
                 <a:latin typeface="Inter Tight"/>
               </a:rPr>
-              <a:t>NAME THAT NEED</a:t>
+              <a:t>BEFORE YOU GO</a:t>
             </a:r>
           </a:p>
         </p:txBody>
@@ -9459,7 +10029,7 @@
         </p:nvSpPr>
         <p:spPr>
           <a:xfrm>
-            <a:off x="822960" y="1005840"/>
+            <a:off x="822960" y="1188720"/>
             <a:ext cx="10515600" cy="914400"/>
           </a:xfrm>
           <a:prstGeom prst="rect">
@@ -9475,31 +10045,70 @@
           <a:p>
             <a:pPr algn="l">
               <a:spcAft>
-                <a:spcPts val="1530"/>
-              </a:spcAft>
-            </a:pPr>
-            <a:r>
-              <a:rPr sz="3400" b="1" i="0">
+                <a:spcPts val="1620"/>
+              </a:spcAft>
+            </a:pPr>
+            <a:r>
+              <a:rPr sz="3600" b="1" i="0">
                 <a:solidFill>
                   <a:srgbClr val="1C1B19"/>
                 </a:solidFill>
                 <a:latin typeface="Source Serif 4"/>
               </a:rPr>
-              <a:t>Pick a feeling word. Then find the need.</a:t>
-            </a:r>
-          </a:p>
-        </p:txBody>
-      </p:sp>
-      <p:sp>
-        <p:nvSpPr>
-          <p:cNvPr id="6" name="Rectangle 5"/>
+              <a:t>I feel ___ because I need ___.</a:t>
+            </a:r>
+          </a:p>
+        </p:txBody>
+      </p:sp>
+      <p:sp>
+        <p:nvSpPr>
+          <p:cNvPr id="6" name="TextBox 5"/>
+          <p:cNvSpPr txBox="1"/>
+          <p:nvPr/>
+        </p:nvSpPr>
+        <p:spPr>
+          <a:xfrm>
+            <a:off x="822960" y="2286000"/>
+            <a:ext cx="10515600" cy="1463040"/>
+          </a:xfrm>
+          <a:prstGeom prst="rect">
+            <a:avLst/>
+          </a:prstGeom>
+          <a:noFill/>
+        </p:spPr>
+        <p:txBody>
+          <a:bodyPr wrap="square" anchor="t" lIns="0" rIns="0" tIns="0" bIns="0">
+            <a:spAutoFit/>
+          </a:bodyPr>
+          <a:lstStyle/>
+          <a:p>
+            <a:pPr algn="l">
+              <a:spcAft>
+                <a:spcPts val="1080"/>
+              </a:spcAft>
+            </a:pPr>
+            <a:r>
+              <a:rPr sz="2400" b="0" i="0">
+                <a:solidFill>
+                  <a:srgbClr val="1C1B19"/>
+                </a:solidFill>
+                <a:latin typeface="Source Serif 4"/>
+              </a:rPr>
+              <a:t>Something small from this week, on your card. A request you could make, if you want one.</a:t>
+            </a:r>
+          </a:p>
+        </p:txBody>
+      </p:sp>
+      <p:sp>
+        <p:nvSpPr>
+          <p:cNvPr id="7" name="Rectangle 6"/>
           <p:cNvSpPr/>
           <p:nvPr/>
         </p:nvSpPr>
         <p:spPr>
           <a:xfrm>
-            <a:off x="822960" y="2103120"/>
-            <a:ext cx="3322320" cy="3840480"/>
+            <a:off x="822960" y="4023360"/>
+            <a:ext cx="10515600" cy="1371600"/>
           </a:xfrm>
           <a:prstGeom prst="rect">
             <a:avLst/>
@@ -9509,7 +10118,7 @@
           </a:solidFill>
           <a:ln w="15875">
             <a:solidFill>
-              <a:srgbClr val="D8D2C6"/>
+              <a:srgbClr val="1C1B19"/>
             </a:solidFill>
           </a:ln>
           <a:effectLst/>
@@ -9538,14 +10147,14 @@
       </p:sp>
       <p:sp>
         <p:nvSpPr>
-          <p:cNvPr id="7" name="TextBox 6"/>
+          <p:cNvPr id="8" name="TextBox 7"/>
           <p:cNvSpPr txBox="1"/>
           <p:nvPr/>
         </p:nvSpPr>
         <p:spPr>
           <a:xfrm>
-            <a:off x="1051560" y="2286000"/>
-            <a:ext cx="2865120" cy="365760"/>
+            <a:off x="1097280" y="4206240"/>
+            <a:ext cx="10058400" cy="365760"/>
           </a:xfrm>
           <a:prstGeom prst="rect">
             <a:avLst/>
@@ -9560,31 +10169,31 @@
           <a:p>
             <a:pPr algn="l">
               <a:spcAft>
-                <a:spcPts val="585"/>
-              </a:spcAft>
-            </a:pPr>
-            <a:r>
-              <a:rPr sz="1300" b="1" i="0">
+                <a:spcPts val="540"/>
+              </a:spcAft>
+            </a:pPr>
+            <a:r>
+              <a:rPr sz="1200" b="1" i="0">
                 <a:solidFill>
                   <a:srgbClr val="0B2D5B"/>
                 </a:solidFill>
                 <a:latin typeface="Inter Tight"/>
               </a:rPr>
-              <a:t>MARISOL</a:t>
-            </a:r>
-          </a:p>
-        </p:txBody>
-      </p:sp>
-      <p:sp>
-        <p:nvSpPr>
-          <p:cNvPr id="8" name="TextBox 7"/>
+              <a:t>STUDENT PAGE</a:t>
+            </a:r>
+          </a:p>
+        </p:txBody>
+      </p:sp>
+      <p:sp>
+        <p:nvSpPr>
+          <p:cNvPr id="9" name="TextBox 8"/>
           <p:cNvSpPr txBox="1"/>
           <p:nvPr/>
         </p:nvSpPr>
         <p:spPr>
           <a:xfrm>
-            <a:off x="1051560" y="2743200"/>
-            <a:ext cx="2865120" cy="3017520"/>
+            <a:off x="1097280" y="4617720"/>
+            <a:ext cx="10058400" cy="640080"/>
           </a:xfrm>
           <a:prstGeom prst="rect">
             <a:avLst/>
@@ -9599,265 +10208,17 @@
           <a:p>
             <a:pPr algn="l">
               <a:spcAft>
-                <a:spcPts val="810"/>
-              </a:spcAft>
-            </a:pPr>
-            <a:r>
-              <a:rPr sz="1800" b="0" i="0">
+                <a:spcPts val="900"/>
+              </a:spcAft>
+            </a:pPr>
+            <a:r>
+              <a:rPr sz="2000" b="0" i="0">
                 <a:solidFill>
                   <a:srgbClr val="1C1B19"/>
                 </a:solidFill>
-                <a:latin typeface="Source Serif 4"/>
-              </a:rPr>
-              <a:t>Asked for a Saturday off a month ago. Her manager gave it to a coworker who asked last week, and scheduled Marisol to close.</a:t>
-            </a:r>
-          </a:p>
-        </p:txBody>
-      </p:sp>
-      <p:sp>
-        <p:nvSpPr>
-          <p:cNvPr id="9" name="Rectangle 8"/>
-          <p:cNvSpPr/>
-          <p:nvPr/>
-        </p:nvSpPr>
-        <p:spPr>
-          <a:xfrm>
-            <a:off x="4419600" y="2103120"/>
-            <a:ext cx="3322320" cy="3840480"/>
-          </a:xfrm>
-          <a:prstGeom prst="rect">
-            <a:avLst/>
-          </a:prstGeom>
-          <a:solidFill>
-            <a:srgbClr val="FFFFFF"/>
-          </a:solidFill>
-          <a:ln w="15875">
-            <a:solidFill>
-              <a:srgbClr val="D8D2C6"/>
-            </a:solidFill>
-          </a:ln>
-          <a:effectLst/>
-        </p:spPr>
-        <p:style>
-          <a:lnRef idx="1">
-            <a:schemeClr val="accent1"/>
-          </a:lnRef>
-          <a:fillRef idx="3">
-            <a:schemeClr val="accent1"/>
-          </a:fillRef>
-          <a:effectRef idx="2">
-            <a:schemeClr val="accent1"/>
-          </a:effectRef>
-          <a:fontRef idx="minor">
-            <a:schemeClr val="lt1"/>
-          </a:fontRef>
-        </p:style>
-        <p:txBody>
-          <a:bodyPr rtlCol="0" anchor="ctr"/>
-          <a:lstStyle/>
-          <a:p>
-            <a:pPr algn="ctr"/>
-          </a:p>
-        </p:txBody>
-      </p:sp>
-      <p:sp>
-        <p:nvSpPr>
-          <p:cNvPr id="10" name="TextBox 9"/>
-          <p:cNvSpPr txBox="1"/>
-          <p:nvPr/>
-        </p:nvSpPr>
-        <p:spPr>
-          <a:xfrm>
-            <a:off x="4648200" y="2286000"/>
-            <a:ext cx="2865120" cy="365760"/>
-          </a:xfrm>
-          <a:prstGeom prst="rect">
-            <a:avLst/>
-          </a:prstGeom>
-          <a:noFill/>
-        </p:spPr>
-        <p:txBody>
-          <a:bodyPr wrap="square" anchor="t" lIns="0" rIns="0" tIns="0" bIns="0">
-            <a:spAutoFit/>
-          </a:bodyPr>
-          <a:lstStyle/>
-          <a:p>
-            <a:pPr algn="l">
-              <a:spcAft>
-                <a:spcPts val="585"/>
-              </a:spcAft>
-            </a:pPr>
-            <a:r>
-              <a:rPr sz="1300" b="1" i="0">
-                <a:solidFill>
-                  <a:srgbClr val="0B2D5B"/>
-                </a:solidFill>
                 <a:latin typeface="Inter Tight"/>
               </a:rPr>
-              <a:t>TUAN</a:t>
-            </a:r>
-          </a:p>
-        </p:txBody>
-      </p:sp>
-      <p:sp>
-        <p:nvSpPr>
-          <p:cNvPr id="11" name="TextBox 10"/>
-          <p:cNvSpPr txBox="1"/>
-          <p:nvPr/>
-        </p:nvSpPr>
-        <p:spPr>
-          <a:xfrm>
-            <a:off x="4648200" y="2743200"/>
-            <a:ext cx="2865120" cy="3017520"/>
-          </a:xfrm>
-          <a:prstGeom prst="rect">
-            <a:avLst/>
-          </a:prstGeom>
-          <a:noFill/>
-        </p:spPr>
-        <p:txBody>
-          <a:bodyPr wrap="square" anchor="t" lIns="0" rIns="0" tIns="0" bIns="0">
-            <a:spAutoFit/>
-          </a:bodyPr>
-          <a:lstStyle/>
-          <a:p>
-            <a:pPr algn="l">
-              <a:spcAft>
-                <a:spcPts val="810"/>
-              </a:spcAft>
-            </a:pPr>
-            <a:r>
-              <a:rPr sz="1800" b="0" i="0">
-                <a:solidFill>
-                  <a:srgbClr val="1C1B19"/>
-                </a:solidFill>
-                <a:latin typeface="Source Serif 4"/>
-              </a:rPr>
-              <a:t>Translates at his parents' medical appointments and helps with bills. It matters to him. At school nobody knows. He feels drained and kind of invisible.</a:t>
-            </a:r>
-          </a:p>
-        </p:txBody>
-      </p:sp>
-      <p:sp>
-        <p:nvSpPr>
-          <p:cNvPr id="12" name="Rectangle 11"/>
-          <p:cNvSpPr/>
-          <p:nvPr/>
-        </p:nvSpPr>
-        <p:spPr>
-          <a:xfrm>
-            <a:off x="8016239" y="2103120"/>
-            <a:ext cx="3322320" cy="3840480"/>
-          </a:xfrm>
-          <a:prstGeom prst="rect">
-            <a:avLst/>
-          </a:prstGeom>
-          <a:solidFill>
-            <a:srgbClr val="FFFFFF"/>
-          </a:solidFill>
-          <a:ln w="15875">
-            <a:solidFill>
-              <a:srgbClr val="D8D2C6"/>
-            </a:solidFill>
-          </a:ln>
-          <a:effectLst/>
-        </p:spPr>
-        <p:style>
-          <a:lnRef idx="1">
-            <a:schemeClr val="accent1"/>
-          </a:lnRef>
-          <a:fillRef idx="3">
-            <a:schemeClr val="accent1"/>
-          </a:fillRef>
-          <a:effectRef idx="2">
-            <a:schemeClr val="accent1"/>
-          </a:effectRef>
-          <a:fontRef idx="minor">
-            <a:schemeClr val="lt1"/>
-          </a:fontRef>
-        </p:style>
-        <p:txBody>
-          <a:bodyPr rtlCol="0" anchor="ctr"/>
-          <a:lstStyle/>
-          <a:p>
-            <a:pPr algn="ctr"/>
-          </a:p>
-        </p:txBody>
-      </p:sp>
-      <p:sp>
-        <p:nvSpPr>
-          <p:cNvPr id="13" name="TextBox 12"/>
-          <p:cNvSpPr txBox="1"/>
-          <p:nvPr/>
-        </p:nvSpPr>
-        <p:spPr>
-          <a:xfrm>
-            <a:off x="8244839" y="2286000"/>
-            <a:ext cx="2865120" cy="365760"/>
-          </a:xfrm>
-          <a:prstGeom prst="rect">
-            <a:avLst/>
-          </a:prstGeom>
-          <a:noFill/>
-        </p:spPr>
-        <p:txBody>
-          <a:bodyPr wrap="square" anchor="t" lIns="0" rIns="0" tIns="0" bIns="0">
-            <a:spAutoFit/>
-          </a:bodyPr>
-          <a:lstStyle/>
-          <a:p>
-            <a:pPr algn="l">
-              <a:spcAft>
-                <a:spcPts val="585"/>
-              </a:spcAft>
-            </a:pPr>
-            <a:r>
-              <a:rPr sz="1300" b="1" i="0">
-                <a:solidFill>
-                  <a:srgbClr val="0B2D5B"/>
-                </a:solidFill>
-                <a:latin typeface="Inter Tight"/>
-              </a:rPr>
-              <a:t>NADIA</a:t>
-            </a:r>
-          </a:p>
-        </p:txBody>
-      </p:sp>
-      <p:sp>
-        <p:nvSpPr>
-          <p:cNvPr id="14" name="TextBox 13"/>
-          <p:cNvSpPr txBox="1"/>
-          <p:nvPr/>
-        </p:nvSpPr>
-        <p:spPr>
-          <a:xfrm>
-            <a:off x="8244839" y="2743200"/>
-            <a:ext cx="2865120" cy="3017520"/>
-          </a:xfrm>
-          <a:prstGeom prst="rect">
-            <a:avLst/>
-          </a:prstGeom>
-          <a:noFill/>
-        </p:spPr>
-        <p:txBody>
-          <a:bodyPr wrap="square" anchor="t" lIns="0" rIns="0" tIns="0" bIns="0">
-            <a:spAutoFit/>
-          </a:bodyPr>
-          <a:lstStyle/>
-          <a:p>
-            <a:pPr algn="l">
-              <a:spcAft>
-                <a:spcPts val="810"/>
-              </a:spcAft>
-            </a:pPr>
-            <a:r>
-              <a:rPr sz="1800" b="0" i="0">
-                <a:solidFill>
-                  <a:srgbClr val="1C1B19"/>
-                </a:solidFill>
-                <a:latin typeface="Source Serif 4"/>
-              </a:rPr>
-              <a:t>Wants to apply to colleges across the country. Her parents want her close to home. Every conversation ends in silence.</a:t>
+              <a:t>https://rmwtoolkit.github.io/bcds-toolkit/name-the-need-high-school.html</a:t>
             </a:r>
           </a:p>
         </p:txBody>

--- a/decks/name-the-need-lesson-v2.pptx
+++ b/decks/name-the-need-lesson-v2.pptx
@@ -6688,6 +6688,45 @@
                 <a:latin typeface="Inter Tight"/>
               </a:rPr>
               <a:t>Beaver Upper School · Counseling</a:t>
+            </a:r>
+          </a:p>
+        </p:txBody>
+      </p:sp>
+      <p:sp>
+        <p:nvSpPr>
+          <p:cNvPr id="8" name="TextBox 7"/>
+          <p:cNvSpPr txBox="1"/>
+          <p:nvPr/>
+        </p:nvSpPr>
+        <p:spPr>
+          <a:xfrm>
+            <a:off x="6766560" y="5897880"/>
+            <a:ext cx="4846320" cy="640080"/>
+          </a:xfrm>
+          <a:prstGeom prst="rect">
+            <a:avLst/>
+          </a:prstGeom>
+          <a:noFill/>
+        </p:spPr>
+        <p:txBody>
+          <a:bodyPr wrap="square" anchor="t" lIns="0" rIns="0" tIns="0" bIns="0">
+            <a:spAutoFit/>
+          </a:bodyPr>
+          <a:lstStyle/>
+          <a:p>
+            <a:pPr algn="r">
+              <a:spcAft>
+                <a:spcPts val="495"/>
+              </a:spcAft>
+            </a:pPr>
+            <a:r>
+              <a:rPr sz="1100" b="0" i="0">
+                <a:solidFill>
+                  <a:srgbClr val="E8E4DA"/>
+                </a:solidFill>
+                <a:latin typeface="Inter Tight"/>
+              </a:rPr>
+              <a:t>Written by Dr. Rick Wilson, with AI-assisted drafting. Every lesson is reviewed and edited by Dr. Wilson.</a:t>
             </a:r>
           </a:p>
         </p:txBody>
